--- a/Презентация.pptx
+++ b/Презентация.pptx
@@ -216,7 +216,7 @@
           <a:p>
             <a:fld id="{5851A9A9-2245-4E97-B235-5B011A4152DA}" type="datetimeFigureOut">
               <a:rPr lang="ru-RU" smtClean="0"/>
-              <a:t>27.05.2026</a:t>
+              <a:t>29.05.2026</a:t>
             </a:fld>
             <a:endParaRPr lang="ru-RU"/>
           </a:p>
@@ -2196,7 +2196,7 @@
           <a:p>
             <a:fld id="{BC746F3E-D9D4-428F-AE2E-829871699F6C}" type="datetimeFigureOut">
               <a:rPr lang="ru-RU" smtClean="0"/>
-              <a:t>27.05.2026</a:t>
+              <a:t>29.05.2026</a:t>
             </a:fld>
             <a:endParaRPr lang="ru-RU"/>
           </a:p>
@@ -2394,7 +2394,7 @@
           <a:p>
             <a:fld id="{BC746F3E-D9D4-428F-AE2E-829871699F6C}" type="datetimeFigureOut">
               <a:rPr lang="ru-RU" smtClean="0"/>
-              <a:t>27.05.2026</a:t>
+              <a:t>29.05.2026</a:t>
             </a:fld>
             <a:endParaRPr lang="ru-RU"/>
           </a:p>
@@ -2602,7 +2602,7 @@
           <a:p>
             <a:fld id="{BC746F3E-D9D4-428F-AE2E-829871699F6C}" type="datetimeFigureOut">
               <a:rPr lang="ru-RU" smtClean="0"/>
-              <a:t>27.05.2026</a:t>
+              <a:t>29.05.2026</a:t>
             </a:fld>
             <a:endParaRPr lang="ru-RU"/>
           </a:p>
@@ -2925,7 +2925,7 @@
           <a:p>
             <a:fld id="{BC746F3E-D9D4-428F-AE2E-829871699F6C}" type="datetimeFigureOut">
               <a:rPr lang="ru-RU" smtClean="0"/>
-              <a:t>27.05.2026</a:t>
+              <a:t>29.05.2026</a:t>
             </a:fld>
             <a:endParaRPr lang="ru-RU"/>
           </a:p>
@@ -3200,7 +3200,7 @@
           <a:p>
             <a:fld id="{BC746F3E-D9D4-428F-AE2E-829871699F6C}" type="datetimeFigureOut">
               <a:rPr lang="ru-RU" smtClean="0"/>
-              <a:t>27.05.2026</a:t>
+              <a:t>29.05.2026</a:t>
             </a:fld>
             <a:endParaRPr lang="ru-RU"/>
           </a:p>
@@ -3465,7 +3465,7 @@
           <a:p>
             <a:fld id="{BC746F3E-D9D4-428F-AE2E-829871699F6C}" type="datetimeFigureOut">
               <a:rPr lang="ru-RU" smtClean="0"/>
-              <a:t>27.05.2026</a:t>
+              <a:t>29.05.2026</a:t>
             </a:fld>
             <a:endParaRPr lang="ru-RU"/>
           </a:p>
@@ -3877,7 +3877,7 @@
           <a:p>
             <a:fld id="{BC746F3E-D9D4-428F-AE2E-829871699F6C}" type="datetimeFigureOut">
               <a:rPr lang="ru-RU" smtClean="0"/>
-              <a:t>27.05.2026</a:t>
+              <a:t>29.05.2026</a:t>
             </a:fld>
             <a:endParaRPr lang="ru-RU"/>
           </a:p>
@@ -4018,7 +4018,7 @@
           <a:p>
             <a:fld id="{BC746F3E-D9D4-428F-AE2E-829871699F6C}" type="datetimeFigureOut">
               <a:rPr lang="ru-RU" smtClean="0"/>
-              <a:t>27.05.2026</a:t>
+              <a:t>29.05.2026</a:t>
             </a:fld>
             <a:endParaRPr lang="ru-RU"/>
           </a:p>
@@ -4131,7 +4131,7 @@
           <a:p>
             <a:fld id="{BC746F3E-D9D4-428F-AE2E-829871699F6C}" type="datetimeFigureOut">
               <a:rPr lang="ru-RU" smtClean="0"/>
-              <a:t>27.05.2026</a:t>
+              <a:t>29.05.2026</a:t>
             </a:fld>
             <a:endParaRPr lang="ru-RU"/>
           </a:p>
@@ -4442,7 +4442,7 @@
           <a:p>
             <a:fld id="{BC746F3E-D9D4-428F-AE2E-829871699F6C}" type="datetimeFigureOut">
               <a:rPr lang="ru-RU" smtClean="0"/>
-              <a:t>27.05.2026</a:t>
+              <a:t>29.05.2026</a:t>
             </a:fld>
             <a:endParaRPr lang="ru-RU"/>
           </a:p>
@@ -4730,7 +4730,7 @@
           <a:p>
             <a:fld id="{BC746F3E-D9D4-428F-AE2E-829871699F6C}" type="datetimeFigureOut">
               <a:rPr lang="ru-RU" smtClean="0"/>
-              <a:t>27.05.2026</a:t>
+              <a:t>29.05.2026</a:t>
             </a:fld>
             <a:endParaRPr lang="ru-RU"/>
           </a:p>
@@ -4971,7 +4971,7 @@
           <a:p>
             <a:fld id="{BC746F3E-D9D4-428F-AE2E-829871699F6C}" type="datetimeFigureOut">
               <a:rPr lang="ru-RU" smtClean="0"/>
-              <a:t>27.05.2026</a:t>
+              <a:t>29.05.2026</a:t>
             </a:fld>
             <a:endParaRPr lang="ru-RU"/>
           </a:p>
@@ -5413,7 +5413,7 @@
         </p:spPr>
         <p:txBody>
           <a:bodyPr>
-            <a:normAutofit fontScale="90000"/>
+            <a:normAutofit/>
           </a:bodyPr>
           <a:lstStyle/>
           <a:p>
@@ -5423,6 +5423,8 @@
                 <a:solidFill>
                   <a:schemeClr val="accent1"/>
                 </a:solidFill>
+                <a:latin typeface="Times New Roman" panose="02020603050405020304" pitchFamily="18" charset="0"/>
+                <a:cs typeface="Times New Roman" panose="02020603050405020304" pitchFamily="18" charset="0"/>
               </a:rPr>
               <a:t>Разработка модуля организации образовательного процесса и системы поддержки пользователей</a:t>
             </a:r>
@@ -5448,7 +5450,7 @@
         <p:spPr>
           <a:xfrm>
             <a:off x="205274" y="5217496"/>
-            <a:ext cx="4180113" cy="780857"/>
+            <a:ext cx="4376251" cy="780857"/>
           </a:xfrm>
         </p:spPr>
         <p:txBody>
@@ -5459,7 +5461,7 @@
           <a:p>
             <a:pPr algn="l"/>
             <a:r>
-              <a:rPr lang="ru-RU" sz="1600" dirty="0">
+              <a:rPr lang="ru-RU" sz="1800" dirty="0">
                 <a:latin typeface="Times New Roman" panose="02020603050405020304" pitchFamily="18" charset="0"/>
                 <a:cs typeface="Times New Roman" panose="02020603050405020304" pitchFamily="18" charset="0"/>
               </a:rPr>
@@ -5469,7 +5471,7 @@
           <a:p>
             <a:pPr algn="l"/>
             <a:r>
-              <a:rPr lang="ru-RU" sz="1600" dirty="0">
+              <a:rPr lang="ru-RU" sz="1800" dirty="0">
                 <a:latin typeface="Times New Roman" panose="02020603050405020304" pitchFamily="18" charset="0"/>
                 <a:cs typeface="Times New Roman" panose="02020603050405020304" pitchFamily="18" charset="0"/>
               </a:rPr>
@@ -5507,36 +5509,57 @@
           <a:p>
             <a:pPr algn="ctr"/>
             <a:r>
-              <a:rPr lang="ru-RU" dirty="0"/>
+              <a:rPr lang="ru-RU" dirty="0">
+                <a:latin typeface="Times New Roman" panose="02020603050405020304" pitchFamily="18" charset="0"/>
+                <a:cs typeface="Times New Roman" panose="02020603050405020304" pitchFamily="18" charset="0"/>
+              </a:rPr>
               <a:t>Министерства науки и высшего образования Российской Федерации</a:t>
             </a:r>
             <a:br>
-              <a:rPr lang="ru-RU" dirty="0"/>
+              <a:rPr lang="ru-RU" dirty="0">
+                <a:latin typeface="Times New Roman" panose="02020603050405020304" pitchFamily="18" charset="0"/>
+                <a:cs typeface="Times New Roman" panose="02020603050405020304" pitchFamily="18" charset="0"/>
+              </a:rPr>
             </a:br>
             <a:r>
-              <a:rPr lang="ru-RU" dirty="0"/>
+              <a:rPr lang="ru-RU" dirty="0">
+                <a:latin typeface="Times New Roman" panose="02020603050405020304" pitchFamily="18" charset="0"/>
+                <a:cs typeface="Times New Roman" panose="02020603050405020304" pitchFamily="18" charset="0"/>
+              </a:rPr>
               <a:t>Федеральное государственное бюджетное образовательное учреждение высшего образования</a:t>
             </a:r>
           </a:p>
           <a:p>
             <a:pPr algn="ctr"/>
             <a:r>
-              <a:rPr lang="ru-RU" dirty="0"/>
+              <a:rPr lang="ru-RU" dirty="0">
+                <a:latin typeface="Times New Roman" panose="02020603050405020304" pitchFamily="18" charset="0"/>
+                <a:cs typeface="Times New Roman" panose="02020603050405020304" pitchFamily="18" charset="0"/>
+              </a:rPr>
               <a:t>«Заполярный государственный университет им </a:t>
             </a:r>
             <a:r>
-              <a:rPr lang="ru-RU" dirty="0" err="1"/>
+              <a:rPr lang="ru-RU" dirty="0" err="1">
+                <a:latin typeface="Times New Roman" panose="02020603050405020304" pitchFamily="18" charset="0"/>
+                <a:cs typeface="Times New Roman" panose="02020603050405020304" pitchFamily="18" charset="0"/>
+              </a:rPr>
               <a:t>Н.М.Федоровского</a:t>
             </a:r>
             <a:r>
-              <a:rPr lang="ru-RU" dirty="0"/>
+              <a:rPr lang="ru-RU" dirty="0">
+                <a:latin typeface="Times New Roman" panose="02020603050405020304" pitchFamily="18" charset="0"/>
+                <a:cs typeface="Times New Roman" panose="02020603050405020304" pitchFamily="18" charset="0"/>
+              </a:rPr>
               <a:t>»</a:t>
             </a:r>
           </a:p>
           <a:p>
             <a:pPr algn="ctr"/>
             <a:r>
-              <a:rPr lang="ru-RU" dirty="0"/>
+              <a:rPr lang="ru-RU" dirty="0">
+                <a:latin typeface="Times New Roman" panose="02020603050405020304" pitchFamily="18" charset="0"/>
+                <a:cs typeface="Times New Roman" panose="02020603050405020304" pitchFamily="18" charset="0"/>
+              </a:rPr>
               <a:t>Кафедра информационных систем и технологий</a:t>
             </a:r>
           </a:p>
@@ -5571,7 +5594,10 @@
           <a:p>
             <a:pPr algn="ctr"/>
             <a:r>
-              <a:rPr lang="ru-RU" dirty="0"/>
+              <a:rPr lang="ru-RU" dirty="0">
+                <a:latin typeface="Times New Roman" panose="02020603050405020304" pitchFamily="18" charset="0"/>
+                <a:cs typeface="Times New Roman" panose="02020603050405020304" pitchFamily="18" charset="0"/>
+              </a:rPr>
               <a:t>Выпускная квалификационная работа на тему:</a:t>
             </a:r>
           </a:p>
@@ -5592,7 +5618,7 @@
         <p:spPr>
           <a:xfrm>
             <a:off x="8994709" y="5315536"/>
-            <a:ext cx="2917371" cy="584775"/>
+            <a:ext cx="2917371" cy="646331"/>
           </a:xfrm>
           <a:prstGeom prst="rect">
             <a:avLst/>
@@ -5606,7 +5632,7 @@
           <a:p>
             <a:pPr algn="r"/>
             <a:r>
-              <a:rPr lang="ru-RU" sz="1600" dirty="0">
+              <a:rPr lang="ru-RU" dirty="0">
                 <a:latin typeface="Times New Roman" panose="02020603050405020304" pitchFamily="18" charset="0"/>
                 <a:cs typeface="Times New Roman" panose="02020603050405020304" pitchFamily="18" charset="0"/>
               </a:rPr>
@@ -5616,7 +5642,7 @@
           <a:p>
             <a:pPr algn="r"/>
             <a:r>
-              <a:rPr lang="ru-RU" sz="1600" dirty="0">
+              <a:rPr lang="ru-RU" dirty="0">
                 <a:latin typeface="Times New Roman" panose="02020603050405020304" pitchFamily="18" charset="0"/>
                 <a:cs typeface="Times New Roman" panose="02020603050405020304" pitchFamily="18" charset="0"/>
               </a:rPr>
@@ -5721,9 +5747,9 @@
                 <a:solidFill>
                   <a:srgbClr val="202A36"/>
                 </a:solidFill>
-                <a:latin typeface="Arial" pitchFamily="34" charset="0"/>
+                <a:latin typeface="Times New Roman" panose="02020603050405020304" pitchFamily="18" charset="0"/>
                 <a:ea typeface="Arial" pitchFamily="34" charset="-122"/>
-                <a:cs typeface="Arial" pitchFamily="34" charset="-120"/>
+                <a:cs typeface="Times New Roman" panose="02020603050405020304" pitchFamily="18" charset="0"/>
               </a:rPr>
               <a:t>Системный анализ </a:t>
             </a:r>
@@ -5732,13 +5758,16 @@
                 <a:solidFill>
                   <a:srgbClr val="202A36"/>
                 </a:solidFill>
-                <a:latin typeface="Arial" pitchFamily="34" charset="0"/>
+                <a:latin typeface="Times New Roman" panose="02020603050405020304" pitchFamily="18" charset="0"/>
                 <a:ea typeface="Arial" pitchFamily="34" charset="-122"/>
-                <a:cs typeface="Arial" pitchFamily="34" charset="-120"/>
+                <a:cs typeface="Times New Roman" panose="02020603050405020304" pitchFamily="18" charset="0"/>
               </a:rPr>
               <a:t>DFD TO-BE</a:t>
             </a:r>
-            <a:endParaRPr lang="en-US" sz="1850" dirty="0"/>
+            <a:endParaRPr lang="en-US" sz="1850" dirty="0">
+              <a:latin typeface="Times New Roman" panose="02020603050405020304" pitchFamily="18" charset="0"/>
+              <a:cs typeface="Times New Roman" panose="02020603050405020304" pitchFamily="18" charset="0"/>
+            </a:endParaRPr>
           </a:p>
         </p:txBody>
       </p:sp>
@@ -5830,28 +5859,31 @@
           <a:lstStyle/>
           <a:p>
             <a:r>
-              <a:rPr lang="ru-RU" sz="1850" b="1" dirty="0">
+              <a:rPr lang="ru-RU" sz="1900" b="1" dirty="0">
                 <a:solidFill>
                   <a:srgbClr val="202A36"/>
                 </a:solidFill>
-                <a:latin typeface="Arial" pitchFamily="34" charset="0"/>
+                <a:latin typeface="Times New Roman" panose="02020603050405020304" pitchFamily="18" charset="0"/>
                 <a:ea typeface="Arial" pitchFamily="34" charset="-122"/>
-                <a:cs typeface="Arial" pitchFamily="34" charset="-120"/>
+                <a:cs typeface="Times New Roman" panose="02020603050405020304" pitchFamily="18" charset="0"/>
               </a:rPr>
               <a:t>Системный анализ </a:t>
             </a:r>
             <a:r>
-              <a:rPr lang="en-US" sz="1850" b="1" dirty="0">
+              <a:rPr lang="en-US" sz="1900" b="1" dirty="0">
                 <a:solidFill>
                   <a:srgbClr val="202A36"/>
                 </a:solidFill>
-                <a:latin typeface="Arial" pitchFamily="34" charset="0"/>
+                <a:latin typeface="Times New Roman" panose="02020603050405020304" pitchFamily="18" charset="0"/>
                 <a:ea typeface="Arial" pitchFamily="34" charset="-122"/>
-                <a:cs typeface="Arial" pitchFamily="34" charset="-120"/>
+                <a:cs typeface="Times New Roman" panose="02020603050405020304" pitchFamily="18" charset="0"/>
               </a:rPr>
               <a:t>DFD TO-BE</a:t>
             </a:r>
-            <a:endParaRPr lang="en-US" sz="1850" dirty="0"/>
+            <a:endParaRPr lang="en-US" sz="1900" dirty="0">
+              <a:latin typeface="Times New Roman" panose="02020603050405020304" pitchFamily="18" charset="0"/>
+              <a:cs typeface="Times New Roman" panose="02020603050405020304" pitchFamily="18" charset="0"/>
+            </a:endParaRPr>
           </a:p>
         </p:txBody>
       </p:sp>
@@ -5939,28 +5971,31 @@
           <a:lstStyle/>
           <a:p>
             <a:r>
-              <a:rPr lang="ru-RU" sz="1850" b="1" dirty="0">
+              <a:rPr lang="ru-RU" sz="1900" b="1" dirty="0">
                 <a:solidFill>
                   <a:srgbClr val="202A36"/>
                 </a:solidFill>
-                <a:latin typeface="Arial" pitchFamily="34" charset="0"/>
+                <a:latin typeface="Times New Roman" panose="02020603050405020304" pitchFamily="18" charset="0"/>
                 <a:ea typeface="Arial" pitchFamily="34" charset="-122"/>
-                <a:cs typeface="Arial" pitchFamily="34" charset="-120"/>
+                <a:cs typeface="Times New Roman" panose="02020603050405020304" pitchFamily="18" charset="0"/>
               </a:rPr>
               <a:t>Системный анализ </a:t>
             </a:r>
             <a:r>
-              <a:rPr lang="en-US" sz="1850" b="1" dirty="0">
+              <a:rPr lang="en-US" sz="1900" b="1" dirty="0">
                 <a:solidFill>
                   <a:srgbClr val="202A36"/>
                 </a:solidFill>
-                <a:latin typeface="Arial" pitchFamily="34" charset="0"/>
+                <a:latin typeface="Times New Roman" panose="02020603050405020304" pitchFamily="18" charset="0"/>
                 <a:ea typeface="Arial" pitchFamily="34" charset="-122"/>
-                <a:cs typeface="Arial" pitchFamily="34" charset="-120"/>
+                <a:cs typeface="Times New Roman" panose="02020603050405020304" pitchFamily="18" charset="0"/>
               </a:rPr>
               <a:t>IDEF0 TO-BE</a:t>
             </a:r>
-            <a:endParaRPr lang="en-US" sz="1850" dirty="0"/>
+            <a:endParaRPr lang="en-US" sz="1900" dirty="0">
+              <a:latin typeface="Times New Roman" panose="02020603050405020304" pitchFamily="18" charset="0"/>
+              <a:cs typeface="Times New Roman" panose="02020603050405020304" pitchFamily="18" charset="0"/>
+            </a:endParaRPr>
           </a:p>
         </p:txBody>
       </p:sp>
@@ -6061,9 +6096,9 @@
                 <a:solidFill>
                   <a:srgbClr val="202A36"/>
                 </a:solidFill>
-                <a:latin typeface="Arial" pitchFamily="34" charset="0"/>
+                <a:latin typeface="Times New Roman" panose="02020603050405020304" pitchFamily="18" charset="0"/>
                 <a:ea typeface="Arial" pitchFamily="34" charset="-122"/>
-                <a:cs typeface="Arial" pitchFamily="34" charset="-120"/>
+                <a:cs typeface="Times New Roman" panose="02020603050405020304" pitchFamily="18" charset="0"/>
               </a:rPr>
               <a:t>Системный анализ </a:t>
             </a:r>
@@ -6072,13 +6107,16 @@
                 <a:solidFill>
                   <a:srgbClr val="202A36"/>
                 </a:solidFill>
-                <a:latin typeface="Arial" pitchFamily="34" charset="0"/>
+                <a:latin typeface="Times New Roman" panose="02020603050405020304" pitchFamily="18" charset="0"/>
                 <a:ea typeface="Arial" pitchFamily="34" charset="-122"/>
-                <a:cs typeface="Arial" pitchFamily="34" charset="-120"/>
+                <a:cs typeface="Times New Roman" panose="02020603050405020304" pitchFamily="18" charset="0"/>
               </a:rPr>
               <a:t>IDEF0 TO-BE</a:t>
             </a:r>
-            <a:endParaRPr lang="en-US" sz="1850" dirty="0"/>
+            <a:endParaRPr lang="en-US" sz="1850" dirty="0">
+              <a:latin typeface="Times New Roman" panose="02020603050405020304" pitchFamily="18" charset="0"/>
+              <a:cs typeface="Times New Roman" panose="02020603050405020304" pitchFamily="18" charset="0"/>
+            </a:endParaRPr>
           </a:p>
         </p:txBody>
       </p:sp>
@@ -6178,17 +6216,20 @@
               <a:buNone/>
             </a:pPr>
             <a:r>
-              <a:rPr lang="en-US" sz="1850" b="1" dirty="0">
+              <a:rPr lang="en-US" sz="1900" b="1" dirty="0">
                 <a:solidFill>
                   <a:srgbClr val="202A36"/>
                 </a:solidFill>
-                <a:latin typeface="Arial" pitchFamily="34" charset="0"/>
+                <a:latin typeface="Times New Roman" panose="02020603050405020304" pitchFamily="18" charset="0"/>
                 <a:ea typeface="Arial" pitchFamily="34" charset="-122"/>
-                <a:cs typeface="Arial" pitchFamily="34" charset="-120"/>
+                <a:cs typeface="Times New Roman" panose="02020603050405020304" pitchFamily="18" charset="0"/>
               </a:rPr>
               <a:t>Логическая модель базы данных</a:t>
             </a:r>
-            <a:endParaRPr lang="en-US" sz="1850" dirty="0"/>
+            <a:endParaRPr lang="en-US" sz="1900" dirty="0">
+              <a:latin typeface="Times New Roman" panose="02020603050405020304" pitchFamily="18" charset="0"/>
+              <a:cs typeface="Times New Roman" panose="02020603050405020304" pitchFamily="18" charset="0"/>
+            </a:endParaRPr>
           </a:p>
         </p:txBody>
       </p:sp>
@@ -6274,17 +6315,20 @@
               <a:buNone/>
             </a:pPr>
             <a:r>
-              <a:rPr lang="en-US" sz="1850" b="1" dirty="0">
+              <a:rPr lang="en-US" sz="1900" b="1" dirty="0">
                 <a:solidFill>
                   <a:srgbClr val="202A36"/>
                 </a:solidFill>
-                <a:latin typeface="Arial" pitchFamily="34" charset="0"/>
+                <a:latin typeface="Times New Roman" panose="02020603050405020304" pitchFamily="18" charset="0"/>
                 <a:ea typeface="Arial" pitchFamily="34" charset="-122"/>
-                <a:cs typeface="Arial" pitchFamily="34" charset="-120"/>
+                <a:cs typeface="Times New Roman" panose="02020603050405020304" pitchFamily="18" charset="0"/>
               </a:rPr>
               <a:t>Физическая модель базы данных</a:t>
             </a:r>
-            <a:endParaRPr lang="en-US" sz="1850" dirty="0"/>
+            <a:endParaRPr lang="en-US" sz="1900" dirty="0">
+              <a:latin typeface="Times New Roman" panose="02020603050405020304" pitchFamily="18" charset="0"/>
+              <a:cs typeface="Times New Roman" panose="02020603050405020304" pitchFamily="18" charset="0"/>
+            </a:endParaRPr>
           </a:p>
         </p:txBody>
       </p:sp>
@@ -6368,13 +6412,16 @@
                 <a:solidFill>
                   <a:srgbClr val="202A36"/>
                 </a:solidFill>
-                <a:latin typeface="Arial" pitchFamily="34" charset="0"/>
+                <a:latin typeface="Times New Roman" panose="02020603050405020304" pitchFamily="18" charset="0"/>
                 <a:ea typeface="Arial" pitchFamily="34" charset="-122"/>
-                <a:cs typeface="Arial" pitchFamily="34" charset="-120"/>
+                <a:cs typeface="Times New Roman" panose="02020603050405020304" pitchFamily="18" charset="0"/>
               </a:rPr>
               <a:t>Стек технологий</a:t>
             </a:r>
-            <a:endParaRPr lang="en-US" sz="1850" dirty="0"/>
+            <a:endParaRPr lang="en-US" sz="1850" dirty="0">
+              <a:latin typeface="Times New Roman" panose="02020603050405020304" pitchFamily="18" charset="0"/>
+              <a:cs typeface="Times New Roman" panose="02020603050405020304" pitchFamily="18" charset="0"/>
+            </a:endParaRPr>
           </a:p>
         </p:txBody>
       </p:sp>
@@ -6464,13 +6511,16 @@
                 <a:solidFill>
                   <a:srgbClr val="202A36"/>
                 </a:solidFill>
-                <a:latin typeface="Arial" pitchFamily="34" charset="0"/>
+                <a:latin typeface="Times New Roman" panose="02020603050405020304" pitchFamily="18" charset="0"/>
                 <a:ea typeface="Arial" pitchFamily="34" charset="-122"/>
-                <a:cs typeface="Arial" pitchFamily="34" charset="-120"/>
+                <a:cs typeface="Times New Roman" panose="02020603050405020304" pitchFamily="18" charset="0"/>
               </a:rPr>
               <a:t>Архитектура и развёртывание</a:t>
             </a:r>
-            <a:endParaRPr lang="en-US" sz="1850" dirty="0"/>
+            <a:endParaRPr lang="en-US" sz="1850" dirty="0">
+              <a:latin typeface="Times New Roman" panose="02020603050405020304" pitchFamily="18" charset="0"/>
+              <a:cs typeface="Times New Roman" panose="02020603050405020304" pitchFamily="18" charset="0"/>
+            </a:endParaRPr>
           </a:p>
         </p:txBody>
       </p:sp>
@@ -6550,17 +6600,20 @@
               <a:buNone/>
             </a:pPr>
             <a:r>
-              <a:rPr lang="en-US" sz="1850" b="1" dirty="0">
+              <a:rPr lang="en-US" sz="1900" b="1" dirty="0">
                 <a:solidFill>
                   <a:srgbClr val="202A36"/>
                 </a:solidFill>
-                <a:latin typeface="Arial" pitchFamily="34" charset="0"/>
+                <a:latin typeface="Times New Roman" panose="02020603050405020304" pitchFamily="18" charset="0"/>
                 <a:ea typeface="Arial" pitchFamily="34" charset="-122"/>
-                <a:cs typeface="Arial" pitchFamily="34" charset="-120"/>
+                <a:cs typeface="Times New Roman" panose="02020603050405020304" pitchFamily="18" charset="0"/>
               </a:rPr>
               <a:t>Диаграмма прецедентов</a:t>
             </a:r>
-            <a:endParaRPr lang="en-US" sz="1850" dirty="0"/>
+            <a:endParaRPr lang="en-US" sz="1900" dirty="0">
+              <a:latin typeface="Times New Roman" panose="02020603050405020304" pitchFamily="18" charset="0"/>
+              <a:cs typeface="Times New Roman" panose="02020603050405020304" pitchFamily="18" charset="0"/>
+            </a:endParaRPr>
           </a:p>
         </p:txBody>
       </p:sp>
@@ -7186,46 +7239,19 @@
                 <a:solidFill>
                   <a:srgbClr val="202A36"/>
                 </a:solidFill>
-                <a:latin typeface="Arial" pitchFamily="34" charset="0"/>
+                <a:latin typeface="Times New Roman" panose="02020603050405020304" pitchFamily="18" charset="0"/>
                 <a:ea typeface="Arial" pitchFamily="34" charset="-122"/>
-                <a:cs typeface="Arial" pitchFamily="34" charset="-120"/>
+                <a:cs typeface="Times New Roman" panose="02020603050405020304" pitchFamily="18" charset="0"/>
               </a:rPr>
               <a:t>Актуальность разработки</a:t>
             </a:r>
-            <a:endParaRPr lang="en-US" sz="1900" dirty="0"/>
-          </a:p>
-        </p:txBody>
-      </p:sp>
-      <p:pic>
-        <p:nvPicPr>
-          <p:cNvPr id="3" name="Рисунок 2">
-            <a:extLst>
-              <a:ext uri="{FF2B5EF4-FFF2-40B4-BE49-F238E27FC236}">
-                <a16:creationId xmlns:a16="http://schemas.microsoft.com/office/drawing/2014/main" id="{D703C786-11C4-45E3-BD83-969ECF6249DE}"/>
-              </a:ext>
-            </a:extLst>
-          </p:cNvPr>
-          <p:cNvPicPr>
-            <a:picLocks noChangeAspect="1"/>
-          </p:cNvPicPr>
-          <p:nvPr/>
-        </p:nvPicPr>
-        <p:blipFill>
-          <a:blip r:embed="rId3"/>
-          <a:stretch>
-            <a:fillRect/>
-          </a:stretch>
-        </p:blipFill>
-        <p:spPr>
-          <a:xfrm>
-            <a:off x="7346302" y="982176"/>
-            <a:ext cx="4026905" cy="4305188"/>
-          </a:xfrm>
-          <a:prstGeom prst="ellipse">
-            <a:avLst/>
-          </a:prstGeom>
-        </p:spPr>
-      </p:pic>
+            <a:endParaRPr lang="en-US" sz="1900" dirty="0">
+              <a:latin typeface="Times New Roman" panose="02020603050405020304" pitchFamily="18" charset="0"/>
+              <a:cs typeface="Times New Roman" panose="02020603050405020304" pitchFamily="18" charset="0"/>
+            </a:endParaRPr>
+          </a:p>
+        </p:txBody>
+      </p:sp>
       <p:sp>
         <p:nvSpPr>
           <p:cNvPr id="13" name="Text 5">
@@ -7251,7 +7277,7 @@
         </p:spPr>
         <p:txBody>
           <a:bodyPr wrap="square" lIns="762" tIns="762" rIns="762" bIns="762" rtlCol="0" anchor="t">
-            <a:normAutofit fontScale="85000" lnSpcReduction="10000"/>
+            <a:noAutofit/>
           </a:bodyPr>
           <a:lstStyle/>
           <a:p>
@@ -7384,6 +7410,42 @@
           </a:p>
         </p:txBody>
       </p:sp>
+      <p:pic>
+        <p:nvPicPr>
+          <p:cNvPr id="6" name="Рисунок 5">
+            <a:extLst>
+              <a:ext uri="{FF2B5EF4-FFF2-40B4-BE49-F238E27FC236}">
+                <a16:creationId xmlns:a16="http://schemas.microsoft.com/office/drawing/2014/main" id="{0A652F3A-DA1B-4A54-B684-C15EDBC241B2}"/>
+              </a:ext>
+            </a:extLst>
+          </p:cNvPr>
+          <p:cNvPicPr>
+            <a:picLocks noChangeAspect="1"/>
+          </p:cNvPicPr>
+          <p:nvPr/>
+        </p:nvPicPr>
+        <p:blipFill>
+          <a:blip r:embed="rId3">
+            <a:extLst>
+              <a:ext uri="{28A0092B-C50C-407E-A947-70E740481C1C}">
+                <a14:useLocalDpi xmlns:a14="http://schemas.microsoft.com/office/drawing/2010/main" val="0"/>
+              </a:ext>
+            </a:extLst>
+          </a:blip>
+          <a:stretch>
+            <a:fillRect/>
+          </a:stretch>
+        </p:blipFill>
+        <p:spPr>
+          <a:xfrm>
+            <a:off x="6663690" y="2000250"/>
+            <a:ext cx="5143500" cy="3429000"/>
+          </a:xfrm>
+          <a:prstGeom prst="rect">
+            <a:avLst/>
+          </a:prstGeom>
+        </p:spPr>
+      </p:pic>
     </p:spTree>
   </p:cSld>
   <p:clrMapOvr>
@@ -7739,13 +7801,16 @@
                 <a:solidFill>
                   <a:srgbClr val="202A36"/>
                 </a:solidFill>
-                <a:latin typeface="Arial" pitchFamily="34" charset="0"/>
+                <a:latin typeface="Times New Roman" panose="02020603050405020304" pitchFamily="18" charset="0"/>
                 <a:ea typeface="Arial" pitchFamily="34" charset="-122"/>
-                <a:cs typeface="Arial" pitchFamily="34" charset="-120"/>
+                <a:cs typeface="Times New Roman" panose="02020603050405020304" pitchFamily="18" charset="0"/>
               </a:rPr>
               <a:t>Цель и задачи проекта</a:t>
             </a:r>
-            <a:endParaRPr lang="en-US" sz="1900" dirty="0"/>
+            <a:endParaRPr lang="en-US" sz="1900" dirty="0">
+              <a:latin typeface="Times New Roman" panose="02020603050405020304" pitchFamily="18" charset="0"/>
+              <a:cs typeface="Times New Roman" panose="02020603050405020304" pitchFamily="18" charset="0"/>
+            </a:endParaRPr>
           </a:p>
         </p:txBody>
       </p:sp>
@@ -7757,8 +7822,8 @@
         </p:nvSpPr>
         <p:spPr>
           <a:xfrm>
-            <a:off x="566928" y="1143000"/>
-            <a:ext cx="3749040" cy="4389120"/>
+            <a:off x="457200" y="1143000"/>
+            <a:ext cx="3858768" cy="4389120"/>
           </a:xfrm>
           <a:prstGeom prst="rect">
             <a:avLst/>
@@ -7843,7 +7908,7 @@
         </p:spPr>
         <p:txBody>
           <a:bodyPr wrap="square" lIns="0" tIns="0" rIns="0" bIns="0" rtlCol="0" anchor="t">
-            <a:normAutofit/>
+            <a:noAutofit/>
           </a:bodyPr>
           <a:lstStyle/>
           <a:p>
@@ -7851,17 +7916,20 @@
               <a:buNone/>
             </a:pPr>
             <a:r>
-              <a:rPr lang="en-US" sz="1800" b="1" dirty="0">
+              <a:rPr lang="en-US" sz="2400" b="1" dirty="0">
                 <a:solidFill>
                   <a:srgbClr val="202A36"/>
                 </a:solidFill>
-                <a:latin typeface="Arial" pitchFamily="34" charset="0"/>
+                <a:latin typeface="Times New Roman" panose="02020603050405020304" pitchFamily="18" charset="0"/>
                 <a:ea typeface="Arial" pitchFamily="34" charset="-122"/>
-                <a:cs typeface="Arial" pitchFamily="34" charset="-120"/>
+                <a:cs typeface="Times New Roman" panose="02020603050405020304" pitchFamily="18" charset="0"/>
               </a:rPr>
               <a:t>Задачи</a:t>
             </a:r>
-            <a:endParaRPr lang="en-US" sz="1800" dirty="0"/>
+            <a:endParaRPr lang="en-US" sz="2400" dirty="0">
+              <a:latin typeface="Times New Roman" panose="02020603050405020304" pitchFamily="18" charset="0"/>
+              <a:cs typeface="Times New Roman" panose="02020603050405020304" pitchFamily="18" charset="0"/>
+            </a:endParaRPr>
           </a:p>
         </p:txBody>
       </p:sp>
@@ -7874,7 +7942,7 @@
         <p:spPr>
           <a:xfrm>
             <a:off x="4645152" y="1627632"/>
-            <a:ext cx="6812280" cy="3840480"/>
+            <a:ext cx="6812280" cy="4087368"/>
           </a:xfrm>
           <a:prstGeom prst="rect">
             <a:avLst/>
@@ -7884,7 +7952,7 @@
         </p:spPr>
         <p:txBody>
           <a:bodyPr wrap="square" lIns="762" tIns="762" rIns="762" bIns="762" rtlCol="0" anchor="t">
-            <a:normAutofit/>
+            <a:noAutofit/>
           </a:bodyPr>
           <a:lstStyle/>
           <a:p>
@@ -7892,10 +7960,12 @@
               <a:buNone/>
             </a:pPr>
             <a:r>
-              <a:rPr lang="en-US" dirty="0">
+              <a:rPr lang="en-US" sz="2400" dirty="0">
                 <a:solidFill>
                   <a:srgbClr val="202A36"/>
                 </a:solidFill>
+                <a:latin typeface="Times New Roman" panose="02020603050405020304" pitchFamily="18" charset="0"/>
+                <a:cs typeface="Times New Roman" panose="02020603050405020304" pitchFamily="18" charset="0"/>
               </a:rPr>
               <a:t>• проанализировать AS-IS процесс и выявить ручные операции;
 • спроектировать TO-BE модель с единой базой данных модуля;
@@ -7904,7 +7974,10 @@
 • разработать интерфейсы для ученика, преподавателя, завуча и администратора;
 • проверить сценарии тестированием и оценить эффект по трудоёмкости.</a:t>
             </a:r>
-            <a:endParaRPr lang="en-US" dirty="0"/>
+            <a:endParaRPr lang="en-US" sz="2400" dirty="0">
+              <a:latin typeface="Times New Roman" panose="02020603050405020304" pitchFamily="18" charset="0"/>
+              <a:cs typeface="Times New Roman" panose="02020603050405020304" pitchFamily="18" charset="0"/>
+            </a:endParaRPr>
           </a:p>
         </p:txBody>
       </p:sp>
@@ -7960,48 +8033,2070 @@
               <a:buNone/>
             </a:pPr>
             <a:r>
-              <a:rPr lang="en-US" sz="1850" b="1" dirty="0">
+              <a:rPr lang="en-US" sz="1900" b="1" dirty="0">
                 <a:solidFill>
                   <a:srgbClr val="202A36"/>
                 </a:solidFill>
-                <a:latin typeface="Arial" pitchFamily="34" charset="0"/>
+                <a:latin typeface="Times New Roman" panose="02020603050405020304" pitchFamily="18" charset="0"/>
                 <a:ea typeface="Arial" pitchFamily="34" charset="-122"/>
-                <a:cs typeface="Arial" pitchFamily="34" charset="-120"/>
+                <a:cs typeface="Times New Roman" panose="02020603050405020304" pitchFamily="18" charset="0"/>
               </a:rPr>
               <a:t>Патентный поиск и анализ аналогов</a:t>
             </a:r>
-            <a:endParaRPr lang="en-US" sz="1850" dirty="0"/>
-          </a:p>
-        </p:txBody>
-      </p:sp>
-      <p:pic>
-        <p:nvPicPr>
-          <p:cNvPr id="25" name="Рисунок 24">
+            <a:endParaRPr lang="en-US" sz="1900" dirty="0">
+              <a:latin typeface="Times New Roman" panose="02020603050405020304" pitchFamily="18" charset="0"/>
+              <a:cs typeface="Times New Roman" panose="02020603050405020304" pitchFamily="18" charset="0"/>
+            </a:endParaRPr>
+          </a:p>
+        </p:txBody>
+      </p:sp>
+      <p:graphicFrame>
+        <p:nvGraphicFramePr>
+          <p:cNvPr id="3" name="Таблица 3">
             <a:extLst>
               <a:ext uri="{FF2B5EF4-FFF2-40B4-BE49-F238E27FC236}">
-                <a16:creationId xmlns:a16="http://schemas.microsoft.com/office/drawing/2014/main" id="{8739C9C9-E279-4DCB-8DFE-23098AAD4C69}"/>
+                <a16:creationId xmlns:a16="http://schemas.microsoft.com/office/drawing/2014/main" id="{8FBA7830-0A4D-4FF6-B491-E2A2CAB39CAA}"/>
               </a:ext>
             </a:extLst>
           </p:cNvPr>
-          <p:cNvPicPr/>
-          <p:nvPr/>
-        </p:nvPicPr>
-        <p:blipFill>
-          <a:blip r:embed="rId3"/>
-          <a:stretch>
-            <a:fillRect/>
-          </a:stretch>
-        </p:blipFill>
-        <p:spPr>
-          <a:xfrm>
-            <a:off x="1026367" y="957942"/>
-            <a:ext cx="9386597" cy="5634881"/>
-          </a:xfrm>
-          <a:prstGeom prst="rect">
-            <a:avLst/>
-          </a:prstGeom>
-        </p:spPr>
-      </p:pic>
+          <p:cNvGraphicFramePr>
+            <a:graphicFrameLocks noGrp="1"/>
+          </p:cNvGraphicFramePr>
+          <p:nvPr>
+            <p:extLst>
+              <p:ext uri="{D42A27DB-BD31-4B8C-83A1-F6EECF244321}">
+                <p14:modId xmlns:p14="http://schemas.microsoft.com/office/powerpoint/2010/main" val="2193468554"/>
+              </p:ext>
+            </p:extLst>
+          </p:nvPr>
+        </p:nvGraphicFramePr>
+        <p:xfrm>
+          <a:off x="0" y="676657"/>
+          <a:ext cx="11658600" cy="6181340"/>
+        </p:xfrm>
+        <a:graphic>
+          <a:graphicData uri="http://schemas.openxmlformats.org/drawingml/2006/table">
+            <a:tbl>
+              <a:tblPr firstRow="1" bandRow="1">
+                <a:tableStyleId>{7DF18680-E054-41AD-8BC1-D1AEF772440D}</a:tableStyleId>
+              </a:tblPr>
+              <a:tblGrid>
+                <a:gridCol w="2331720">
+                  <a:extLst>
+                    <a:ext uri="{9D8B030D-6E8A-4147-A177-3AD203B41FA5}">
+                      <a16:colId xmlns:a16="http://schemas.microsoft.com/office/drawing/2014/main" val="3239343588"/>
+                    </a:ext>
+                  </a:extLst>
+                </a:gridCol>
+                <a:gridCol w="2331720">
+                  <a:extLst>
+                    <a:ext uri="{9D8B030D-6E8A-4147-A177-3AD203B41FA5}">
+                      <a16:colId xmlns:a16="http://schemas.microsoft.com/office/drawing/2014/main" val="3089895064"/>
+                    </a:ext>
+                  </a:extLst>
+                </a:gridCol>
+                <a:gridCol w="2331720">
+                  <a:extLst>
+                    <a:ext uri="{9D8B030D-6E8A-4147-A177-3AD203B41FA5}">
+                      <a16:colId xmlns:a16="http://schemas.microsoft.com/office/drawing/2014/main" val="3286095482"/>
+                    </a:ext>
+                  </a:extLst>
+                </a:gridCol>
+                <a:gridCol w="2331720">
+                  <a:extLst>
+                    <a:ext uri="{9D8B030D-6E8A-4147-A177-3AD203B41FA5}">
+                      <a16:colId xmlns:a16="http://schemas.microsoft.com/office/drawing/2014/main" val="1820886624"/>
+                    </a:ext>
+                  </a:extLst>
+                </a:gridCol>
+                <a:gridCol w="2331720">
+                  <a:extLst>
+                    <a:ext uri="{9D8B030D-6E8A-4147-A177-3AD203B41FA5}">
+                      <a16:colId xmlns:a16="http://schemas.microsoft.com/office/drawing/2014/main" val="247666393"/>
+                    </a:ext>
+                  </a:extLst>
+                </a:gridCol>
+              </a:tblGrid>
+              <a:tr h="978966">
+                <a:tc>
+                  <a:txBody>
+                    <a:bodyPr/>
+                    <a:lstStyle/>
+                    <a:p>
+                      <a:pPr algn="ctr" fontAlgn="ctr"/>
+                      <a:r>
+                        <a:rPr lang="ru-RU" sz="1600" b="1" u="none" strike="noStrike" dirty="0">
+                          <a:solidFill>
+                            <a:srgbClr val="000000"/>
+                          </a:solidFill>
+                          <a:effectLst/>
+                          <a:latin typeface="Times New Roman" panose="02020603050405020304" pitchFamily="18" charset="0"/>
+                          <a:cs typeface="Times New Roman" panose="02020603050405020304" pitchFamily="18" charset="0"/>
+                        </a:rPr>
+                        <a:t>Критерий / функция</a:t>
+                      </a:r>
+                      <a:endParaRPr lang="ru-RU" sz="1600" b="1" i="0" u="none" strike="noStrike" dirty="0">
+                        <a:solidFill>
+                          <a:srgbClr val="000000"/>
+                        </a:solidFill>
+                        <a:effectLst/>
+                        <a:latin typeface="Times New Roman" panose="02020603050405020304" pitchFamily="18" charset="0"/>
+                        <a:cs typeface="Times New Roman" panose="02020603050405020304" pitchFamily="18" charset="0"/>
+                      </a:endParaRPr>
+                    </a:p>
+                  </a:txBody>
+                  <a:tcPr marL="7620" marR="7620" marT="7620" marB="0" anchor="ctr"/>
+                </a:tc>
+                <a:tc>
+                  <a:txBody>
+                    <a:bodyPr/>
+                    <a:lstStyle/>
+                    <a:p>
+                      <a:pPr algn="ctr" fontAlgn="ctr"/>
+                      <a:r>
+                        <a:rPr lang="ru-RU" sz="1600" b="1" u="none" strike="noStrike">
+                          <a:solidFill>
+                            <a:srgbClr val="000000"/>
+                          </a:solidFill>
+                          <a:effectLst/>
+                          <a:latin typeface="Times New Roman" panose="02020603050405020304" pitchFamily="18" charset="0"/>
+                          <a:cs typeface="Times New Roman" panose="02020603050405020304" pitchFamily="18" charset="0"/>
+                        </a:rPr>
+                        <a:t>Платформа «Поляная Мартица», модуль «Образование» </a:t>
+                      </a:r>
+                      <a:endParaRPr lang="ru-RU" sz="1600" b="1" i="0" u="none" strike="noStrike">
+                        <a:solidFill>
+                          <a:srgbClr val="000000"/>
+                        </a:solidFill>
+                        <a:effectLst/>
+                        <a:latin typeface="Times New Roman" panose="02020603050405020304" pitchFamily="18" charset="0"/>
+                        <a:cs typeface="Times New Roman" panose="02020603050405020304" pitchFamily="18" charset="0"/>
+                      </a:endParaRPr>
+                    </a:p>
+                  </a:txBody>
+                  <a:tcPr marL="7620" marR="7620" marT="7620" marB="0" anchor="ctr"/>
+                </a:tc>
+                <a:tc>
+                  <a:txBody>
+                    <a:bodyPr/>
+                    <a:lstStyle/>
+                    <a:p>
+                      <a:pPr algn="ctr" fontAlgn="ctr"/>
+                      <a:r>
+                        <a:rPr lang="ru-RU" sz="1600" b="1" u="none" strike="noStrike">
+                          <a:solidFill>
+                            <a:srgbClr val="000000"/>
+                          </a:solidFill>
+                          <a:effectLst/>
+                          <a:latin typeface="Times New Roman" panose="02020603050405020304" pitchFamily="18" charset="0"/>
+                          <a:cs typeface="Times New Roman" panose="02020603050405020304" pitchFamily="18" charset="0"/>
+                        </a:rPr>
+                        <a:t>АИС «Навигатор»</a:t>
+                      </a:r>
+                      <a:endParaRPr lang="ru-RU" sz="1600" b="1" i="0" u="none" strike="noStrike">
+                        <a:solidFill>
+                          <a:srgbClr val="000000"/>
+                        </a:solidFill>
+                        <a:effectLst/>
+                        <a:latin typeface="Times New Roman" panose="02020603050405020304" pitchFamily="18" charset="0"/>
+                        <a:cs typeface="Times New Roman" panose="02020603050405020304" pitchFamily="18" charset="0"/>
+                      </a:endParaRPr>
+                    </a:p>
+                  </a:txBody>
+                  <a:tcPr marL="7620" marR="7620" marT="7620" marB="0" anchor="ctr"/>
+                </a:tc>
+                <a:tc>
+                  <a:txBody>
+                    <a:bodyPr/>
+                    <a:lstStyle/>
+                    <a:p>
+                      <a:pPr algn="ctr" fontAlgn="ctr"/>
+                      <a:r>
+                        <a:rPr lang="ru-RU" sz="1600" b="1" u="none" strike="noStrike">
+                          <a:solidFill>
+                            <a:srgbClr val="000000"/>
+                          </a:solidFill>
+                          <a:effectLst/>
+                          <a:latin typeface="Times New Roman" panose="02020603050405020304" pitchFamily="18" charset="0"/>
+                          <a:cs typeface="Times New Roman" panose="02020603050405020304" pitchFamily="18" charset="0"/>
+                        </a:rPr>
+                        <a:t>Дневник.ру</a:t>
+                      </a:r>
+                      <a:endParaRPr lang="ru-RU" sz="1600" b="1" i="0" u="none" strike="noStrike">
+                        <a:solidFill>
+                          <a:srgbClr val="000000"/>
+                        </a:solidFill>
+                        <a:effectLst/>
+                        <a:latin typeface="Times New Roman" panose="02020603050405020304" pitchFamily="18" charset="0"/>
+                        <a:cs typeface="Times New Roman" panose="02020603050405020304" pitchFamily="18" charset="0"/>
+                      </a:endParaRPr>
+                    </a:p>
+                  </a:txBody>
+                  <a:tcPr marL="7620" marR="7620" marT="7620" marB="0" anchor="ctr"/>
+                </a:tc>
+                <a:tc>
+                  <a:txBody>
+                    <a:bodyPr/>
+                    <a:lstStyle/>
+                    <a:p>
+                      <a:pPr algn="ctr" fontAlgn="ctr"/>
+                      <a:r>
+                        <a:rPr lang="en-US" sz="1600" b="1" u="none" strike="noStrike">
+                          <a:solidFill>
+                            <a:srgbClr val="000000"/>
+                          </a:solidFill>
+                          <a:effectLst/>
+                          <a:latin typeface="Times New Roman" panose="02020603050405020304" pitchFamily="18" charset="0"/>
+                          <a:cs typeface="Times New Roman" panose="02020603050405020304" pitchFamily="18" charset="0"/>
+                        </a:rPr>
+                        <a:t>Moodle</a:t>
+                      </a:r>
+                      <a:endParaRPr lang="en-US" sz="1600" b="1" i="0" u="none" strike="noStrike">
+                        <a:solidFill>
+                          <a:srgbClr val="000000"/>
+                        </a:solidFill>
+                        <a:effectLst/>
+                        <a:latin typeface="Times New Roman" panose="02020603050405020304" pitchFamily="18" charset="0"/>
+                        <a:cs typeface="Times New Roman" panose="02020603050405020304" pitchFamily="18" charset="0"/>
+                      </a:endParaRPr>
+                    </a:p>
+                  </a:txBody>
+                  <a:tcPr marL="7620" marR="7620" marT="7620" marB="0" anchor="ctr"/>
+                </a:tc>
+                <a:extLst>
+                  <a:ext uri="{0D108BD9-81ED-4DB2-BD59-A6C34878D82A}">
+                    <a16:rowId xmlns:a16="http://schemas.microsoft.com/office/drawing/2014/main" val="3643624942"/>
+                  </a:ext>
+                </a:extLst>
+              </a:tr>
+              <a:tr h="492859">
+                <a:tc>
+                  <a:txBody>
+                    <a:bodyPr/>
+                    <a:lstStyle/>
+                    <a:p>
+                      <a:pPr algn="l" fontAlgn="ctr"/>
+                      <a:r>
+                        <a:rPr lang="ru-RU" sz="1600" b="0" u="none" strike="noStrike">
+                          <a:solidFill>
+                            <a:srgbClr val="000000"/>
+                          </a:solidFill>
+                          <a:effectLst/>
+                          <a:latin typeface="Times New Roman" panose="02020603050405020304" pitchFamily="18" charset="0"/>
+                          <a:cs typeface="Times New Roman" panose="02020603050405020304" pitchFamily="18" charset="0"/>
+                        </a:rPr>
+                        <a:t>Каталог программ ДПО</a:t>
+                      </a:r>
+                      <a:endParaRPr lang="ru-RU" sz="1600" b="0" i="0" u="none" strike="noStrike">
+                        <a:solidFill>
+                          <a:srgbClr val="000000"/>
+                        </a:solidFill>
+                        <a:effectLst/>
+                        <a:latin typeface="Times New Roman" panose="02020603050405020304" pitchFamily="18" charset="0"/>
+                        <a:cs typeface="Times New Roman" panose="02020603050405020304" pitchFamily="18" charset="0"/>
+                      </a:endParaRPr>
+                    </a:p>
+                  </a:txBody>
+                  <a:tcPr marL="7620" marR="7620" marT="7620" marB="0" anchor="ctr"/>
+                </a:tc>
+                <a:tc>
+                  <a:txBody>
+                    <a:bodyPr/>
+                    <a:lstStyle/>
+                    <a:p>
+                      <a:pPr algn="l" fontAlgn="ctr"/>
+                      <a:r>
+                        <a:rPr lang="ru-RU" sz="1600" b="0" u="none" strike="noStrike">
+                          <a:solidFill>
+                            <a:srgbClr val="000000"/>
+                          </a:solidFill>
+                          <a:effectLst/>
+                          <a:latin typeface="Times New Roman" panose="02020603050405020304" pitchFamily="18" charset="0"/>
+                          <a:cs typeface="Times New Roman" panose="02020603050405020304" pitchFamily="18" charset="0"/>
+                        </a:rPr>
+                        <a:t>+</a:t>
+                      </a:r>
+                      <a:endParaRPr lang="ru-RU" sz="1600" b="0" i="0" u="none" strike="noStrike">
+                        <a:solidFill>
+                          <a:srgbClr val="000000"/>
+                        </a:solidFill>
+                        <a:effectLst/>
+                        <a:latin typeface="Times New Roman" panose="02020603050405020304" pitchFamily="18" charset="0"/>
+                        <a:cs typeface="Times New Roman" panose="02020603050405020304" pitchFamily="18" charset="0"/>
+                      </a:endParaRPr>
+                    </a:p>
+                  </a:txBody>
+                  <a:tcPr marL="7620" marR="7620" marT="7620" marB="0" anchor="ctr"/>
+                </a:tc>
+                <a:tc>
+                  <a:txBody>
+                    <a:bodyPr/>
+                    <a:lstStyle/>
+                    <a:p>
+                      <a:pPr algn="l" fontAlgn="ctr"/>
+                      <a:r>
+                        <a:rPr lang="ru-RU" sz="1600" b="0" u="none" strike="noStrike">
+                          <a:solidFill>
+                            <a:srgbClr val="000000"/>
+                          </a:solidFill>
+                          <a:effectLst/>
+                          <a:latin typeface="Times New Roman" panose="02020603050405020304" pitchFamily="18" charset="0"/>
+                          <a:cs typeface="Times New Roman" panose="02020603050405020304" pitchFamily="18" charset="0"/>
+                        </a:rPr>
+                        <a:t>+</a:t>
+                      </a:r>
+                      <a:endParaRPr lang="ru-RU" sz="1600" b="0" i="0" u="none" strike="noStrike">
+                        <a:solidFill>
+                          <a:srgbClr val="000000"/>
+                        </a:solidFill>
+                        <a:effectLst/>
+                        <a:latin typeface="Times New Roman" panose="02020603050405020304" pitchFamily="18" charset="0"/>
+                        <a:cs typeface="Times New Roman" panose="02020603050405020304" pitchFamily="18" charset="0"/>
+                      </a:endParaRPr>
+                    </a:p>
+                  </a:txBody>
+                  <a:tcPr marL="7620" marR="7620" marT="7620" marB="0" anchor="ctr"/>
+                </a:tc>
+                <a:tc>
+                  <a:txBody>
+                    <a:bodyPr/>
+                    <a:lstStyle/>
+                    <a:p>
+                      <a:pPr algn="l" fontAlgn="ctr"/>
+                      <a:r>
+                        <a:rPr lang="ru-RU" sz="1600" b="0" u="none" strike="noStrike">
+                          <a:solidFill>
+                            <a:srgbClr val="000000"/>
+                          </a:solidFill>
+                          <a:effectLst/>
+                          <a:latin typeface="Times New Roman" panose="02020603050405020304" pitchFamily="18" charset="0"/>
+                          <a:cs typeface="Times New Roman" panose="02020603050405020304" pitchFamily="18" charset="0"/>
+                        </a:rPr>
+                        <a:t>-</a:t>
+                      </a:r>
+                      <a:endParaRPr lang="ru-RU" sz="1600" b="0" i="0" u="none" strike="noStrike">
+                        <a:solidFill>
+                          <a:srgbClr val="000000"/>
+                        </a:solidFill>
+                        <a:effectLst/>
+                        <a:latin typeface="Times New Roman" panose="02020603050405020304" pitchFamily="18" charset="0"/>
+                        <a:cs typeface="Times New Roman" panose="02020603050405020304" pitchFamily="18" charset="0"/>
+                      </a:endParaRPr>
+                    </a:p>
+                  </a:txBody>
+                  <a:tcPr marL="7620" marR="7620" marT="7620" marB="0" anchor="ctr"/>
+                </a:tc>
+                <a:tc>
+                  <a:txBody>
+                    <a:bodyPr/>
+                    <a:lstStyle/>
+                    <a:p>
+                      <a:pPr algn="l" fontAlgn="ctr"/>
+                      <a:r>
+                        <a:rPr lang="ru-RU" sz="1600" b="0" u="none" strike="noStrike">
+                          <a:solidFill>
+                            <a:srgbClr val="000000"/>
+                          </a:solidFill>
+                          <a:effectLst/>
+                          <a:latin typeface="Times New Roman" panose="02020603050405020304" pitchFamily="18" charset="0"/>
+                          <a:cs typeface="Times New Roman" panose="02020603050405020304" pitchFamily="18" charset="0"/>
+                        </a:rPr>
+                        <a:t>+</a:t>
+                      </a:r>
+                      <a:endParaRPr lang="ru-RU" sz="1600" b="0" i="0" u="none" strike="noStrike">
+                        <a:solidFill>
+                          <a:srgbClr val="000000"/>
+                        </a:solidFill>
+                        <a:effectLst/>
+                        <a:latin typeface="Times New Roman" panose="02020603050405020304" pitchFamily="18" charset="0"/>
+                        <a:cs typeface="Times New Roman" panose="02020603050405020304" pitchFamily="18" charset="0"/>
+                      </a:endParaRPr>
+                    </a:p>
+                  </a:txBody>
+                  <a:tcPr marL="7620" marR="7620" marT="7620" marB="0" anchor="ctr"/>
+                </a:tc>
+                <a:extLst>
+                  <a:ext uri="{0D108BD9-81ED-4DB2-BD59-A6C34878D82A}">
+                    <a16:rowId xmlns:a16="http://schemas.microsoft.com/office/drawing/2014/main" val="267999771"/>
+                  </a:ext>
+                </a:extLst>
+              </a:tr>
+              <a:tr h="551565">
+                <a:tc>
+                  <a:txBody>
+                    <a:bodyPr/>
+                    <a:lstStyle/>
+                    <a:p>
+                      <a:pPr algn="l" fontAlgn="ctr"/>
+                      <a:r>
+                        <a:rPr lang="ru-RU" sz="1600" b="0" u="none" strike="noStrike">
+                          <a:solidFill>
+                            <a:srgbClr val="000000"/>
+                          </a:solidFill>
+                          <a:effectLst/>
+                          <a:latin typeface="Times New Roman" panose="02020603050405020304" pitchFamily="18" charset="0"/>
+                          <a:cs typeface="Times New Roman" panose="02020603050405020304" pitchFamily="18" charset="0"/>
+                        </a:rPr>
+                        <a:t>Подача заявки на обучение</a:t>
+                      </a:r>
+                      <a:endParaRPr lang="ru-RU" sz="1600" b="0" i="0" u="none" strike="noStrike">
+                        <a:solidFill>
+                          <a:srgbClr val="000000"/>
+                        </a:solidFill>
+                        <a:effectLst/>
+                        <a:latin typeface="Times New Roman" panose="02020603050405020304" pitchFamily="18" charset="0"/>
+                        <a:cs typeface="Times New Roman" panose="02020603050405020304" pitchFamily="18" charset="0"/>
+                      </a:endParaRPr>
+                    </a:p>
+                  </a:txBody>
+                  <a:tcPr marL="7620" marR="7620" marT="7620" marB="0" anchor="ctr"/>
+                </a:tc>
+                <a:tc>
+                  <a:txBody>
+                    <a:bodyPr/>
+                    <a:lstStyle/>
+                    <a:p>
+                      <a:pPr algn="l" fontAlgn="ctr"/>
+                      <a:r>
+                        <a:rPr lang="ru-RU" sz="1600" b="0" u="none" strike="noStrike">
+                          <a:solidFill>
+                            <a:srgbClr val="000000"/>
+                          </a:solidFill>
+                          <a:effectLst/>
+                          <a:latin typeface="Times New Roman" panose="02020603050405020304" pitchFamily="18" charset="0"/>
+                          <a:cs typeface="Times New Roman" panose="02020603050405020304" pitchFamily="18" charset="0"/>
+                        </a:rPr>
+                        <a:t>+</a:t>
+                      </a:r>
+                      <a:endParaRPr lang="ru-RU" sz="1600" b="0" i="0" u="none" strike="noStrike">
+                        <a:solidFill>
+                          <a:srgbClr val="000000"/>
+                        </a:solidFill>
+                        <a:effectLst/>
+                        <a:latin typeface="Times New Roman" panose="02020603050405020304" pitchFamily="18" charset="0"/>
+                        <a:cs typeface="Times New Roman" panose="02020603050405020304" pitchFamily="18" charset="0"/>
+                      </a:endParaRPr>
+                    </a:p>
+                  </a:txBody>
+                  <a:tcPr marL="7620" marR="7620" marT="7620" marB="0" anchor="ctr"/>
+                </a:tc>
+                <a:tc>
+                  <a:txBody>
+                    <a:bodyPr/>
+                    <a:lstStyle/>
+                    <a:p>
+                      <a:pPr algn="l" fontAlgn="ctr"/>
+                      <a:r>
+                        <a:rPr lang="ru-RU" sz="1600" b="0" u="none" strike="noStrike">
+                          <a:solidFill>
+                            <a:srgbClr val="000000"/>
+                          </a:solidFill>
+                          <a:effectLst/>
+                          <a:latin typeface="Times New Roman" panose="02020603050405020304" pitchFamily="18" charset="0"/>
+                          <a:cs typeface="Times New Roman" panose="02020603050405020304" pitchFamily="18" charset="0"/>
+                        </a:rPr>
+                        <a:t>+</a:t>
+                      </a:r>
+                      <a:endParaRPr lang="ru-RU" sz="1600" b="0" i="0" u="none" strike="noStrike">
+                        <a:solidFill>
+                          <a:srgbClr val="000000"/>
+                        </a:solidFill>
+                        <a:effectLst/>
+                        <a:latin typeface="Times New Roman" panose="02020603050405020304" pitchFamily="18" charset="0"/>
+                        <a:cs typeface="Times New Roman" panose="02020603050405020304" pitchFamily="18" charset="0"/>
+                      </a:endParaRPr>
+                    </a:p>
+                  </a:txBody>
+                  <a:tcPr marL="7620" marR="7620" marT="7620" marB="0" anchor="ctr"/>
+                </a:tc>
+                <a:tc>
+                  <a:txBody>
+                    <a:bodyPr/>
+                    <a:lstStyle/>
+                    <a:p>
+                      <a:pPr algn="l" fontAlgn="ctr"/>
+                      <a:r>
+                        <a:rPr lang="ru-RU" sz="1600" b="0" u="none" strike="noStrike">
+                          <a:solidFill>
+                            <a:srgbClr val="000000"/>
+                          </a:solidFill>
+                          <a:effectLst/>
+                          <a:latin typeface="Times New Roman" panose="02020603050405020304" pitchFamily="18" charset="0"/>
+                          <a:cs typeface="Times New Roman" panose="02020603050405020304" pitchFamily="18" charset="0"/>
+                        </a:rPr>
+                        <a:t>-</a:t>
+                      </a:r>
+                      <a:endParaRPr lang="ru-RU" sz="1600" b="0" i="0" u="none" strike="noStrike">
+                        <a:solidFill>
+                          <a:srgbClr val="000000"/>
+                        </a:solidFill>
+                        <a:effectLst/>
+                        <a:latin typeface="Times New Roman" panose="02020603050405020304" pitchFamily="18" charset="0"/>
+                        <a:cs typeface="Times New Roman" panose="02020603050405020304" pitchFamily="18" charset="0"/>
+                      </a:endParaRPr>
+                    </a:p>
+                  </a:txBody>
+                  <a:tcPr marL="7620" marR="7620" marT="7620" marB="0" anchor="ctr"/>
+                </a:tc>
+                <a:tc>
+                  <a:txBody>
+                    <a:bodyPr/>
+                    <a:lstStyle/>
+                    <a:p>
+                      <a:pPr algn="l" fontAlgn="ctr"/>
+                      <a:r>
+                        <a:rPr lang="ru-RU" sz="1600" b="0" u="none" strike="noStrike">
+                          <a:solidFill>
+                            <a:srgbClr val="000000"/>
+                          </a:solidFill>
+                          <a:effectLst/>
+                          <a:latin typeface="Times New Roman" panose="02020603050405020304" pitchFamily="18" charset="0"/>
+                          <a:cs typeface="Times New Roman" panose="02020603050405020304" pitchFamily="18" charset="0"/>
+                        </a:rPr>
+                        <a:t>-</a:t>
+                      </a:r>
+                      <a:endParaRPr lang="ru-RU" sz="1600" b="0" i="0" u="none" strike="noStrike">
+                        <a:solidFill>
+                          <a:srgbClr val="000000"/>
+                        </a:solidFill>
+                        <a:effectLst/>
+                        <a:latin typeface="Times New Roman" panose="02020603050405020304" pitchFamily="18" charset="0"/>
+                        <a:cs typeface="Times New Roman" panose="02020603050405020304" pitchFamily="18" charset="0"/>
+                      </a:endParaRPr>
+                    </a:p>
+                  </a:txBody>
+                  <a:tcPr marL="7620" marR="7620" marT="7620" marB="0" anchor="ctr"/>
+                </a:tc>
+                <a:extLst>
+                  <a:ext uri="{0D108BD9-81ED-4DB2-BD59-A6C34878D82A}">
+                    <a16:rowId xmlns:a16="http://schemas.microsoft.com/office/drawing/2014/main" val="1108303112"/>
+                  </a:ext>
+                </a:extLst>
+              </a:tr>
+              <a:tr h="280025">
+                <a:tc>
+                  <a:txBody>
+                    <a:bodyPr/>
+                    <a:lstStyle/>
+                    <a:p>
+                      <a:pPr algn="l" fontAlgn="ctr"/>
+                      <a:r>
+                        <a:rPr lang="ru-RU" sz="1600" b="0" u="none" strike="noStrike">
+                          <a:solidFill>
+                            <a:srgbClr val="000000"/>
+                          </a:solidFill>
+                          <a:effectLst/>
+                          <a:latin typeface="Times New Roman" panose="02020603050405020304" pitchFamily="18" charset="0"/>
+                          <a:cs typeface="Times New Roman" panose="02020603050405020304" pitchFamily="18" charset="0"/>
+                        </a:rPr>
+                        <a:t>Статусы заявки</a:t>
+                      </a:r>
+                      <a:endParaRPr lang="ru-RU" sz="1600" b="0" i="0" u="none" strike="noStrike">
+                        <a:solidFill>
+                          <a:srgbClr val="000000"/>
+                        </a:solidFill>
+                        <a:effectLst/>
+                        <a:latin typeface="Times New Roman" panose="02020603050405020304" pitchFamily="18" charset="0"/>
+                        <a:cs typeface="Times New Roman" panose="02020603050405020304" pitchFamily="18" charset="0"/>
+                      </a:endParaRPr>
+                    </a:p>
+                  </a:txBody>
+                  <a:tcPr marL="7620" marR="7620" marT="7620" marB="0" anchor="ctr"/>
+                </a:tc>
+                <a:tc>
+                  <a:txBody>
+                    <a:bodyPr/>
+                    <a:lstStyle/>
+                    <a:p>
+                      <a:pPr algn="l" fontAlgn="ctr"/>
+                      <a:r>
+                        <a:rPr lang="ru-RU" sz="1600" b="0" u="none" strike="noStrike">
+                          <a:solidFill>
+                            <a:srgbClr val="000000"/>
+                          </a:solidFill>
+                          <a:effectLst/>
+                          <a:latin typeface="Times New Roman" panose="02020603050405020304" pitchFamily="18" charset="0"/>
+                          <a:cs typeface="Times New Roman" panose="02020603050405020304" pitchFamily="18" charset="0"/>
+                        </a:rPr>
+                        <a:t>+</a:t>
+                      </a:r>
+                      <a:endParaRPr lang="ru-RU" sz="1600" b="0" i="0" u="none" strike="noStrike">
+                        <a:solidFill>
+                          <a:srgbClr val="000000"/>
+                        </a:solidFill>
+                        <a:effectLst/>
+                        <a:latin typeface="Times New Roman" panose="02020603050405020304" pitchFamily="18" charset="0"/>
+                        <a:cs typeface="Times New Roman" panose="02020603050405020304" pitchFamily="18" charset="0"/>
+                      </a:endParaRPr>
+                    </a:p>
+                  </a:txBody>
+                  <a:tcPr marL="7620" marR="7620" marT="7620" marB="0" anchor="ctr"/>
+                </a:tc>
+                <a:tc>
+                  <a:txBody>
+                    <a:bodyPr/>
+                    <a:lstStyle/>
+                    <a:p>
+                      <a:pPr algn="l" fontAlgn="ctr"/>
+                      <a:r>
+                        <a:rPr lang="ru-RU" sz="1600" b="0" u="none" strike="noStrike">
+                          <a:solidFill>
+                            <a:srgbClr val="000000"/>
+                          </a:solidFill>
+                          <a:effectLst/>
+                          <a:latin typeface="Times New Roman" panose="02020603050405020304" pitchFamily="18" charset="0"/>
+                          <a:cs typeface="Times New Roman" panose="02020603050405020304" pitchFamily="18" charset="0"/>
+                        </a:rPr>
+                        <a:t>+</a:t>
+                      </a:r>
+                      <a:endParaRPr lang="ru-RU" sz="1600" b="0" i="0" u="none" strike="noStrike">
+                        <a:solidFill>
+                          <a:srgbClr val="000000"/>
+                        </a:solidFill>
+                        <a:effectLst/>
+                        <a:latin typeface="Times New Roman" panose="02020603050405020304" pitchFamily="18" charset="0"/>
+                        <a:cs typeface="Times New Roman" panose="02020603050405020304" pitchFamily="18" charset="0"/>
+                      </a:endParaRPr>
+                    </a:p>
+                  </a:txBody>
+                  <a:tcPr marL="7620" marR="7620" marT="7620" marB="0" anchor="ctr"/>
+                </a:tc>
+                <a:tc>
+                  <a:txBody>
+                    <a:bodyPr/>
+                    <a:lstStyle/>
+                    <a:p>
+                      <a:pPr algn="l" fontAlgn="ctr"/>
+                      <a:r>
+                        <a:rPr lang="ru-RU" sz="1600" b="0" u="none" strike="noStrike">
+                          <a:solidFill>
+                            <a:srgbClr val="000000"/>
+                          </a:solidFill>
+                          <a:effectLst/>
+                          <a:latin typeface="Times New Roman" panose="02020603050405020304" pitchFamily="18" charset="0"/>
+                          <a:cs typeface="Times New Roman" panose="02020603050405020304" pitchFamily="18" charset="0"/>
+                        </a:rPr>
+                        <a:t>-</a:t>
+                      </a:r>
+                      <a:endParaRPr lang="ru-RU" sz="1600" b="0" i="0" u="none" strike="noStrike">
+                        <a:solidFill>
+                          <a:srgbClr val="000000"/>
+                        </a:solidFill>
+                        <a:effectLst/>
+                        <a:latin typeface="Times New Roman" panose="02020603050405020304" pitchFamily="18" charset="0"/>
+                        <a:cs typeface="Times New Roman" panose="02020603050405020304" pitchFamily="18" charset="0"/>
+                      </a:endParaRPr>
+                    </a:p>
+                  </a:txBody>
+                  <a:tcPr marL="7620" marR="7620" marT="7620" marB="0" anchor="ctr"/>
+                </a:tc>
+                <a:tc>
+                  <a:txBody>
+                    <a:bodyPr/>
+                    <a:lstStyle/>
+                    <a:p>
+                      <a:pPr algn="l" fontAlgn="ctr"/>
+                      <a:r>
+                        <a:rPr lang="ru-RU" sz="1600" b="0" u="none" strike="noStrike">
+                          <a:solidFill>
+                            <a:srgbClr val="000000"/>
+                          </a:solidFill>
+                          <a:effectLst/>
+                          <a:latin typeface="Times New Roman" panose="02020603050405020304" pitchFamily="18" charset="0"/>
+                          <a:cs typeface="Times New Roman" panose="02020603050405020304" pitchFamily="18" charset="0"/>
+                        </a:rPr>
+                        <a:t>-</a:t>
+                      </a:r>
+                      <a:endParaRPr lang="ru-RU" sz="1600" b="0" i="0" u="none" strike="noStrike">
+                        <a:solidFill>
+                          <a:srgbClr val="000000"/>
+                        </a:solidFill>
+                        <a:effectLst/>
+                        <a:latin typeface="Times New Roman" panose="02020603050405020304" pitchFamily="18" charset="0"/>
+                        <a:cs typeface="Times New Roman" panose="02020603050405020304" pitchFamily="18" charset="0"/>
+                      </a:endParaRPr>
+                    </a:p>
+                  </a:txBody>
+                  <a:tcPr marL="7620" marR="7620" marT="7620" marB="0" anchor="ctr"/>
+                </a:tc>
+                <a:extLst>
+                  <a:ext uri="{0D108BD9-81ED-4DB2-BD59-A6C34878D82A}">
+                    <a16:rowId xmlns:a16="http://schemas.microsoft.com/office/drawing/2014/main" val="533744429"/>
+                  </a:ext>
+                </a:extLst>
+              </a:tr>
+              <a:tr h="551565">
+                <a:tc>
+                  <a:txBody>
+                    <a:bodyPr/>
+                    <a:lstStyle/>
+                    <a:p>
+                      <a:pPr algn="l" fontAlgn="ctr"/>
+                      <a:r>
+                        <a:rPr lang="ru-RU" sz="1600" b="0" u="none" strike="noStrike">
+                          <a:solidFill>
+                            <a:srgbClr val="000000"/>
+                          </a:solidFill>
+                          <a:effectLst/>
+                          <a:latin typeface="Times New Roman" panose="02020603050405020304" pitchFamily="18" charset="0"/>
+                          <a:cs typeface="Times New Roman" panose="02020603050405020304" pitchFamily="18" charset="0"/>
+                        </a:rPr>
+                        <a:t>Собеседование как этап процесса</a:t>
+                      </a:r>
+                      <a:endParaRPr lang="ru-RU" sz="1600" b="0" i="0" u="none" strike="noStrike">
+                        <a:solidFill>
+                          <a:srgbClr val="000000"/>
+                        </a:solidFill>
+                        <a:effectLst/>
+                        <a:latin typeface="Times New Roman" panose="02020603050405020304" pitchFamily="18" charset="0"/>
+                        <a:cs typeface="Times New Roman" panose="02020603050405020304" pitchFamily="18" charset="0"/>
+                      </a:endParaRPr>
+                    </a:p>
+                  </a:txBody>
+                  <a:tcPr marL="7620" marR="7620" marT="7620" marB="0" anchor="ctr"/>
+                </a:tc>
+                <a:tc>
+                  <a:txBody>
+                    <a:bodyPr/>
+                    <a:lstStyle/>
+                    <a:p>
+                      <a:pPr algn="l" fontAlgn="ctr"/>
+                      <a:r>
+                        <a:rPr lang="ru-RU" sz="1600" b="0" u="none" strike="noStrike">
+                          <a:solidFill>
+                            <a:srgbClr val="000000"/>
+                          </a:solidFill>
+                          <a:effectLst/>
+                          <a:latin typeface="Times New Roman" panose="02020603050405020304" pitchFamily="18" charset="0"/>
+                          <a:cs typeface="Times New Roman" panose="02020603050405020304" pitchFamily="18" charset="0"/>
+                        </a:rPr>
+                        <a:t>+</a:t>
+                      </a:r>
+                      <a:endParaRPr lang="ru-RU" sz="1600" b="0" i="0" u="none" strike="noStrike">
+                        <a:solidFill>
+                          <a:srgbClr val="000000"/>
+                        </a:solidFill>
+                        <a:effectLst/>
+                        <a:latin typeface="Times New Roman" panose="02020603050405020304" pitchFamily="18" charset="0"/>
+                        <a:cs typeface="Times New Roman" panose="02020603050405020304" pitchFamily="18" charset="0"/>
+                      </a:endParaRPr>
+                    </a:p>
+                  </a:txBody>
+                  <a:tcPr marL="7620" marR="7620" marT="7620" marB="0" anchor="ctr"/>
+                </a:tc>
+                <a:tc>
+                  <a:txBody>
+                    <a:bodyPr/>
+                    <a:lstStyle/>
+                    <a:p>
+                      <a:pPr algn="l" fontAlgn="ctr"/>
+                      <a:r>
+                        <a:rPr lang="ru-RU" sz="1600" b="0" u="none" strike="noStrike">
+                          <a:solidFill>
+                            <a:srgbClr val="000000"/>
+                          </a:solidFill>
+                          <a:effectLst/>
+                          <a:latin typeface="Times New Roman" panose="02020603050405020304" pitchFamily="18" charset="0"/>
+                          <a:cs typeface="Times New Roman" panose="02020603050405020304" pitchFamily="18" charset="0"/>
+                        </a:rPr>
+                        <a:t>-</a:t>
+                      </a:r>
+                      <a:endParaRPr lang="ru-RU" sz="1600" b="0" i="0" u="none" strike="noStrike">
+                        <a:solidFill>
+                          <a:srgbClr val="000000"/>
+                        </a:solidFill>
+                        <a:effectLst/>
+                        <a:latin typeface="Times New Roman" panose="02020603050405020304" pitchFamily="18" charset="0"/>
+                        <a:cs typeface="Times New Roman" panose="02020603050405020304" pitchFamily="18" charset="0"/>
+                      </a:endParaRPr>
+                    </a:p>
+                  </a:txBody>
+                  <a:tcPr marL="7620" marR="7620" marT="7620" marB="0" anchor="ctr"/>
+                </a:tc>
+                <a:tc>
+                  <a:txBody>
+                    <a:bodyPr/>
+                    <a:lstStyle/>
+                    <a:p>
+                      <a:pPr algn="l" fontAlgn="ctr"/>
+                      <a:r>
+                        <a:rPr lang="ru-RU" sz="1600" b="0" u="none" strike="noStrike">
+                          <a:solidFill>
+                            <a:srgbClr val="000000"/>
+                          </a:solidFill>
+                          <a:effectLst/>
+                          <a:latin typeface="Times New Roman" panose="02020603050405020304" pitchFamily="18" charset="0"/>
+                          <a:cs typeface="Times New Roman" panose="02020603050405020304" pitchFamily="18" charset="0"/>
+                        </a:rPr>
+                        <a:t>-</a:t>
+                      </a:r>
+                      <a:endParaRPr lang="ru-RU" sz="1600" b="0" i="0" u="none" strike="noStrike">
+                        <a:solidFill>
+                          <a:srgbClr val="000000"/>
+                        </a:solidFill>
+                        <a:effectLst/>
+                        <a:latin typeface="Times New Roman" panose="02020603050405020304" pitchFamily="18" charset="0"/>
+                        <a:cs typeface="Times New Roman" panose="02020603050405020304" pitchFamily="18" charset="0"/>
+                      </a:endParaRPr>
+                    </a:p>
+                  </a:txBody>
+                  <a:tcPr marL="7620" marR="7620" marT="7620" marB="0" anchor="ctr"/>
+                </a:tc>
+                <a:tc>
+                  <a:txBody>
+                    <a:bodyPr/>
+                    <a:lstStyle/>
+                    <a:p>
+                      <a:pPr algn="l" fontAlgn="ctr"/>
+                      <a:r>
+                        <a:rPr lang="ru-RU" sz="1600" b="0" u="none" strike="noStrike">
+                          <a:solidFill>
+                            <a:srgbClr val="000000"/>
+                          </a:solidFill>
+                          <a:effectLst/>
+                          <a:latin typeface="Times New Roman" panose="02020603050405020304" pitchFamily="18" charset="0"/>
+                          <a:cs typeface="Times New Roman" panose="02020603050405020304" pitchFamily="18" charset="0"/>
+                        </a:rPr>
+                        <a:t>-</a:t>
+                      </a:r>
+                      <a:endParaRPr lang="ru-RU" sz="1600" b="0" i="0" u="none" strike="noStrike">
+                        <a:solidFill>
+                          <a:srgbClr val="000000"/>
+                        </a:solidFill>
+                        <a:effectLst/>
+                        <a:latin typeface="Times New Roman" panose="02020603050405020304" pitchFamily="18" charset="0"/>
+                        <a:cs typeface="Times New Roman" panose="02020603050405020304" pitchFamily="18" charset="0"/>
+                      </a:endParaRPr>
+                    </a:p>
+                  </a:txBody>
+                  <a:tcPr marL="7620" marR="7620" marT="7620" marB="0" anchor="ctr"/>
+                </a:tc>
+                <a:extLst>
+                  <a:ext uri="{0D108BD9-81ED-4DB2-BD59-A6C34878D82A}">
+                    <a16:rowId xmlns:a16="http://schemas.microsoft.com/office/drawing/2014/main" val="2090176546"/>
+                  </a:ext>
+                </a:extLst>
+              </a:tr>
+              <a:tr h="551565">
+                <a:tc>
+                  <a:txBody>
+                    <a:bodyPr/>
+                    <a:lstStyle/>
+                    <a:p>
+                      <a:pPr algn="l" fontAlgn="ctr"/>
+                      <a:r>
+                        <a:rPr lang="ru-RU" sz="1600" b="0" u="none" strike="noStrike">
+                          <a:solidFill>
+                            <a:srgbClr val="000000"/>
+                          </a:solidFill>
+                          <a:effectLst/>
+                          <a:latin typeface="Times New Roman" panose="02020603050405020304" pitchFamily="18" charset="0"/>
+                          <a:cs typeface="Times New Roman" panose="02020603050405020304" pitchFamily="18" charset="0"/>
+                        </a:rPr>
+                        <a:t>Расписание занятий группы</a:t>
+                      </a:r>
+                      <a:endParaRPr lang="ru-RU" sz="1600" b="0" i="0" u="none" strike="noStrike">
+                        <a:solidFill>
+                          <a:srgbClr val="000000"/>
+                        </a:solidFill>
+                        <a:effectLst/>
+                        <a:latin typeface="Times New Roman" panose="02020603050405020304" pitchFamily="18" charset="0"/>
+                        <a:cs typeface="Times New Roman" panose="02020603050405020304" pitchFamily="18" charset="0"/>
+                      </a:endParaRPr>
+                    </a:p>
+                  </a:txBody>
+                  <a:tcPr marL="7620" marR="7620" marT="7620" marB="0" anchor="ctr"/>
+                </a:tc>
+                <a:tc>
+                  <a:txBody>
+                    <a:bodyPr/>
+                    <a:lstStyle/>
+                    <a:p>
+                      <a:pPr algn="l" fontAlgn="ctr"/>
+                      <a:r>
+                        <a:rPr lang="ru-RU" sz="1600" b="0" u="none" strike="noStrike">
+                          <a:solidFill>
+                            <a:srgbClr val="000000"/>
+                          </a:solidFill>
+                          <a:effectLst/>
+                          <a:latin typeface="Times New Roman" panose="02020603050405020304" pitchFamily="18" charset="0"/>
+                          <a:cs typeface="Times New Roman" panose="02020603050405020304" pitchFamily="18" charset="0"/>
+                        </a:rPr>
+                        <a:t>+</a:t>
+                      </a:r>
+                      <a:endParaRPr lang="ru-RU" sz="1600" b="0" i="0" u="none" strike="noStrike">
+                        <a:solidFill>
+                          <a:srgbClr val="000000"/>
+                        </a:solidFill>
+                        <a:effectLst/>
+                        <a:latin typeface="Times New Roman" panose="02020603050405020304" pitchFamily="18" charset="0"/>
+                        <a:cs typeface="Times New Roman" panose="02020603050405020304" pitchFamily="18" charset="0"/>
+                      </a:endParaRPr>
+                    </a:p>
+                  </a:txBody>
+                  <a:tcPr marL="7620" marR="7620" marT="7620" marB="0" anchor="ctr"/>
+                </a:tc>
+                <a:tc>
+                  <a:txBody>
+                    <a:bodyPr/>
+                    <a:lstStyle/>
+                    <a:p>
+                      <a:pPr algn="l" fontAlgn="ctr"/>
+                      <a:r>
+                        <a:rPr lang="ru-RU" sz="1600" b="0" u="none" strike="noStrike">
+                          <a:solidFill>
+                            <a:srgbClr val="000000"/>
+                          </a:solidFill>
+                          <a:effectLst/>
+                          <a:latin typeface="Times New Roman" panose="02020603050405020304" pitchFamily="18" charset="0"/>
+                          <a:cs typeface="Times New Roman" panose="02020603050405020304" pitchFamily="18" charset="0"/>
+                        </a:rPr>
+                        <a:t>-</a:t>
+                      </a:r>
+                      <a:endParaRPr lang="ru-RU" sz="1600" b="0" i="0" u="none" strike="noStrike">
+                        <a:solidFill>
+                          <a:srgbClr val="000000"/>
+                        </a:solidFill>
+                        <a:effectLst/>
+                        <a:latin typeface="Times New Roman" panose="02020603050405020304" pitchFamily="18" charset="0"/>
+                        <a:cs typeface="Times New Roman" panose="02020603050405020304" pitchFamily="18" charset="0"/>
+                      </a:endParaRPr>
+                    </a:p>
+                  </a:txBody>
+                  <a:tcPr marL="7620" marR="7620" marT="7620" marB="0" anchor="ctr"/>
+                </a:tc>
+                <a:tc>
+                  <a:txBody>
+                    <a:bodyPr/>
+                    <a:lstStyle/>
+                    <a:p>
+                      <a:pPr algn="l" fontAlgn="ctr"/>
+                      <a:r>
+                        <a:rPr lang="ru-RU" sz="1600" b="0" u="none" strike="noStrike">
+                          <a:solidFill>
+                            <a:srgbClr val="000000"/>
+                          </a:solidFill>
+                          <a:effectLst/>
+                          <a:latin typeface="Times New Roman" panose="02020603050405020304" pitchFamily="18" charset="0"/>
+                          <a:cs typeface="Times New Roman" panose="02020603050405020304" pitchFamily="18" charset="0"/>
+                        </a:rPr>
+                        <a:t>+</a:t>
+                      </a:r>
+                      <a:endParaRPr lang="ru-RU" sz="1600" b="0" i="0" u="none" strike="noStrike">
+                        <a:solidFill>
+                          <a:srgbClr val="000000"/>
+                        </a:solidFill>
+                        <a:effectLst/>
+                        <a:latin typeface="Times New Roman" panose="02020603050405020304" pitchFamily="18" charset="0"/>
+                        <a:cs typeface="Times New Roman" panose="02020603050405020304" pitchFamily="18" charset="0"/>
+                      </a:endParaRPr>
+                    </a:p>
+                  </a:txBody>
+                  <a:tcPr marL="7620" marR="7620" marT="7620" marB="0" anchor="ctr"/>
+                </a:tc>
+                <a:tc>
+                  <a:txBody>
+                    <a:bodyPr/>
+                    <a:lstStyle/>
+                    <a:p>
+                      <a:pPr algn="l" fontAlgn="ctr"/>
+                      <a:r>
+                        <a:rPr lang="ru-RU" sz="1600" b="0" u="none" strike="noStrike">
+                          <a:solidFill>
+                            <a:srgbClr val="000000"/>
+                          </a:solidFill>
+                          <a:effectLst/>
+                          <a:latin typeface="Times New Roman" panose="02020603050405020304" pitchFamily="18" charset="0"/>
+                          <a:cs typeface="Times New Roman" panose="02020603050405020304" pitchFamily="18" charset="0"/>
+                        </a:rPr>
+                        <a:t>-</a:t>
+                      </a:r>
+                      <a:endParaRPr lang="ru-RU" sz="1600" b="0" i="0" u="none" strike="noStrike">
+                        <a:solidFill>
+                          <a:srgbClr val="000000"/>
+                        </a:solidFill>
+                        <a:effectLst/>
+                        <a:latin typeface="Times New Roman" panose="02020603050405020304" pitchFamily="18" charset="0"/>
+                        <a:cs typeface="Times New Roman" panose="02020603050405020304" pitchFamily="18" charset="0"/>
+                      </a:endParaRPr>
+                    </a:p>
+                  </a:txBody>
+                  <a:tcPr marL="7620" marR="7620" marT="7620" marB="0" anchor="ctr"/>
+                </a:tc>
+                <a:extLst>
+                  <a:ext uri="{0D108BD9-81ED-4DB2-BD59-A6C34878D82A}">
+                    <a16:rowId xmlns:a16="http://schemas.microsoft.com/office/drawing/2014/main" val="2891474095"/>
+                  </a:ext>
+                </a:extLst>
+              </a:tr>
+              <a:tr h="551565">
+                <a:tc>
+                  <a:txBody>
+                    <a:bodyPr/>
+                    <a:lstStyle/>
+                    <a:p>
+                      <a:pPr algn="l" fontAlgn="ctr"/>
+                      <a:r>
+                        <a:rPr lang="ru-RU" sz="1600" b="0" u="none" strike="noStrike">
+                          <a:solidFill>
+                            <a:srgbClr val="000000"/>
+                          </a:solidFill>
+                          <a:effectLst/>
+                          <a:latin typeface="Times New Roman" panose="02020603050405020304" pitchFamily="18" charset="0"/>
+                          <a:cs typeface="Times New Roman" panose="02020603050405020304" pitchFamily="18" charset="0"/>
+                        </a:rPr>
+                        <a:t>Материалы внутри платформы</a:t>
+                      </a:r>
+                      <a:endParaRPr lang="ru-RU" sz="1600" b="0" i="0" u="none" strike="noStrike">
+                        <a:solidFill>
+                          <a:srgbClr val="000000"/>
+                        </a:solidFill>
+                        <a:effectLst/>
+                        <a:latin typeface="Times New Roman" panose="02020603050405020304" pitchFamily="18" charset="0"/>
+                        <a:cs typeface="Times New Roman" panose="02020603050405020304" pitchFamily="18" charset="0"/>
+                      </a:endParaRPr>
+                    </a:p>
+                  </a:txBody>
+                  <a:tcPr marL="7620" marR="7620" marT="7620" marB="0" anchor="ctr"/>
+                </a:tc>
+                <a:tc>
+                  <a:txBody>
+                    <a:bodyPr/>
+                    <a:lstStyle/>
+                    <a:p>
+                      <a:pPr algn="l" fontAlgn="ctr"/>
+                      <a:r>
+                        <a:rPr lang="ru-RU" sz="1600" b="0" u="none" strike="noStrike">
+                          <a:solidFill>
+                            <a:srgbClr val="000000"/>
+                          </a:solidFill>
+                          <a:effectLst/>
+                          <a:latin typeface="Times New Roman" panose="02020603050405020304" pitchFamily="18" charset="0"/>
+                          <a:cs typeface="Times New Roman" panose="02020603050405020304" pitchFamily="18" charset="0"/>
+                        </a:rPr>
+                        <a:t>+</a:t>
+                      </a:r>
+                      <a:endParaRPr lang="ru-RU" sz="1600" b="0" i="0" u="none" strike="noStrike">
+                        <a:solidFill>
+                          <a:srgbClr val="000000"/>
+                        </a:solidFill>
+                        <a:effectLst/>
+                        <a:latin typeface="Times New Roman" panose="02020603050405020304" pitchFamily="18" charset="0"/>
+                        <a:cs typeface="Times New Roman" panose="02020603050405020304" pitchFamily="18" charset="0"/>
+                      </a:endParaRPr>
+                    </a:p>
+                  </a:txBody>
+                  <a:tcPr marL="7620" marR="7620" marT="7620" marB="0" anchor="ctr"/>
+                </a:tc>
+                <a:tc>
+                  <a:txBody>
+                    <a:bodyPr/>
+                    <a:lstStyle/>
+                    <a:p>
+                      <a:pPr algn="l" fontAlgn="ctr"/>
+                      <a:r>
+                        <a:rPr lang="ru-RU" sz="1600" b="0" u="none" strike="noStrike">
+                          <a:solidFill>
+                            <a:srgbClr val="000000"/>
+                          </a:solidFill>
+                          <a:effectLst/>
+                          <a:latin typeface="Times New Roman" panose="02020603050405020304" pitchFamily="18" charset="0"/>
+                          <a:cs typeface="Times New Roman" panose="02020603050405020304" pitchFamily="18" charset="0"/>
+                        </a:rPr>
+                        <a:t>-</a:t>
+                      </a:r>
+                      <a:endParaRPr lang="ru-RU" sz="1600" b="0" i="0" u="none" strike="noStrike">
+                        <a:solidFill>
+                          <a:srgbClr val="000000"/>
+                        </a:solidFill>
+                        <a:effectLst/>
+                        <a:latin typeface="Times New Roman" panose="02020603050405020304" pitchFamily="18" charset="0"/>
+                        <a:cs typeface="Times New Roman" panose="02020603050405020304" pitchFamily="18" charset="0"/>
+                      </a:endParaRPr>
+                    </a:p>
+                  </a:txBody>
+                  <a:tcPr marL="7620" marR="7620" marT="7620" marB="0" anchor="ctr"/>
+                </a:tc>
+                <a:tc>
+                  <a:txBody>
+                    <a:bodyPr/>
+                    <a:lstStyle/>
+                    <a:p>
+                      <a:pPr algn="l" fontAlgn="ctr"/>
+                      <a:r>
+                        <a:rPr lang="ru-RU" sz="1600" b="0" u="none" strike="noStrike">
+                          <a:solidFill>
+                            <a:srgbClr val="000000"/>
+                          </a:solidFill>
+                          <a:effectLst/>
+                          <a:latin typeface="Times New Roman" panose="02020603050405020304" pitchFamily="18" charset="0"/>
+                          <a:cs typeface="Times New Roman" panose="02020603050405020304" pitchFamily="18" charset="0"/>
+                        </a:rPr>
+                        <a:t>+</a:t>
+                      </a:r>
+                      <a:endParaRPr lang="ru-RU" sz="1600" b="0" i="0" u="none" strike="noStrike">
+                        <a:solidFill>
+                          <a:srgbClr val="000000"/>
+                        </a:solidFill>
+                        <a:effectLst/>
+                        <a:latin typeface="Times New Roman" panose="02020603050405020304" pitchFamily="18" charset="0"/>
+                        <a:cs typeface="Times New Roman" panose="02020603050405020304" pitchFamily="18" charset="0"/>
+                      </a:endParaRPr>
+                    </a:p>
+                  </a:txBody>
+                  <a:tcPr marL="7620" marR="7620" marT="7620" marB="0" anchor="ctr"/>
+                </a:tc>
+                <a:tc>
+                  <a:txBody>
+                    <a:bodyPr/>
+                    <a:lstStyle/>
+                    <a:p>
+                      <a:pPr algn="l" fontAlgn="ctr"/>
+                      <a:r>
+                        <a:rPr lang="ru-RU" sz="1600" b="0" u="none" strike="noStrike">
+                          <a:solidFill>
+                            <a:srgbClr val="000000"/>
+                          </a:solidFill>
+                          <a:effectLst/>
+                          <a:latin typeface="Times New Roman" panose="02020603050405020304" pitchFamily="18" charset="0"/>
+                          <a:cs typeface="Times New Roman" panose="02020603050405020304" pitchFamily="18" charset="0"/>
+                        </a:rPr>
+                        <a:t>+</a:t>
+                      </a:r>
+                      <a:endParaRPr lang="ru-RU" sz="1600" b="0" i="0" u="none" strike="noStrike">
+                        <a:solidFill>
+                          <a:srgbClr val="000000"/>
+                        </a:solidFill>
+                        <a:effectLst/>
+                        <a:latin typeface="Times New Roman" panose="02020603050405020304" pitchFamily="18" charset="0"/>
+                        <a:cs typeface="Times New Roman" panose="02020603050405020304" pitchFamily="18" charset="0"/>
+                      </a:endParaRPr>
+                    </a:p>
+                  </a:txBody>
+                  <a:tcPr marL="7620" marR="7620" marT="7620" marB="0" anchor="ctr"/>
+                </a:tc>
+                <a:extLst>
+                  <a:ext uri="{0D108BD9-81ED-4DB2-BD59-A6C34878D82A}">
+                    <a16:rowId xmlns:a16="http://schemas.microsoft.com/office/drawing/2014/main" val="1058621965"/>
+                  </a:ext>
+                </a:extLst>
+              </a:tr>
+              <a:tr h="280025">
+                <a:tc>
+                  <a:txBody>
+                    <a:bodyPr/>
+                    <a:lstStyle/>
+                    <a:p>
+                      <a:pPr algn="l" fontAlgn="ctr"/>
+                      <a:r>
+                        <a:rPr lang="ru-RU" sz="1600" b="0" u="none" strike="noStrike">
+                          <a:solidFill>
+                            <a:srgbClr val="000000"/>
+                          </a:solidFill>
+                          <a:effectLst/>
+                          <a:latin typeface="Times New Roman" panose="02020603050405020304" pitchFamily="18" charset="0"/>
+                          <a:cs typeface="Times New Roman" panose="02020603050405020304" pitchFamily="18" charset="0"/>
+                        </a:rPr>
+                        <a:t>Задания</a:t>
+                      </a:r>
+                      <a:endParaRPr lang="ru-RU" sz="1600" b="0" i="0" u="none" strike="noStrike">
+                        <a:solidFill>
+                          <a:srgbClr val="000000"/>
+                        </a:solidFill>
+                        <a:effectLst/>
+                        <a:latin typeface="Times New Roman" panose="02020603050405020304" pitchFamily="18" charset="0"/>
+                        <a:cs typeface="Times New Roman" panose="02020603050405020304" pitchFamily="18" charset="0"/>
+                      </a:endParaRPr>
+                    </a:p>
+                  </a:txBody>
+                  <a:tcPr marL="7620" marR="7620" marT="7620" marB="0" anchor="ctr"/>
+                </a:tc>
+                <a:tc>
+                  <a:txBody>
+                    <a:bodyPr/>
+                    <a:lstStyle/>
+                    <a:p>
+                      <a:pPr algn="l" fontAlgn="ctr"/>
+                      <a:r>
+                        <a:rPr lang="ru-RU" sz="1600" b="0" u="none" strike="noStrike">
+                          <a:solidFill>
+                            <a:srgbClr val="000000"/>
+                          </a:solidFill>
+                          <a:effectLst/>
+                          <a:latin typeface="Times New Roman" panose="02020603050405020304" pitchFamily="18" charset="0"/>
+                          <a:cs typeface="Times New Roman" panose="02020603050405020304" pitchFamily="18" charset="0"/>
+                        </a:rPr>
+                        <a:t>+</a:t>
+                      </a:r>
+                      <a:endParaRPr lang="ru-RU" sz="1600" b="0" i="0" u="none" strike="noStrike">
+                        <a:solidFill>
+                          <a:srgbClr val="000000"/>
+                        </a:solidFill>
+                        <a:effectLst/>
+                        <a:latin typeface="Times New Roman" panose="02020603050405020304" pitchFamily="18" charset="0"/>
+                        <a:cs typeface="Times New Roman" panose="02020603050405020304" pitchFamily="18" charset="0"/>
+                      </a:endParaRPr>
+                    </a:p>
+                  </a:txBody>
+                  <a:tcPr marL="7620" marR="7620" marT="7620" marB="0" anchor="ctr"/>
+                </a:tc>
+                <a:tc>
+                  <a:txBody>
+                    <a:bodyPr/>
+                    <a:lstStyle/>
+                    <a:p>
+                      <a:pPr algn="l" fontAlgn="ctr"/>
+                      <a:r>
+                        <a:rPr lang="ru-RU" sz="1600" b="0" u="none" strike="noStrike">
+                          <a:solidFill>
+                            <a:srgbClr val="000000"/>
+                          </a:solidFill>
+                          <a:effectLst/>
+                          <a:latin typeface="Times New Roman" panose="02020603050405020304" pitchFamily="18" charset="0"/>
+                          <a:cs typeface="Times New Roman" panose="02020603050405020304" pitchFamily="18" charset="0"/>
+                        </a:rPr>
+                        <a:t>-</a:t>
+                      </a:r>
+                      <a:endParaRPr lang="ru-RU" sz="1600" b="0" i="0" u="none" strike="noStrike">
+                        <a:solidFill>
+                          <a:srgbClr val="000000"/>
+                        </a:solidFill>
+                        <a:effectLst/>
+                        <a:latin typeface="Times New Roman" panose="02020603050405020304" pitchFamily="18" charset="0"/>
+                        <a:cs typeface="Times New Roman" panose="02020603050405020304" pitchFamily="18" charset="0"/>
+                      </a:endParaRPr>
+                    </a:p>
+                  </a:txBody>
+                  <a:tcPr marL="7620" marR="7620" marT="7620" marB="0" anchor="ctr"/>
+                </a:tc>
+                <a:tc>
+                  <a:txBody>
+                    <a:bodyPr/>
+                    <a:lstStyle/>
+                    <a:p>
+                      <a:pPr algn="l" fontAlgn="ctr"/>
+                      <a:r>
+                        <a:rPr lang="ru-RU" sz="1600" b="0" u="none" strike="noStrike">
+                          <a:solidFill>
+                            <a:srgbClr val="000000"/>
+                          </a:solidFill>
+                          <a:effectLst/>
+                          <a:latin typeface="Times New Roman" panose="02020603050405020304" pitchFamily="18" charset="0"/>
+                          <a:cs typeface="Times New Roman" panose="02020603050405020304" pitchFamily="18" charset="0"/>
+                        </a:rPr>
+                        <a:t>+</a:t>
+                      </a:r>
+                      <a:endParaRPr lang="ru-RU" sz="1600" b="0" i="0" u="none" strike="noStrike">
+                        <a:solidFill>
+                          <a:srgbClr val="000000"/>
+                        </a:solidFill>
+                        <a:effectLst/>
+                        <a:latin typeface="Times New Roman" panose="02020603050405020304" pitchFamily="18" charset="0"/>
+                        <a:cs typeface="Times New Roman" panose="02020603050405020304" pitchFamily="18" charset="0"/>
+                      </a:endParaRPr>
+                    </a:p>
+                  </a:txBody>
+                  <a:tcPr marL="7620" marR="7620" marT="7620" marB="0" anchor="ctr"/>
+                </a:tc>
+                <a:tc>
+                  <a:txBody>
+                    <a:bodyPr/>
+                    <a:lstStyle/>
+                    <a:p>
+                      <a:pPr algn="l" fontAlgn="ctr"/>
+                      <a:r>
+                        <a:rPr lang="ru-RU" sz="1600" b="0" u="none" strike="noStrike">
+                          <a:solidFill>
+                            <a:srgbClr val="000000"/>
+                          </a:solidFill>
+                          <a:effectLst/>
+                          <a:latin typeface="Times New Roman" panose="02020603050405020304" pitchFamily="18" charset="0"/>
+                          <a:cs typeface="Times New Roman" panose="02020603050405020304" pitchFamily="18" charset="0"/>
+                        </a:rPr>
+                        <a:t>+</a:t>
+                      </a:r>
+                      <a:endParaRPr lang="ru-RU" sz="1600" b="0" i="0" u="none" strike="noStrike">
+                        <a:solidFill>
+                          <a:srgbClr val="000000"/>
+                        </a:solidFill>
+                        <a:effectLst/>
+                        <a:latin typeface="Times New Roman" panose="02020603050405020304" pitchFamily="18" charset="0"/>
+                        <a:cs typeface="Times New Roman" panose="02020603050405020304" pitchFamily="18" charset="0"/>
+                      </a:endParaRPr>
+                    </a:p>
+                  </a:txBody>
+                  <a:tcPr marL="7620" marR="7620" marT="7620" marB="0" anchor="ctr"/>
+                </a:tc>
+                <a:extLst>
+                  <a:ext uri="{0D108BD9-81ED-4DB2-BD59-A6C34878D82A}">
+                    <a16:rowId xmlns:a16="http://schemas.microsoft.com/office/drawing/2014/main" val="3791637127"/>
+                  </a:ext>
+                </a:extLst>
+              </a:tr>
+              <a:tr h="280025">
+                <a:tc>
+                  <a:txBody>
+                    <a:bodyPr/>
+                    <a:lstStyle/>
+                    <a:p>
+                      <a:pPr algn="l" fontAlgn="ctr"/>
+                      <a:r>
+                        <a:rPr lang="ru-RU" sz="1600" b="0" u="none" strike="noStrike">
+                          <a:solidFill>
+                            <a:srgbClr val="000000"/>
+                          </a:solidFill>
+                          <a:effectLst/>
+                          <a:latin typeface="Times New Roman" panose="02020603050405020304" pitchFamily="18" charset="0"/>
+                          <a:cs typeface="Times New Roman" panose="02020603050405020304" pitchFamily="18" charset="0"/>
+                        </a:rPr>
+                        <a:t>Дедлайны</a:t>
+                      </a:r>
+                      <a:endParaRPr lang="ru-RU" sz="1600" b="0" i="0" u="none" strike="noStrike">
+                        <a:solidFill>
+                          <a:srgbClr val="000000"/>
+                        </a:solidFill>
+                        <a:effectLst/>
+                        <a:latin typeface="Times New Roman" panose="02020603050405020304" pitchFamily="18" charset="0"/>
+                        <a:cs typeface="Times New Roman" panose="02020603050405020304" pitchFamily="18" charset="0"/>
+                      </a:endParaRPr>
+                    </a:p>
+                  </a:txBody>
+                  <a:tcPr marL="7620" marR="7620" marT="7620" marB="0" anchor="ctr"/>
+                </a:tc>
+                <a:tc>
+                  <a:txBody>
+                    <a:bodyPr/>
+                    <a:lstStyle/>
+                    <a:p>
+                      <a:pPr algn="l" fontAlgn="ctr"/>
+                      <a:r>
+                        <a:rPr lang="ru-RU" sz="1600" b="0" u="none" strike="noStrike">
+                          <a:solidFill>
+                            <a:srgbClr val="000000"/>
+                          </a:solidFill>
+                          <a:effectLst/>
+                          <a:latin typeface="Times New Roman" panose="02020603050405020304" pitchFamily="18" charset="0"/>
+                          <a:cs typeface="Times New Roman" panose="02020603050405020304" pitchFamily="18" charset="0"/>
+                        </a:rPr>
+                        <a:t>+</a:t>
+                      </a:r>
+                      <a:endParaRPr lang="ru-RU" sz="1600" b="0" i="0" u="none" strike="noStrike">
+                        <a:solidFill>
+                          <a:srgbClr val="000000"/>
+                        </a:solidFill>
+                        <a:effectLst/>
+                        <a:latin typeface="Times New Roman" panose="02020603050405020304" pitchFamily="18" charset="0"/>
+                        <a:cs typeface="Times New Roman" panose="02020603050405020304" pitchFamily="18" charset="0"/>
+                      </a:endParaRPr>
+                    </a:p>
+                  </a:txBody>
+                  <a:tcPr marL="7620" marR="7620" marT="7620" marB="0" anchor="ctr"/>
+                </a:tc>
+                <a:tc>
+                  <a:txBody>
+                    <a:bodyPr/>
+                    <a:lstStyle/>
+                    <a:p>
+                      <a:pPr algn="l" fontAlgn="ctr"/>
+                      <a:r>
+                        <a:rPr lang="ru-RU" sz="1600" b="0" u="none" strike="noStrike">
+                          <a:solidFill>
+                            <a:srgbClr val="000000"/>
+                          </a:solidFill>
+                          <a:effectLst/>
+                          <a:latin typeface="Times New Roman" panose="02020603050405020304" pitchFamily="18" charset="0"/>
+                          <a:cs typeface="Times New Roman" panose="02020603050405020304" pitchFamily="18" charset="0"/>
+                        </a:rPr>
+                        <a:t>-</a:t>
+                      </a:r>
+                      <a:endParaRPr lang="ru-RU" sz="1600" b="0" i="0" u="none" strike="noStrike">
+                        <a:solidFill>
+                          <a:srgbClr val="000000"/>
+                        </a:solidFill>
+                        <a:effectLst/>
+                        <a:latin typeface="Times New Roman" panose="02020603050405020304" pitchFamily="18" charset="0"/>
+                        <a:cs typeface="Times New Roman" panose="02020603050405020304" pitchFamily="18" charset="0"/>
+                      </a:endParaRPr>
+                    </a:p>
+                  </a:txBody>
+                  <a:tcPr marL="7620" marR="7620" marT="7620" marB="0" anchor="ctr"/>
+                </a:tc>
+                <a:tc>
+                  <a:txBody>
+                    <a:bodyPr/>
+                    <a:lstStyle/>
+                    <a:p>
+                      <a:pPr algn="l" fontAlgn="ctr"/>
+                      <a:r>
+                        <a:rPr lang="ru-RU" sz="1600" b="0" u="none" strike="noStrike">
+                          <a:solidFill>
+                            <a:srgbClr val="000000"/>
+                          </a:solidFill>
+                          <a:effectLst/>
+                          <a:latin typeface="Times New Roman" panose="02020603050405020304" pitchFamily="18" charset="0"/>
+                          <a:cs typeface="Times New Roman" panose="02020603050405020304" pitchFamily="18" charset="0"/>
+                        </a:rPr>
+                        <a:t>+</a:t>
+                      </a:r>
+                      <a:endParaRPr lang="ru-RU" sz="1600" b="0" i="0" u="none" strike="noStrike">
+                        <a:solidFill>
+                          <a:srgbClr val="000000"/>
+                        </a:solidFill>
+                        <a:effectLst/>
+                        <a:latin typeface="Times New Roman" panose="02020603050405020304" pitchFamily="18" charset="0"/>
+                        <a:cs typeface="Times New Roman" panose="02020603050405020304" pitchFamily="18" charset="0"/>
+                      </a:endParaRPr>
+                    </a:p>
+                  </a:txBody>
+                  <a:tcPr marL="7620" marR="7620" marT="7620" marB="0" anchor="ctr"/>
+                </a:tc>
+                <a:tc>
+                  <a:txBody>
+                    <a:bodyPr/>
+                    <a:lstStyle/>
+                    <a:p>
+                      <a:pPr algn="l" fontAlgn="ctr"/>
+                      <a:r>
+                        <a:rPr lang="ru-RU" sz="1600" b="0" u="none" strike="noStrike">
+                          <a:solidFill>
+                            <a:srgbClr val="000000"/>
+                          </a:solidFill>
+                          <a:effectLst/>
+                          <a:latin typeface="Times New Roman" panose="02020603050405020304" pitchFamily="18" charset="0"/>
+                          <a:cs typeface="Times New Roman" panose="02020603050405020304" pitchFamily="18" charset="0"/>
+                        </a:rPr>
+                        <a:t>+</a:t>
+                      </a:r>
+                      <a:endParaRPr lang="ru-RU" sz="1600" b="0" i="0" u="none" strike="noStrike">
+                        <a:solidFill>
+                          <a:srgbClr val="000000"/>
+                        </a:solidFill>
+                        <a:effectLst/>
+                        <a:latin typeface="Times New Roman" panose="02020603050405020304" pitchFamily="18" charset="0"/>
+                        <a:cs typeface="Times New Roman" panose="02020603050405020304" pitchFamily="18" charset="0"/>
+                      </a:endParaRPr>
+                    </a:p>
+                  </a:txBody>
+                  <a:tcPr marL="7620" marR="7620" marT="7620" marB="0" anchor="ctr"/>
+                </a:tc>
+                <a:extLst>
+                  <a:ext uri="{0D108BD9-81ED-4DB2-BD59-A6C34878D82A}">
+                    <a16:rowId xmlns:a16="http://schemas.microsoft.com/office/drawing/2014/main" val="597668379"/>
+                  </a:ext>
+                </a:extLst>
+              </a:tr>
+              <a:tr h="280025">
+                <a:tc>
+                  <a:txBody>
+                    <a:bodyPr/>
+                    <a:lstStyle/>
+                    <a:p>
+                      <a:pPr algn="l" fontAlgn="ctr"/>
+                      <a:r>
+                        <a:rPr lang="ru-RU" sz="1600" b="0" u="none" strike="noStrike">
+                          <a:solidFill>
+                            <a:srgbClr val="000000"/>
+                          </a:solidFill>
+                          <a:effectLst/>
+                          <a:latin typeface="Times New Roman" panose="02020603050405020304" pitchFamily="18" charset="0"/>
+                          <a:cs typeface="Times New Roman" panose="02020603050405020304" pitchFamily="18" charset="0"/>
+                        </a:rPr>
+                        <a:t>Сдача работ</a:t>
+                      </a:r>
+                      <a:endParaRPr lang="ru-RU" sz="1600" b="0" i="0" u="none" strike="noStrike">
+                        <a:solidFill>
+                          <a:srgbClr val="000000"/>
+                        </a:solidFill>
+                        <a:effectLst/>
+                        <a:latin typeface="Times New Roman" panose="02020603050405020304" pitchFamily="18" charset="0"/>
+                        <a:cs typeface="Times New Roman" panose="02020603050405020304" pitchFamily="18" charset="0"/>
+                      </a:endParaRPr>
+                    </a:p>
+                  </a:txBody>
+                  <a:tcPr marL="7620" marR="7620" marT="7620" marB="0" anchor="ctr"/>
+                </a:tc>
+                <a:tc>
+                  <a:txBody>
+                    <a:bodyPr/>
+                    <a:lstStyle/>
+                    <a:p>
+                      <a:pPr algn="l" fontAlgn="ctr"/>
+                      <a:r>
+                        <a:rPr lang="ru-RU" sz="1600" b="0" u="none" strike="noStrike">
+                          <a:solidFill>
+                            <a:srgbClr val="000000"/>
+                          </a:solidFill>
+                          <a:effectLst/>
+                          <a:latin typeface="Times New Roman" panose="02020603050405020304" pitchFamily="18" charset="0"/>
+                          <a:cs typeface="Times New Roman" panose="02020603050405020304" pitchFamily="18" charset="0"/>
+                        </a:rPr>
+                        <a:t>+</a:t>
+                      </a:r>
+                      <a:endParaRPr lang="ru-RU" sz="1600" b="0" i="0" u="none" strike="noStrike">
+                        <a:solidFill>
+                          <a:srgbClr val="000000"/>
+                        </a:solidFill>
+                        <a:effectLst/>
+                        <a:latin typeface="Times New Roman" panose="02020603050405020304" pitchFamily="18" charset="0"/>
+                        <a:cs typeface="Times New Roman" panose="02020603050405020304" pitchFamily="18" charset="0"/>
+                      </a:endParaRPr>
+                    </a:p>
+                  </a:txBody>
+                  <a:tcPr marL="7620" marR="7620" marT="7620" marB="0" anchor="ctr"/>
+                </a:tc>
+                <a:tc>
+                  <a:txBody>
+                    <a:bodyPr/>
+                    <a:lstStyle/>
+                    <a:p>
+                      <a:pPr algn="l" fontAlgn="ctr"/>
+                      <a:r>
+                        <a:rPr lang="ru-RU" sz="1600" b="0" u="none" strike="noStrike">
+                          <a:solidFill>
+                            <a:srgbClr val="000000"/>
+                          </a:solidFill>
+                          <a:effectLst/>
+                          <a:latin typeface="Times New Roman" panose="02020603050405020304" pitchFamily="18" charset="0"/>
+                          <a:cs typeface="Times New Roman" panose="02020603050405020304" pitchFamily="18" charset="0"/>
+                        </a:rPr>
+                        <a:t>-</a:t>
+                      </a:r>
+                      <a:endParaRPr lang="ru-RU" sz="1600" b="0" i="0" u="none" strike="noStrike">
+                        <a:solidFill>
+                          <a:srgbClr val="000000"/>
+                        </a:solidFill>
+                        <a:effectLst/>
+                        <a:latin typeface="Times New Roman" panose="02020603050405020304" pitchFamily="18" charset="0"/>
+                        <a:cs typeface="Times New Roman" panose="02020603050405020304" pitchFamily="18" charset="0"/>
+                      </a:endParaRPr>
+                    </a:p>
+                  </a:txBody>
+                  <a:tcPr marL="7620" marR="7620" marT="7620" marB="0" anchor="ctr"/>
+                </a:tc>
+                <a:tc>
+                  <a:txBody>
+                    <a:bodyPr/>
+                    <a:lstStyle/>
+                    <a:p>
+                      <a:pPr algn="l" fontAlgn="ctr"/>
+                      <a:r>
+                        <a:rPr lang="ru-RU" sz="1600" b="0" u="none" strike="noStrike">
+                          <a:solidFill>
+                            <a:srgbClr val="000000"/>
+                          </a:solidFill>
+                          <a:effectLst/>
+                          <a:latin typeface="Times New Roman" panose="02020603050405020304" pitchFamily="18" charset="0"/>
+                          <a:cs typeface="Times New Roman" panose="02020603050405020304" pitchFamily="18" charset="0"/>
+                        </a:rPr>
+                        <a:t>+</a:t>
+                      </a:r>
+                      <a:endParaRPr lang="ru-RU" sz="1600" b="0" i="0" u="none" strike="noStrike">
+                        <a:solidFill>
+                          <a:srgbClr val="000000"/>
+                        </a:solidFill>
+                        <a:effectLst/>
+                        <a:latin typeface="Times New Roman" panose="02020603050405020304" pitchFamily="18" charset="0"/>
+                        <a:cs typeface="Times New Roman" panose="02020603050405020304" pitchFamily="18" charset="0"/>
+                      </a:endParaRPr>
+                    </a:p>
+                  </a:txBody>
+                  <a:tcPr marL="7620" marR="7620" marT="7620" marB="0" anchor="ctr"/>
+                </a:tc>
+                <a:tc>
+                  <a:txBody>
+                    <a:bodyPr/>
+                    <a:lstStyle/>
+                    <a:p>
+                      <a:pPr algn="l" fontAlgn="ctr"/>
+                      <a:r>
+                        <a:rPr lang="ru-RU" sz="1600" b="0" u="none" strike="noStrike">
+                          <a:solidFill>
+                            <a:srgbClr val="000000"/>
+                          </a:solidFill>
+                          <a:effectLst/>
+                          <a:latin typeface="Times New Roman" panose="02020603050405020304" pitchFamily="18" charset="0"/>
+                          <a:cs typeface="Times New Roman" panose="02020603050405020304" pitchFamily="18" charset="0"/>
+                        </a:rPr>
+                        <a:t>+</a:t>
+                      </a:r>
+                      <a:endParaRPr lang="ru-RU" sz="1600" b="0" i="0" u="none" strike="noStrike">
+                        <a:solidFill>
+                          <a:srgbClr val="000000"/>
+                        </a:solidFill>
+                        <a:effectLst/>
+                        <a:latin typeface="Times New Roman" panose="02020603050405020304" pitchFamily="18" charset="0"/>
+                        <a:cs typeface="Times New Roman" panose="02020603050405020304" pitchFamily="18" charset="0"/>
+                      </a:endParaRPr>
+                    </a:p>
+                  </a:txBody>
+                  <a:tcPr marL="7620" marR="7620" marT="7620" marB="0" anchor="ctr"/>
+                </a:tc>
+                <a:extLst>
+                  <a:ext uri="{0D108BD9-81ED-4DB2-BD59-A6C34878D82A}">
+                    <a16:rowId xmlns:a16="http://schemas.microsoft.com/office/drawing/2014/main" val="2188962755"/>
+                  </a:ext>
+                </a:extLst>
+              </a:tr>
+              <a:tr h="280025">
+                <a:tc>
+                  <a:txBody>
+                    <a:bodyPr/>
+                    <a:lstStyle/>
+                    <a:p>
+                      <a:pPr algn="l" fontAlgn="ctr"/>
+                      <a:r>
+                        <a:rPr lang="ru-RU" sz="1600" b="0" u="none" strike="noStrike">
+                          <a:solidFill>
+                            <a:srgbClr val="000000"/>
+                          </a:solidFill>
+                          <a:effectLst/>
+                          <a:latin typeface="Times New Roman" panose="02020603050405020304" pitchFamily="18" charset="0"/>
+                          <a:cs typeface="Times New Roman" panose="02020603050405020304" pitchFamily="18" charset="0"/>
+                        </a:rPr>
+                        <a:t>Проверка работ</a:t>
+                      </a:r>
+                      <a:endParaRPr lang="ru-RU" sz="1600" b="0" i="0" u="none" strike="noStrike">
+                        <a:solidFill>
+                          <a:srgbClr val="000000"/>
+                        </a:solidFill>
+                        <a:effectLst/>
+                        <a:latin typeface="Times New Roman" panose="02020603050405020304" pitchFamily="18" charset="0"/>
+                        <a:cs typeface="Times New Roman" panose="02020603050405020304" pitchFamily="18" charset="0"/>
+                      </a:endParaRPr>
+                    </a:p>
+                  </a:txBody>
+                  <a:tcPr marL="7620" marR="7620" marT="7620" marB="0" anchor="ctr"/>
+                </a:tc>
+                <a:tc>
+                  <a:txBody>
+                    <a:bodyPr/>
+                    <a:lstStyle/>
+                    <a:p>
+                      <a:pPr algn="l" fontAlgn="ctr"/>
+                      <a:r>
+                        <a:rPr lang="ru-RU" sz="1600" b="0" u="none" strike="noStrike">
+                          <a:solidFill>
+                            <a:srgbClr val="000000"/>
+                          </a:solidFill>
+                          <a:effectLst/>
+                          <a:latin typeface="Times New Roman" panose="02020603050405020304" pitchFamily="18" charset="0"/>
+                          <a:cs typeface="Times New Roman" panose="02020603050405020304" pitchFamily="18" charset="0"/>
+                        </a:rPr>
+                        <a:t>+</a:t>
+                      </a:r>
+                      <a:endParaRPr lang="ru-RU" sz="1600" b="0" i="0" u="none" strike="noStrike">
+                        <a:solidFill>
+                          <a:srgbClr val="000000"/>
+                        </a:solidFill>
+                        <a:effectLst/>
+                        <a:latin typeface="Times New Roman" panose="02020603050405020304" pitchFamily="18" charset="0"/>
+                        <a:cs typeface="Times New Roman" panose="02020603050405020304" pitchFamily="18" charset="0"/>
+                      </a:endParaRPr>
+                    </a:p>
+                  </a:txBody>
+                  <a:tcPr marL="7620" marR="7620" marT="7620" marB="0" anchor="ctr"/>
+                </a:tc>
+                <a:tc>
+                  <a:txBody>
+                    <a:bodyPr/>
+                    <a:lstStyle/>
+                    <a:p>
+                      <a:pPr algn="l" fontAlgn="ctr"/>
+                      <a:r>
+                        <a:rPr lang="ru-RU" sz="1600" b="0" u="none" strike="noStrike">
+                          <a:solidFill>
+                            <a:srgbClr val="000000"/>
+                          </a:solidFill>
+                          <a:effectLst/>
+                          <a:latin typeface="Times New Roman" panose="02020603050405020304" pitchFamily="18" charset="0"/>
+                          <a:cs typeface="Times New Roman" panose="02020603050405020304" pitchFamily="18" charset="0"/>
+                        </a:rPr>
+                        <a:t>-</a:t>
+                      </a:r>
+                      <a:endParaRPr lang="ru-RU" sz="1600" b="0" i="0" u="none" strike="noStrike">
+                        <a:solidFill>
+                          <a:srgbClr val="000000"/>
+                        </a:solidFill>
+                        <a:effectLst/>
+                        <a:latin typeface="Times New Roman" panose="02020603050405020304" pitchFamily="18" charset="0"/>
+                        <a:cs typeface="Times New Roman" panose="02020603050405020304" pitchFamily="18" charset="0"/>
+                      </a:endParaRPr>
+                    </a:p>
+                  </a:txBody>
+                  <a:tcPr marL="7620" marR="7620" marT="7620" marB="0" anchor="ctr"/>
+                </a:tc>
+                <a:tc>
+                  <a:txBody>
+                    <a:bodyPr/>
+                    <a:lstStyle/>
+                    <a:p>
+                      <a:pPr algn="l" fontAlgn="ctr"/>
+                      <a:r>
+                        <a:rPr lang="ru-RU" sz="1600" b="0" u="none" strike="noStrike">
+                          <a:solidFill>
+                            <a:srgbClr val="000000"/>
+                          </a:solidFill>
+                          <a:effectLst/>
+                          <a:latin typeface="Times New Roman" panose="02020603050405020304" pitchFamily="18" charset="0"/>
+                          <a:cs typeface="Times New Roman" panose="02020603050405020304" pitchFamily="18" charset="0"/>
+                        </a:rPr>
+                        <a:t>+</a:t>
+                      </a:r>
+                      <a:endParaRPr lang="ru-RU" sz="1600" b="0" i="0" u="none" strike="noStrike">
+                        <a:solidFill>
+                          <a:srgbClr val="000000"/>
+                        </a:solidFill>
+                        <a:effectLst/>
+                        <a:latin typeface="Times New Roman" panose="02020603050405020304" pitchFamily="18" charset="0"/>
+                        <a:cs typeface="Times New Roman" panose="02020603050405020304" pitchFamily="18" charset="0"/>
+                      </a:endParaRPr>
+                    </a:p>
+                  </a:txBody>
+                  <a:tcPr marL="7620" marR="7620" marT="7620" marB="0" anchor="ctr"/>
+                </a:tc>
+                <a:tc>
+                  <a:txBody>
+                    <a:bodyPr/>
+                    <a:lstStyle/>
+                    <a:p>
+                      <a:pPr algn="l" fontAlgn="ctr"/>
+                      <a:r>
+                        <a:rPr lang="ru-RU" sz="1600" b="0" u="none" strike="noStrike">
+                          <a:solidFill>
+                            <a:srgbClr val="000000"/>
+                          </a:solidFill>
+                          <a:effectLst/>
+                          <a:latin typeface="Times New Roman" panose="02020603050405020304" pitchFamily="18" charset="0"/>
+                          <a:cs typeface="Times New Roman" panose="02020603050405020304" pitchFamily="18" charset="0"/>
+                        </a:rPr>
+                        <a:t>+</a:t>
+                      </a:r>
+                      <a:endParaRPr lang="ru-RU" sz="1600" b="0" i="0" u="none" strike="noStrike">
+                        <a:solidFill>
+                          <a:srgbClr val="000000"/>
+                        </a:solidFill>
+                        <a:effectLst/>
+                        <a:latin typeface="Times New Roman" panose="02020603050405020304" pitchFamily="18" charset="0"/>
+                        <a:cs typeface="Times New Roman" panose="02020603050405020304" pitchFamily="18" charset="0"/>
+                      </a:endParaRPr>
+                    </a:p>
+                  </a:txBody>
+                  <a:tcPr marL="7620" marR="7620" marT="7620" marB="0" anchor="ctr"/>
+                </a:tc>
+                <a:extLst>
+                  <a:ext uri="{0D108BD9-81ED-4DB2-BD59-A6C34878D82A}">
+                    <a16:rowId xmlns:a16="http://schemas.microsoft.com/office/drawing/2014/main" val="941078329"/>
+                  </a:ext>
+                </a:extLst>
+              </a:tr>
+              <a:tr h="551565">
+                <a:tc>
+                  <a:txBody>
+                    <a:bodyPr/>
+                    <a:lstStyle/>
+                    <a:p>
+                      <a:pPr algn="l" fontAlgn="ctr"/>
+                      <a:r>
+                        <a:rPr lang="ru-RU" sz="1600" b="0" u="none" strike="noStrike">
+                          <a:solidFill>
+                            <a:srgbClr val="000000"/>
+                          </a:solidFill>
+                          <a:effectLst/>
+                          <a:latin typeface="Times New Roman" panose="02020603050405020304" pitchFamily="18" charset="0"/>
+                          <a:cs typeface="Times New Roman" panose="02020603050405020304" pitchFamily="18" charset="0"/>
+                        </a:rPr>
+                        <a:t>Документ о прохождении</a:t>
+                      </a:r>
+                      <a:endParaRPr lang="ru-RU" sz="1600" b="0" i="0" u="none" strike="noStrike">
+                        <a:solidFill>
+                          <a:srgbClr val="000000"/>
+                        </a:solidFill>
+                        <a:effectLst/>
+                        <a:latin typeface="Times New Roman" panose="02020603050405020304" pitchFamily="18" charset="0"/>
+                        <a:cs typeface="Times New Roman" panose="02020603050405020304" pitchFamily="18" charset="0"/>
+                      </a:endParaRPr>
+                    </a:p>
+                  </a:txBody>
+                  <a:tcPr marL="7620" marR="7620" marT="7620" marB="0" anchor="ctr"/>
+                </a:tc>
+                <a:tc>
+                  <a:txBody>
+                    <a:bodyPr/>
+                    <a:lstStyle/>
+                    <a:p>
+                      <a:pPr algn="l" fontAlgn="ctr"/>
+                      <a:r>
+                        <a:rPr lang="ru-RU" sz="1600" b="0" u="none" strike="noStrike">
+                          <a:solidFill>
+                            <a:srgbClr val="000000"/>
+                          </a:solidFill>
+                          <a:effectLst/>
+                          <a:latin typeface="Times New Roman" panose="02020603050405020304" pitchFamily="18" charset="0"/>
+                          <a:cs typeface="Times New Roman" panose="02020603050405020304" pitchFamily="18" charset="0"/>
+                        </a:rPr>
+                        <a:t>+</a:t>
+                      </a:r>
+                      <a:endParaRPr lang="ru-RU" sz="1600" b="0" i="0" u="none" strike="noStrike">
+                        <a:solidFill>
+                          <a:srgbClr val="000000"/>
+                        </a:solidFill>
+                        <a:effectLst/>
+                        <a:latin typeface="Times New Roman" panose="02020603050405020304" pitchFamily="18" charset="0"/>
+                        <a:cs typeface="Times New Roman" panose="02020603050405020304" pitchFamily="18" charset="0"/>
+                      </a:endParaRPr>
+                    </a:p>
+                  </a:txBody>
+                  <a:tcPr marL="7620" marR="7620" marT="7620" marB="0" anchor="ctr"/>
+                </a:tc>
+                <a:tc>
+                  <a:txBody>
+                    <a:bodyPr/>
+                    <a:lstStyle/>
+                    <a:p>
+                      <a:pPr algn="l" fontAlgn="ctr"/>
+                      <a:r>
+                        <a:rPr lang="ru-RU" sz="1600" b="0" u="none" strike="noStrike">
+                          <a:solidFill>
+                            <a:srgbClr val="000000"/>
+                          </a:solidFill>
+                          <a:effectLst/>
+                          <a:latin typeface="Times New Roman" panose="02020603050405020304" pitchFamily="18" charset="0"/>
+                          <a:cs typeface="Times New Roman" panose="02020603050405020304" pitchFamily="18" charset="0"/>
+                        </a:rPr>
+                        <a:t>-</a:t>
+                      </a:r>
+                      <a:endParaRPr lang="ru-RU" sz="1600" b="0" i="0" u="none" strike="noStrike">
+                        <a:solidFill>
+                          <a:srgbClr val="000000"/>
+                        </a:solidFill>
+                        <a:effectLst/>
+                        <a:latin typeface="Times New Roman" panose="02020603050405020304" pitchFamily="18" charset="0"/>
+                        <a:cs typeface="Times New Roman" panose="02020603050405020304" pitchFamily="18" charset="0"/>
+                      </a:endParaRPr>
+                    </a:p>
+                  </a:txBody>
+                  <a:tcPr marL="7620" marR="7620" marT="7620" marB="0" anchor="ctr"/>
+                </a:tc>
+                <a:tc>
+                  <a:txBody>
+                    <a:bodyPr/>
+                    <a:lstStyle/>
+                    <a:p>
+                      <a:pPr algn="l" fontAlgn="ctr"/>
+                      <a:r>
+                        <a:rPr lang="ru-RU" sz="1600" b="0" u="none" strike="noStrike">
+                          <a:solidFill>
+                            <a:srgbClr val="000000"/>
+                          </a:solidFill>
+                          <a:effectLst/>
+                          <a:latin typeface="Times New Roman" panose="02020603050405020304" pitchFamily="18" charset="0"/>
+                          <a:cs typeface="Times New Roman" panose="02020603050405020304" pitchFamily="18" charset="0"/>
+                        </a:rPr>
+                        <a:t>-</a:t>
+                      </a:r>
+                      <a:endParaRPr lang="ru-RU" sz="1600" b="0" i="0" u="none" strike="noStrike">
+                        <a:solidFill>
+                          <a:srgbClr val="000000"/>
+                        </a:solidFill>
+                        <a:effectLst/>
+                        <a:latin typeface="Times New Roman" panose="02020603050405020304" pitchFamily="18" charset="0"/>
+                        <a:cs typeface="Times New Roman" panose="02020603050405020304" pitchFamily="18" charset="0"/>
+                      </a:endParaRPr>
+                    </a:p>
+                  </a:txBody>
+                  <a:tcPr marL="7620" marR="7620" marT="7620" marB="0" anchor="ctr"/>
+                </a:tc>
+                <a:tc>
+                  <a:txBody>
+                    <a:bodyPr/>
+                    <a:lstStyle/>
+                    <a:p>
+                      <a:pPr algn="l" fontAlgn="ctr"/>
+                      <a:r>
+                        <a:rPr lang="ru-RU" sz="1600" b="0" u="none" strike="noStrike">
+                          <a:solidFill>
+                            <a:srgbClr val="000000"/>
+                          </a:solidFill>
+                          <a:effectLst/>
+                          <a:latin typeface="Times New Roman" panose="02020603050405020304" pitchFamily="18" charset="0"/>
+                          <a:cs typeface="Times New Roman" panose="02020603050405020304" pitchFamily="18" charset="0"/>
+                        </a:rPr>
+                        <a:t>+</a:t>
+                      </a:r>
+                      <a:endParaRPr lang="ru-RU" sz="1600" b="0" i="0" u="none" strike="noStrike">
+                        <a:solidFill>
+                          <a:srgbClr val="000000"/>
+                        </a:solidFill>
+                        <a:effectLst/>
+                        <a:latin typeface="Times New Roman" panose="02020603050405020304" pitchFamily="18" charset="0"/>
+                        <a:cs typeface="Times New Roman" panose="02020603050405020304" pitchFamily="18" charset="0"/>
+                      </a:endParaRPr>
+                    </a:p>
+                  </a:txBody>
+                  <a:tcPr marL="7620" marR="7620" marT="7620" marB="0" anchor="ctr"/>
+                </a:tc>
+                <a:extLst>
+                  <a:ext uri="{0D108BD9-81ED-4DB2-BD59-A6C34878D82A}">
+                    <a16:rowId xmlns:a16="http://schemas.microsoft.com/office/drawing/2014/main" val="1743992714"/>
+                  </a:ext>
+                </a:extLst>
+              </a:tr>
+              <a:tr h="551565">
+                <a:tc>
+                  <a:txBody>
+                    <a:bodyPr/>
+                    <a:lstStyle/>
+                    <a:p>
+                      <a:pPr algn="l" fontAlgn="ctr"/>
+                      <a:r>
+                        <a:rPr lang="ru-RU" sz="1600" b="0" u="none" strike="noStrike">
+                          <a:solidFill>
+                            <a:srgbClr val="000000"/>
+                          </a:solidFill>
+                          <a:effectLst/>
+                          <a:latin typeface="Times New Roman" panose="02020603050405020304" pitchFamily="18" charset="0"/>
+                          <a:cs typeface="Times New Roman" panose="02020603050405020304" pitchFamily="18" charset="0"/>
+                        </a:rPr>
+                        <a:t>Наличие ИИ-ассистента</a:t>
+                      </a:r>
+                      <a:endParaRPr lang="ru-RU" sz="1600" b="0" i="0" u="none" strike="noStrike">
+                        <a:solidFill>
+                          <a:srgbClr val="000000"/>
+                        </a:solidFill>
+                        <a:effectLst/>
+                        <a:latin typeface="Times New Roman" panose="02020603050405020304" pitchFamily="18" charset="0"/>
+                        <a:cs typeface="Times New Roman" panose="02020603050405020304" pitchFamily="18" charset="0"/>
+                      </a:endParaRPr>
+                    </a:p>
+                  </a:txBody>
+                  <a:tcPr marL="7620" marR="7620" marT="7620" marB="0" anchor="ctr"/>
+                </a:tc>
+                <a:tc>
+                  <a:txBody>
+                    <a:bodyPr/>
+                    <a:lstStyle/>
+                    <a:p>
+                      <a:pPr algn="l" fontAlgn="ctr"/>
+                      <a:r>
+                        <a:rPr lang="ru-RU" sz="1600" b="0" u="none" strike="noStrike">
+                          <a:solidFill>
+                            <a:srgbClr val="000000"/>
+                          </a:solidFill>
+                          <a:effectLst/>
+                          <a:latin typeface="Times New Roman" panose="02020603050405020304" pitchFamily="18" charset="0"/>
+                          <a:cs typeface="Times New Roman" panose="02020603050405020304" pitchFamily="18" charset="0"/>
+                        </a:rPr>
+                        <a:t>+</a:t>
+                      </a:r>
+                      <a:endParaRPr lang="ru-RU" sz="1600" b="0" i="0" u="none" strike="noStrike">
+                        <a:solidFill>
+                          <a:srgbClr val="000000"/>
+                        </a:solidFill>
+                        <a:effectLst/>
+                        <a:latin typeface="Times New Roman" panose="02020603050405020304" pitchFamily="18" charset="0"/>
+                        <a:cs typeface="Times New Roman" panose="02020603050405020304" pitchFamily="18" charset="0"/>
+                      </a:endParaRPr>
+                    </a:p>
+                  </a:txBody>
+                  <a:tcPr marL="7620" marR="7620" marT="7620" marB="0" anchor="ctr"/>
+                </a:tc>
+                <a:tc>
+                  <a:txBody>
+                    <a:bodyPr/>
+                    <a:lstStyle/>
+                    <a:p>
+                      <a:pPr algn="l" fontAlgn="ctr"/>
+                      <a:r>
+                        <a:rPr lang="ru-RU" sz="1600" b="0" u="none" strike="noStrike">
+                          <a:solidFill>
+                            <a:srgbClr val="000000"/>
+                          </a:solidFill>
+                          <a:effectLst/>
+                          <a:latin typeface="Times New Roman" panose="02020603050405020304" pitchFamily="18" charset="0"/>
+                          <a:cs typeface="Times New Roman" panose="02020603050405020304" pitchFamily="18" charset="0"/>
+                        </a:rPr>
+                        <a:t>-</a:t>
+                      </a:r>
+                      <a:endParaRPr lang="ru-RU" sz="1600" b="0" i="0" u="none" strike="noStrike">
+                        <a:solidFill>
+                          <a:srgbClr val="000000"/>
+                        </a:solidFill>
+                        <a:effectLst/>
+                        <a:latin typeface="Times New Roman" panose="02020603050405020304" pitchFamily="18" charset="0"/>
+                        <a:cs typeface="Times New Roman" panose="02020603050405020304" pitchFamily="18" charset="0"/>
+                      </a:endParaRPr>
+                    </a:p>
+                  </a:txBody>
+                  <a:tcPr marL="7620" marR="7620" marT="7620" marB="0" anchor="ctr"/>
+                </a:tc>
+                <a:tc>
+                  <a:txBody>
+                    <a:bodyPr/>
+                    <a:lstStyle/>
+                    <a:p>
+                      <a:pPr algn="l" fontAlgn="ctr"/>
+                      <a:r>
+                        <a:rPr lang="ru-RU" sz="1600" b="0" u="none" strike="noStrike">
+                          <a:solidFill>
+                            <a:srgbClr val="000000"/>
+                          </a:solidFill>
+                          <a:effectLst/>
+                          <a:latin typeface="Times New Roman" panose="02020603050405020304" pitchFamily="18" charset="0"/>
+                          <a:cs typeface="Times New Roman" panose="02020603050405020304" pitchFamily="18" charset="0"/>
+                        </a:rPr>
+                        <a:t>-</a:t>
+                      </a:r>
+                      <a:endParaRPr lang="ru-RU" sz="1600" b="0" i="0" u="none" strike="noStrike">
+                        <a:solidFill>
+                          <a:srgbClr val="000000"/>
+                        </a:solidFill>
+                        <a:effectLst/>
+                        <a:latin typeface="Times New Roman" panose="02020603050405020304" pitchFamily="18" charset="0"/>
+                        <a:cs typeface="Times New Roman" panose="02020603050405020304" pitchFamily="18" charset="0"/>
+                      </a:endParaRPr>
+                    </a:p>
+                  </a:txBody>
+                  <a:tcPr marL="7620" marR="7620" marT="7620" marB="0" anchor="ctr"/>
+                </a:tc>
+                <a:tc>
+                  <a:txBody>
+                    <a:bodyPr/>
+                    <a:lstStyle/>
+                    <a:p>
+                      <a:pPr algn="l" fontAlgn="ctr"/>
+                      <a:r>
+                        <a:rPr lang="ru-RU" sz="1600" b="0" u="none" strike="noStrike" dirty="0">
+                          <a:solidFill>
+                            <a:srgbClr val="000000"/>
+                          </a:solidFill>
+                          <a:effectLst/>
+                          <a:latin typeface="Times New Roman" panose="02020603050405020304" pitchFamily="18" charset="0"/>
+                          <a:cs typeface="Times New Roman" panose="02020603050405020304" pitchFamily="18" charset="0"/>
+                        </a:rPr>
+                        <a:t>+</a:t>
+                      </a:r>
+                      <a:endParaRPr lang="ru-RU" sz="1600" b="0" i="0" u="none" strike="noStrike" dirty="0">
+                        <a:solidFill>
+                          <a:srgbClr val="000000"/>
+                        </a:solidFill>
+                        <a:effectLst/>
+                        <a:latin typeface="Times New Roman" panose="02020603050405020304" pitchFamily="18" charset="0"/>
+                        <a:cs typeface="Times New Roman" panose="02020603050405020304" pitchFamily="18" charset="0"/>
+                      </a:endParaRPr>
+                    </a:p>
+                  </a:txBody>
+                  <a:tcPr marL="7620" marR="7620" marT="7620" marB="0" anchor="ctr"/>
+                </a:tc>
+                <a:extLst>
+                  <a:ext uri="{0D108BD9-81ED-4DB2-BD59-A6C34878D82A}">
+                    <a16:rowId xmlns:a16="http://schemas.microsoft.com/office/drawing/2014/main" val="1901107910"/>
+                  </a:ext>
+                </a:extLst>
+              </a:tr>
+            </a:tbl>
+          </a:graphicData>
+        </a:graphic>
+      </p:graphicFrame>
     </p:spTree>
   </p:cSld>
   <p:clrMapOvr>
@@ -8051,28 +10146,31 @@
           <a:lstStyle/>
           <a:p>
             <a:r>
-              <a:rPr lang="ru-RU" sz="1850" b="1" dirty="0">
+              <a:rPr lang="ru-RU" sz="1900" b="1" dirty="0">
                 <a:solidFill>
                   <a:srgbClr val="202A36"/>
                 </a:solidFill>
-                <a:latin typeface="Arial" pitchFamily="34" charset="0"/>
+                <a:latin typeface="Times New Roman" panose="02020603050405020304" pitchFamily="18" charset="0"/>
                 <a:ea typeface="Arial" pitchFamily="34" charset="-122"/>
-                <a:cs typeface="Arial" pitchFamily="34" charset="-120"/>
+                <a:cs typeface="Times New Roman" panose="02020603050405020304" pitchFamily="18" charset="0"/>
               </a:rPr>
               <a:t>Системный анализ </a:t>
             </a:r>
             <a:r>
-              <a:rPr lang="en-US" sz="1850" b="1" dirty="0">
+              <a:rPr lang="en-US" sz="1900" b="1" dirty="0">
                 <a:solidFill>
                   <a:srgbClr val="202A36"/>
                 </a:solidFill>
-                <a:latin typeface="Arial" pitchFamily="34" charset="0"/>
+                <a:latin typeface="Times New Roman" panose="02020603050405020304" pitchFamily="18" charset="0"/>
                 <a:ea typeface="Arial" pitchFamily="34" charset="-122"/>
-                <a:cs typeface="Arial" pitchFamily="34" charset="-120"/>
+                <a:cs typeface="Times New Roman" panose="02020603050405020304" pitchFamily="18" charset="0"/>
               </a:rPr>
               <a:t>DFD AS-IS</a:t>
             </a:r>
-            <a:endParaRPr lang="en-US" sz="1850" dirty="0"/>
+            <a:endParaRPr lang="en-US" sz="1900" dirty="0">
+              <a:latin typeface="Times New Roman" panose="02020603050405020304" pitchFamily="18" charset="0"/>
+              <a:cs typeface="Times New Roman" panose="02020603050405020304" pitchFamily="18" charset="0"/>
+            </a:endParaRPr>
           </a:p>
         </p:txBody>
       </p:sp>
@@ -8164,28 +10262,31 @@
           <a:lstStyle/>
           <a:p>
             <a:r>
-              <a:rPr lang="ru-RU" sz="1850" b="1" dirty="0">
+              <a:rPr lang="ru-RU" sz="1900" b="1" dirty="0">
                 <a:solidFill>
                   <a:srgbClr val="202A36"/>
                 </a:solidFill>
-                <a:latin typeface="Arial" pitchFamily="34" charset="0"/>
+                <a:latin typeface="Times New Roman" panose="02020603050405020304" pitchFamily="18" charset="0"/>
                 <a:ea typeface="Arial" pitchFamily="34" charset="-122"/>
-                <a:cs typeface="Arial" pitchFamily="34" charset="-120"/>
+                <a:cs typeface="Times New Roman" panose="02020603050405020304" pitchFamily="18" charset="0"/>
               </a:rPr>
               <a:t>Системный анализ </a:t>
             </a:r>
             <a:r>
-              <a:rPr lang="en-US" sz="1850" b="1" dirty="0">
+              <a:rPr lang="en-US" sz="1900" b="1" dirty="0">
                 <a:solidFill>
                   <a:srgbClr val="202A36"/>
                 </a:solidFill>
-                <a:latin typeface="Arial" pitchFamily="34" charset="0"/>
+                <a:latin typeface="Times New Roman" panose="02020603050405020304" pitchFamily="18" charset="0"/>
                 <a:ea typeface="Arial" pitchFamily="34" charset="-122"/>
-                <a:cs typeface="Arial" pitchFamily="34" charset="-120"/>
+                <a:cs typeface="Times New Roman" panose="02020603050405020304" pitchFamily="18" charset="0"/>
               </a:rPr>
               <a:t>DFD AS-IS</a:t>
             </a:r>
-            <a:endParaRPr lang="en-US" sz="1850" dirty="0"/>
+            <a:endParaRPr lang="en-US" sz="1900" dirty="0">
+              <a:latin typeface="Times New Roman" panose="02020603050405020304" pitchFamily="18" charset="0"/>
+              <a:cs typeface="Times New Roman" panose="02020603050405020304" pitchFamily="18" charset="0"/>
+            </a:endParaRPr>
           </a:p>
         </p:txBody>
       </p:sp>
@@ -8277,28 +10378,31 @@
           <a:lstStyle/>
           <a:p>
             <a:r>
-              <a:rPr lang="ru-RU" sz="1850" b="1" dirty="0">
+              <a:rPr lang="ru-RU" sz="1900" b="1" dirty="0">
                 <a:solidFill>
                   <a:srgbClr val="202A36"/>
                 </a:solidFill>
-                <a:latin typeface="Arial" pitchFamily="34" charset="0"/>
+                <a:latin typeface="Times New Roman" panose="02020603050405020304" pitchFamily="18" charset="0"/>
                 <a:ea typeface="Arial" pitchFamily="34" charset="-122"/>
-                <a:cs typeface="Arial" pitchFamily="34" charset="-120"/>
+                <a:cs typeface="Times New Roman" panose="02020603050405020304" pitchFamily="18" charset="0"/>
               </a:rPr>
               <a:t>Системный анализ </a:t>
             </a:r>
             <a:r>
-              <a:rPr lang="en-US" sz="1850" b="1" dirty="0">
+              <a:rPr lang="en-US" sz="1900" b="1" dirty="0">
                 <a:solidFill>
                   <a:srgbClr val="202A36"/>
                 </a:solidFill>
-                <a:latin typeface="Arial" pitchFamily="34" charset="0"/>
+                <a:latin typeface="Times New Roman" panose="02020603050405020304" pitchFamily="18" charset="0"/>
                 <a:ea typeface="Arial" pitchFamily="34" charset="-122"/>
-                <a:cs typeface="Arial" pitchFamily="34" charset="-120"/>
+                <a:cs typeface="Times New Roman" panose="02020603050405020304" pitchFamily="18" charset="0"/>
               </a:rPr>
               <a:t>IDEF0 AS-IS</a:t>
             </a:r>
-            <a:endParaRPr lang="en-US" sz="1850" dirty="0"/>
+            <a:endParaRPr lang="en-US" sz="1900" dirty="0">
+              <a:latin typeface="Times New Roman" panose="02020603050405020304" pitchFamily="18" charset="0"/>
+              <a:cs typeface="Times New Roman" panose="02020603050405020304" pitchFamily="18" charset="0"/>
+            </a:endParaRPr>
           </a:p>
         </p:txBody>
       </p:sp>
@@ -8390,28 +10494,31 @@
           <a:lstStyle/>
           <a:p>
             <a:r>
-              <a:rPr lang="ru-RU" sz="1850" b="1" dirty="0">
+              <a:rPr lang="ru-RU" sz="1900" b="1" dirty="0">
                 <a:solidFill>
                   <a:srgbClr val="202A36"/>
                 </a:solidFill>
-                <a:latin typeface="Arial" pitchFamily="34" charset="0"/>
+                <a:latin typeface="Times New Roman" panose="02020603050405020304" pitchFamily="18" charset="0"/>
                 <a:ea typeface="Arial" pitchFamily="34" charset="-122"/>
-                <a:cs typeface="Arial" pitchFamily="34" charset="-120"/>
+                <a:cs typeface="Times New Roman" panose="02020603050405020304" pitchFamily="18" charset="0"/>
               </a:rPr>
               <a:t>Системный анализ </a:t>
             </a:r>
             <a:r>
-              <a:rPr lang="en-US" sz="1850" b="1" dirty="0">
+              <a:rPr lang="en-US" sz="1900" b="1" dirty="0">
                 <a:solidFill>
                   <a:srgbClr val="202A36"/>
                 </a:solidFill>
-                <a:latin typeface="Arial" pitchFamily="34" charset="0"/>
+                <a:latin typeface="Times New Roman" panose="02020603050405020304" pitchFamily="18" charset="0"/>
                 <a:ea typeface="Arial" pitchFamily="34" charset="-122"/>
-                <a:cs typeface="Arial" pitchFamily="34" charset="-120"/>
+                <a:cs typeface="Times New Roman" panose="02020603050405020304" pitchFamily="18" charset="0"/>
               </a:rPr>
               <a:t>IDEF0 AS-IS</a:t>
             </a:r>
-            <a:endParaRPr lang="en-US" sz="1850" dirty="0"/>
+            <a:endParaRPr lang="en-US" sz="1900" dirty="0">
+              <a:latin typeface="Times New Roman" panose="02020603050405020304" pitchFamily="18" charset="0"/>
+              <a:cs typeface="Times New Roman" panose="02020603050405020304" pitchFamily="18" charset="0"/>
+            </a:endParaRPr>
           </a:p>
         </p:txBody>
       </p:sp>
@@ -8503,28 +10610,31 @@
           <a:lstStyle/>
           <a:p>
             <a:r>
-              <a:rPr lang="ru-RU" sz="1850" b="1" dirty="0">
+              <a:rPr lang="ru-RU" sz="1900" b="1" dirty="0">
                 <a:solidFill>
                   <a:srgbClr val="202A36"/>
                 </a:solidFill>
-                <a:latin typeface="Arial" pitchFamily="34" charset="0"/>
+                <a:latin typeface="Times New Roman" panose="02020603050405020304" pitchFamily="18" charset="0"/>
                 <a:ea typeface="Arial" pitchFamily="34" charset="-122"/>
-                <a:cs typeface="Arial" pitchFamily="34" charset="-120"/>
+                <a:cs typeface="Times New Roman" panose="02020603050405020304" pitchFamily="18" charset="0"/>
               </a:rPr>
               <a:t>Системный анализ </a:t>
             </a:r>
             <a:r>
-              <a:rPr lang="en-US" sz="1850" b="1" dirty="0">
+              <a:rPr lang="en-US" sz="1900" b="1" dirty="0">
                 <a:solidFill>
                   <a:srgbClr val="202A36"/>
                 </a:solidFill>
-                <a:latin typeface="Arial" pitchFamily="34" charset="0"/>
+                <a:latin typeface="Times New Roman" panose="02020603050405020304" pitchFamily="18" charset="0"/>
                 <a:ea typeface="Arial" pitchFamily="34" charset="-122"/>
-                <a:cs typeface="Arial" pitchFamily="34" charset="-120"/>
+                <a:cs typeface="Times New Roman" panose="02020603050405020304" pitchFamily="18" charset="0"/>
               </a:rPr>
               <a:t>DFD TO-BE</a:t>
             </a:r>
-            <a:endParaRPr lang="en-US" sz="1850" dirty="0"/>
+            <a:endParaRPr lang="en-US" sz="1900" dirty="0">
+              <a:latin typeface="Times New Roman" panose="02020603050405020304" pitchFamily="18" charset="0"/>
+              <a:cs typeface="Times New Roman" panose="02020603050405020304" pitchFamily="18" charset="0"/>
+            </a:endParaRPr>
           </a:p>
         </p:txBody>
       </p:sp>

--- a/Презентация.pptx
+++ b/Презентация.pptx
@@ -12,22 +12,22 @@
     <p:sldId id="275" r:id="rId3"/>
     <p:sldId id="276" r:id="rId4"/>
     <p:sldId id="257" r:id="rId5"/>
-    <p:sldId id="258" r:id="rId6"/>
-    <p:sldId id="259" r:id="rId7"/>
-    <p:sldId id="260" r:id="rId8"/>
-    <p:sldId id="261" r:id="rId9"/>
-    <p:sldId id="262" r:id="rId10"/>
-    <p:sldId id="263" r:id="rId11"/>
-    <p:sldId id="277" r:id="rId12"/>
-    <p:sldId id="278" r:id="rId13"/>
-    <p:sldId id="279" r:id="rId14"/>
-    <p:sldId id="264" r:id="rId15"/>
-    <p:sldId id="265" r:id="rId16"/>
-    <p:sldId id="266" r:id="rId17"/>
-    <p:sldId id="267" r:id="rId18"/>
-    <p:sldId id="268" r:id="rId19"/>
-    <p:sldId id="273" r:id="rId20"/>
-    <p:sldId id="274" r:id="rId21"/>
+    <p:sldId id="260" r:id="rId6"/>
+    <p:sldId id="261" r:id="rId7"/>
+    <p:sldId id="258" r:id="rId8"/>
+    <p:sldId id="259" r:id="rId9"/>
+    <p:sldId id="278" r:id="rId10"/>
+    <p:sldId id="279" r:id="rId11"/>
+    <p:sldId id="262" r:id="rId12"/>
+    <p:sldId id="263" r:id="rId13"/>
+    <p:sldId id="264" r:id="rId14"/>
+    <p:sldId id="265" r:id="rId15"/>
+    <p:sldId id="266" r:id="rId16"/>
+    <p:sldId id="267" r:id="rId17"/>
+    <p:sldId id="268" r:id="rId18"/>
+    <p:sldId id="273" r:id="rId19"/>
+    <p:sldId id="280" r:id="rId20"/>
+    <p:sldId id="281" r:id="rId21"/>
   </p:sldIdLst>
   <p:sldSz cx="12192000" cy="6858000"/>
   <p:notesSz cx="6858000" cy="9144000"/>
@@ -216,7 +216,7 @@
           <a:p>
             <a:fld id="{5851A9A9-2245-4E97-B235-5B011A4152DA}" type="datetimeFigureOut">
               <a:rPr lang="ru-RU" smtClean="0"/>
-              <a:t>29.05.2026</a:t>
+              <a:t>02.06.2026</a:t>
             </a:fld>
             <a:endParaRPr lang="ru-RU"/>
           </a:p>
@@ -616,7 +616,7 @@
           <a:p>
             <a:r>
               <a:rPr lang="en-US" dirty="0"/>
-              <a:t>Последний фрагмент TO-BE показывает сопровождение обучения. Здесь материалы, задания, работы учеников, посещаемость и результаты уже не живут отдельно. Они связаны с группой, занятием и пользователем. Важный инвариант: доступ к разделу обучения открывается только после записи участия в группе, то есть после зачисления.</a:t>
+              <a:t>На декомпозиции TO-BE показано главное изменение: этапы связаны через модуль и его базу данных. Заявка создаётся в системе, собеседование выбирается через слот, решение фиксируется статусом, а зачисление создаёт участие пользователя в группе. Благодаря этому последующие этапы — обучение, задания, посещаемость и отчётность — используют уже проверенные данные.</a:t>
             </a:r>
           </a:p>
         </p:txBody>
@@ -647,7 +647,7 @@
     </p:spTree>
     <p:extLst>
       <p:ext uri="{BB962C8B-B14F-4D97-AF65-F5344CB8AC3E}">
-        <p14:creationId xmlns:p14="http://schemas.microsoft.com/office/powerpoint/2010/main" val="2577228555"/>
+        <p14:creationId xmlns:p14="http://schemas.microsoft.com/office/powerpoint/2010/main" val="1024086991"/>
       </p:ext>
     </p:extLst>
   </p:cSld>
@@ -734,7 +734,7 @@
     </p:spTree>
     <p:extLst>
       <p:ext uri="{BB962C8B-B14F-4D97-AF65-F5344CB8AC3E}">
-        <p14:creationId xmlns:p14="http://schemas.microsoft.com/office/powerpoint/2010/main" val="1268317189"/>
+        <p14:creationId xmlns:p14="http://schemas.microsoft.com/office/powerpoint/2010/main" val="1024086991"/>
       </p:ext>
     </p:extLst>
   </p:cSld>
@@ -790,7 +790,7 @@
           <a:p>
             <a:r>
               <a:rPr lang="en-US" dirty="0"/>
-              <a:t>Последний фрагмент TO-BE показывает сопровождение обучения. Здесь материалы, задания, работы учеников, посещаемость и результаты уже не живут отдельно. Они связаны с группой, занятием и пользователем. Важный инвариант: доступ к разделу обучения открывается только после записи участия в группе, то есть после зачисления.</a:t>
+              <a:t>После процессных диаграмм перехожу к модели данных. Логическая модель показывает, какие сущности нужны модулю: курс, блок, группа, заявка, слот собеседования, зачисление, занятие, материал, задание, работа ученика, посещаемость и сертификат. Самая важная связь — между группой и пользователем через зачисление. Именно эта запись является основанием для доступа к обучению.</a:t>
             </a:r>
           </a:p>
         </p:txBody>
@@ -821,7 +821,7 @@
     </p:spTree>
     <p:extLst>
       <p:ext uri="{BB962C8B-B14F-4D97-AF65-F5344CB8AC3E}">
-        <p14:creationId xmlns:p14="http://schemas.microsoft.com/office/powerpoint/2010/main" val="1915006975"/>
+        <p14:creationId xmlns:p14="http://schemas.microsoft.com/office/powerpoint/2010/main" val="1024086991"/>
       </p:ext>
     </p:extLst>
   </p:cSld>
@@ -877,7 +877,7 @@
           <a:p>
             <a:r>
               <a:rPr lang="en-US" dirty="0"/>
-              <a:t>После процессных диаграмм перехожу к модели данных. Логическая модель показывает, какие сущности нужны модулю: курс, блок, группа, заявка, слот собеседования, зачисление, занятие, материал, задание, работа ученика, посещаемость и сертификат. Самая важная связь — между группой и пользователем через зачисление. Именно эта запись является основанием для доступа к обучению.</a:t>
+              <a:t>Физическая модель переводит логическую структуру в таблицы PostgreSQL. Здесь уже видны ключи, связи и технические ограничения. Например, все смены статуса заявки фиксируются в отдельной истории, а запись group_students означает не просто принадлежность пользователя к группе, а фактическое зачисление. Файлы материалов не сохраняются прямо в базе: в базе остаются метаданные и object_key, а само хранение выполняется через MinIO.</a:t>
             </a:r>
           </a:p>
         </p:txBody>
@@ -964,7 +964,7 @@
           <a:p>
             <a:r>
               <a:rPr lang="en-US" dirty="0"/>
-              <a:t>Физическая модель переводит логическую структуру в таблицы PostgreSQL. Здесь уже видны ключи, связи и технические ограничения. Например, все смены статуса заявки фиксируются в отдельной истории, а запись group_students означает не просто принадлежность пользователя к группе, а фактическое зачисление. Файлы материалов не сохраняются прямо в базе: в базе остаются метаданные и object_key, а само хранение выполняется через MinIO.</a:t>
+              <a:t>Техническая реализация построена по backend-first подходу. Основной backend разрабатывается на Go, потому что это требование ядра платформы и хороший выбор для модульной серверной архитектуры. Для хранения данных используется PostgreSQL, для файлов — MinIO в S3-совместимом режиме. Frontend разделён на пользовательскую часть на Next.js и административную часть на React SPA. Отдельно учитываются события, outbox, аудит и разграничение прав.</a:t>
             </a:r>
           </a:p>
         </p:txBody>
@@ -1051,7 +1051,7 @@
           <a:p>
             <a:r>
               <a:rPr lang="en-US" dirty="0"/>
-              <a:t>Техническая реализация построена по backend-first подходу. Основной backend разрабатывается на Go, потому что это требование ядра платформы и хороший выбор для модульной серверной архитектуры. Для хранения данных используется PostgreSQL, для файлов — MinIO в S3-совместимом режиме. Frontend разделён на пользовательскую часть на Next.js и административную часть на React SPA. Отдельно учитываются события, outbox, аудит и разграничение прав.</a:t>
+              <a:t>Архитектура разделена на ядро и модуль образования. Ядро отвечает за учётные записи, вход и глобальные роли. Модуль образования не дублирует эти функции, а хранит UserID и свои доменные данные: заявки, группы, участие, прогресс и результаты. Отдельные frontend-приложения обращаются к системе через gateway. Файлы размещаются в MinIO, а события позволяют запускать уведомления и автоматизации без жёсткой связи между компонентами.</a:t>
             </a:r>
           </a:p>
         </p:txBody>
@@ -1138,7 +1138,7 @@
           <a:p>
             <a:r>
               <a:rPr lang="en-US" dirty="0"/>
-              <a:t>Архитектура разделена на ядро и модуль образования. Ядро отвечает за учётные записи, вход и глобальные роли. Модуль образования не дублирует эти функции, а хранит UserID и свои доменные данные: заявки, группы, участие, прогресс и результаты. Отдельные frontend-приложения обращаются к системе через gateway. Файлы размещаются в MinIO, а события позволяют запускать уведомления и автоматизации без жёсткой связи между компонентами.</a:t>
+              <a:t>Диаграмма прецедентов показывает, какие действия доступны участникам. Ученик работает с каталогом, заявкой, собеседованием и обучением. Преподаватель получает доступ только к тем группам, где он назначен, поэтому его права ограничены контекстом группы. Завуч и администратор управляют программами, группами, заявками и итоговыми документами. Такое разграничение важно для безопасности и для защиты проекта.</a:t>
             </a:r>
           </a:p>
         </p:txBody>
@@ -1225,7 +1225,7 @@
           <a:p>
             <a:r>
               <a:rPr lang="en-US" dirty="0"/>
-              <a:t>Диаграмма прецедентов показывает, какие действия доступны участникам. Ученик работает с каталогом, заявкой, собеседованием и обучением. Преподаватель получает доступ только к тем группам, где он назначен, поэтому его права ограничены контекстом группы. Завуч и администратор управляют программами, группами, заявками и итоговыми документами. Такое разграничение важно для безопасности и для защиты проекта.</a:t>
+              <a:t>В завершение были проверены основные сценарии: создание курса и группы, подача заявки, выбор слота, прохождение статусов, зачисление, доступ к обучению, материалы, задания, посещаемость и результаты. По сравнению AS-IS и TO-BE трудоёмкость типового процесса снижается с 440 до 220 минут. Главный эффект достигается за счёт единой базы данных, отказа от ручного переноса сведений, контроля доступа после зачисления и прозрачной истории решений. Спасибо за внимание.</a:t>
             </a:r>
           </a:p>
         </p:txBody>
@@ -1343,7 +1343,7 @@
     </p:spTree>
     <p:extLst>
       <p:ext uri="{BB962C8B-B14F-4D97-AF65-F5344CB8AC3E}">
-        <p14:creationId xmlns:p14="http://schemas.microsoft.com/office/powerpoint/2010/main" val="1024086991"/>
+        <p14:creationId xmlns:p14="http://schemas.microsoft.com/office/powerpoint/2010/main" val="2734639543"/>
       </p:ext>
     </p:extLst>
   </p:cSld>
@@ -1573,7 +1573,7 @@
           <a:p>
             <a:r>
               <a:rPr lang="en-US" dirty="0"/>
-              <a:t>Начинаю с AS-IS модели. Контекстная диаграмма показывает процесс в текущем виде: ученик, преподаватель и администратор участвуют в обучении, но значительная часть данных передаётся между ними вручную. Входы и выходы уже есть, но единый программный контур, который бы связывал заявку, обучение и результаты, отсутствует.</a:t>
+              <a:t>Чтобы показать проблему точнее, я выделил фрагмент формирования курса. Здесь вручную собираются данные о программе, условиях набора, группах и преподавателе. Дальше эти сведения должны быть заново использованы при заявках и обучении. Именно поэтому в TO-BE модели я переношу данные программы и группы в единую базу модуля.</a:t>
             </a:r>
           </a:p>
         </p:txBody>
@@ -1660,7 +1660,7 @@
           <a:p>
             <a:r>
               <a:rPr lang="en-US" dirty="0"/>
-              <a:t>На декомпозиции AS-IS видны основные этапы: формирование курса, приём анкет, собеседование, обучение и подготовка итогов. Проблема здесь не в последовательности этапов, а в способе передачи данных. Информация многократно переносится между таблицами, документами и коммуникациями, поэтому появляются дубли, задержки и риск ошибки.</a:t>
+              <a:t>Теперь перехожу к TO-BE модели. В ней процесс не меняется по смыслу: ученик всё так же подаёт заявку, преподаватель ведёт обучение, администратор контролирует набор. Но меняется механизм работы: центральной точкой становится модуль «Образование». Он принимает заявки, хранит слоты собеседований, управляет доступом к обучению и формирует данные для результатов.</a:t>
             </a:r>
           </a:p>
         </p:txBody>
@@ -1747,7 +1747,7 @@
           <a:p>
             <a:r>
               <a:rPr lang="en-US" dirty="0"/>
-              <a:t>Чтобы показать проблему точнее, я выделил фрагмент формирования курса. Здесь вручную собираются данные о программе, условиях набора, группах и преподавателе. Дальше эти сведения должны быть заново использованы при заявках и обучении. Именно поэтому в TO-BE модели я переношу данные программы и группы в единую базу модуля.</a:t>
+              <a:t>Начинаю с AS-IS модели. Контекстная диаграмма показывает процесс в текущем виде: ученик, преподаватель и администратор участвуют в обучении, но значительная часть данных передаётся между ними вручную. Входы и выходы уже есть, но единый программный контур, который бы связывал заявку, обучение и результаты, отсутствует.</a:t>
             </a:r>
           </a:p>
         </p:txBody>
@@ -1834,7 +1834,7 @@
           <a:p>
             <a:r>
               <a:rPr lang="en-US" dirty="0"/>
-              <a:t>Теперь перехожу к TO-BE модели. В ней процесс не меняется по смыслу: ученик всё так же подаёт заявку, преподаватель ведёт обучение, администратор контролирует набор. Но меняется механизм работы: центральной точкой становится модуль «Образование». Он принимает заявки, хранит слоты собеседований, управляет доступом к обучению и формирует данные для результатов.</a:t>
+              <a:t>На декомпозиции AS-IS видны основные этапы: формирование курса, приём анкет, собеседование, обучение и подготовка итогов. Проблема здесь не в последовательности этапов, а в способе передачи данных. Информация многократно переносится между таблицами, документами и коммуникациями, поэтому появляются дубли, задержки и риск ошибки.</a:t>
             </a:r>
           </a:p>
         </p:txBody>
@@ -1921,7 +1921,7 @@
           <a:p>
             <a:r>
               <a:rPr lang="en-US" dirty="0"/>
-              <a:t>На декомпозиции TO-BE показано главное изменение: этапы связаны через модуль и его базу данных. Заявка создаётся в системе, собеседование выбирается через слот, решение фиксируется статусом, а зачисление создаёт участие пользователя в группе. Благодаря этому последующие этапы — обучение, задания, посещаемость и отчётность — используют уже проверенные данные.</a:t>
+              <a:t>Последний фрагмент TO-BE показывает сопровождение обучения. Здесь материалы, задания, работы учеников, посещаемость и результаты уже не живут отдельно. Они связаны с группой, занятием и пользователем. Важный инвариант: доступ к разделу обучения открывается только после записи участия в группе, то есть после зачисления.</a:t>
             </a:r>
           </a:p>
         </p:txBody>
@@ -1952,7 +1952,7 @@
     </p:spTree>
     <p:extLst>
       <p:ext uri="{BB962C8B-B14F-4D97-AF65-F5344CB8AC3E}">
-        <p14:creationId xmlns:p14="http://schemas.microsoft.com/office/powerpoint/2010/main" val="1024086991"/>
+        <p14:creationId xmlns:p14="http://schemas.microsoft.com/office/powerpoint/2010/main" val="1268317189"/>
       </p:ext>
     </p:extLst>
   </p:cSld>
@@ -2039,7 +2039,7 @@
     </p:spTree>
     <p:extLst>
       <p:ext uri="{BB962C8B-B14F-4D97-AF65-F5344CB8AC3E}">
-        <p14:creationId xmlns:p14="http://schemas.microsoft.com/office/powerpoint/2010/main" val="1024086991"/>
+        <p14:creationId xmlns:p14="http://schemas.microsoft.com/office/powerpoint/2010/main" val="1915006975"/>
       </p:ext>
     </p:extLst>
   </p:cSld>
@@ -2196,7 +2196,7 @@
           <a:p>
             <a:fld id="{BC746F3E-D9D4-428F-AE2E-829871699F6C}" type="datetimeFigureOut">
               <a:rPr lang="ru-RU" smtClean="0"/>
-              <a:t>29.05.2026</a:t>
+              <a:t>02.06.2026</a:t>
             </a:fld>
             <a:endParaRPr lang="ru-RU"/>
           </a:p>
@@ -2394,7 +2394,7 @@
           <a:p>
             <a:fld id="{BC746F3E-D9D4-428F-AE2E-829871699F6C}" type="datetimeFigureOut">
               <a:rPr lang="ru-RU" smtClean="0"/>
-              <a:t>29.05.2026</a:t>
+              <a:t>02.06.2026</a:t>
             </a:fld>
             <a:endParaRPr lang="ru-RU"/>
           </a:p>
@@ -2602,7 +2602,7 @@
           <a:p>
             <a:fld id="{BC746F3E-D9D4-428F-AE2E-829871699F6C}" type="datetimeFigureOut">
               <a:rPr lang="ru-RU" smtClean="0"/>
-              <a:t>29.05.2026</a:t>
+              <a:t>02.06.2026</a:t>
             </a:fld>
             <a:endParaRPr lang="ru-RU"/>
           </a:p>
@@ -2925,7 +2925,7 @@
           <a:p>
             <a:fld id="{BC746F3E-D9D4-428F-AE2E-829871699F6C}" type="datetimeFigureOut">
               <a:rPr lang="ru-RU" smtClean="0"/>
-              <a:t>29.05.2026</a:t>
+              <a:t>02.06.2026</a:t>
             </a:fld>
             <a:endParaRPr lang="ru-RU"/>
           </a:p>
@@ -3200,7 +3200,7 @@
           <a:p>
             <a:fld id="{BC746F3E-D9D4-428F-AE2E-829871699F6C}" type="datetimeFigureOut">
               <a:rPr lang="ru-RU" smtClean="0"/>
-              <a:t>29.05.2026</a:t>
+              <a:t>02.06.2026</a:t>
             </a:fld>
             <a:endParaRPr lang="ru-RU"/>
           </a:p>
@@ -3465,7 +3465,7 @@
           <a:p>
             <a:fld id="{BC746F3E-D9D4-428F-AE2E-829871699F6C}" type="datetimeFigureOut">
               <a:rPr lang="ru-RU" smtClean="0"/>
-              <a:t>29.05.2026</a:t>
+              <a:t>02.06.2026</a:t>
             </a:fld>
             <a:endParaRPr lang="ru-RU"/>
           </a:p>
@@ -3877,7 +3877,7 @@
           <a:p>
             <a:fld id="{BC746F3E-D9D4-428F-AE2E-829871699F6C}" type="datetimeFigureOut">
               <a:rPr lang="ru-RU" smtClean="0"/>
-              <a:t>29.05.2026</a:t>
+              <a:t>02.06.2026</a:t>
             </a:fld>
             <a:endParaRPr lang="ru-RU"/>
           </a:p>
@@ -4018,7 +4018,7 @@
           <a:p>
             <a:fld id="{BC746F3E-D9D4-428F-AE2E-829871699F6C}" type="datetimeFigureOut">
               <a:rPr lang="ru-RU" smtClean="0"/>
-              <a:t>29.05.2026</a:t>
+              <a:t>02.06.2026</a:t>
             </a:fld>
             <a:endParaRPr lang="ru-RU"/>
           </a:p>
@@ -4131,7 +4131,7 @@
           <a:p>
             <a:fld id="{BC746F3E-D9D4-428F-AE2E-829871699F6C}" type="datetimeFigureOut">
               <a:rPr lang="ru-RU" smtClean="0"/>
-              <a:t>29.05.2026</a:t>
+              <a:t>02.06.2026</a:t>
             </a:fld>
             <a:endParaRPr lang="ru-RU"/>
           </a:p>
@@ -4442,7 +4442,7 @@
           <a:p>
             <a:fld id="{BC746F3E-D9D4-428F-AE2E-829871699F6C}" type="datetimeFigureOut">
               <a:rPr lang="ru-RU" smtClean="0"/>
-              <a:t>29.05.2026</a:t>
+              <a:t>02.06.2026</a:t>
             </a:fld>
             <a:endParaRPr lang="ru-RU"/>
           </a:p>
@@ -4730,7 +4730,7 @@
           <a:p>
             <a:fld id="{BC746F3E-D9D4-428F-AE2E-829871699F6C}" type="datetimeFigureOut">
               <a:rPr lang="ru-RU" smtClean="0"/>
-              <a:t>29.05.2026</a:t>
+              <a:t>02.06.2026</a:t>
             </a:fld>
             <a:endParaRPr lang="ru-RU"/>
           </a:p>
@@ -4971,7 +4971,7 @@
           <a:p>
             <a:fld id="{BC746F3E-D9D4-428F-AE2E-829871699F6C}" type="datetimeFigureOut">
               <a:rPr lang="ru-RU" smtClean="0"/>
-              <a:t>29.05.2026</a:t>
+              <a:t>02.06.2026</a:t>
             </a:fld>
             <a:endParaRPr lang="ru-RU"/>
           </a:p>
@@ -5513,7 +5513,7 @@
                 <a:latin typeface="Times New Roman" panose="02020603050405020304" pitchFamily="18" charset="0"/>
                 <a:cs typeface="Times New Roman" panose="02020603050405020304" pitchFamily="18" charset="0"/>
               </a:rPr>
-              <a:t>Министерства науки и высшего образования Российской Федерации</a:t>
+              <a:t>Министерство науки и высшего образования Российской Федерации</a:t>
             </a:r>
             <a:br>
               <a:rPr lang="ru-RU" dirty="0">
@@ -5536,7 +5536,7 @@
                 <a:latin typeface="Times New Roman" panose="02020603050405020304" pitchFamily="18" charset="0"/>
                 <a:cs typeface="Times New Roman" panose="02020603050405020304" pitchFamily="18" charset="0"/>
               </a:rPr>
-              <a:t>«Заполярный государственный университет им </a:t>
+              <a:t>«Заполярный государственный университет им. </a:t>
             </a:r>
             <a:r>
               <a:rPr lang="ru-RU" dirty="0" err="1">
@@ -5617,8 +5617,8 @@
         </p:nvSpPr>
         <p:spPr>
           <a:xfrm>
-            <a:off x="8994709" y="5315536"/>
-            <a:ext cx="2917371" cy="646331"/>
+            <a:off x="8621486" y="5217496"/>
+            <a:ext cx="3303035" cy="923330"/>
           </a:xfrm>
           <a:prstGeom prst="rect">
             <a:avLst/>
@@ -5636,7 +5636,7 @@
                 <a:latin typeface="Times New Roman" panose="02020603050405020304" pitchFamily="18" charset="0"/>
                 <a:cs typeface="Times New Roman" panose="02020603050405020304" pitchFamily="18" charset="0"/>
               </a:rPr>
-              <a:t>Руководитель работы:</a:t>
+              <a:t>Руководитель работы: кандидат экономических наук, доцент</a:t>
             </a:r>
           </a:p>
           <a:p>
@@ -5738,12 +5738,12 @@
         </p:spPr>
         <p:txBody>
           <a:bodyPr wrap="square" lIns="0" tIns="0" rIns="0" bIns="0" rtlCol="0" anchor="ctr">
-            <a:normAutofit/>
+            <a:noAutofit/>
           </a:bodyPr>
           <a:lstStyle/>
           <a:p>
             <a:r>
-              <a:rPr lang="ru-RU" sz="1850" b="1" dirty="0">
+              <a:rPr lang="ru-RU" sz="3200" b="1" dirty="0">
                 <a:solidFill>
                   <a:srgbClr val="202A36"/>
                 </a:solidFill>
@@ -5754,235 +5754,7 @@
               <a:t>Системный анализ </a:t>
             </a:r>
             <a:r>
-              <a:rPr lang="en-US" sz="1850" b="1" dirty="0">
-                <a:solidFill>
-                  <a:srgbClr val="202A36"/>
-                </a:solidFill>
-                <a:latin typeface="Times New Roman" panose="02020603050405020304" pitchFamily="18" charset="0"/>
-                <a:ea typeface="Arial" pitchFamily="34" charset="-122"/>
-                <a:cs typeface="Times New Roman" panose="02020603050405020304" pitchFamily="18" charset="0"/>
-              </a:rPr>
-              <a:t>DFD TO-BE</a:t>
-            </a:r>
-            <a:endParaRPr lang="en-US" sz="1850" dirty="0">
-              <a:latin typeface="Times New Roman" panose="02020603050405020304" pitchFamily="18" charset="0"/>
-              <a:cs typeface="Times New Roman" panose="02020603050405020304" pitchFamily="18" charset="0"/>
-            </a:endParaRPr>
-          </a:p>
-        </p:txBody>
-      </p:sp>
-      <p:pic>
-        <p:nvPicPr>
-          <p:cNvPr id="6" name="Рисунок 5">
-            <a:extLst>
-              <a:ext uri="{FF2B5EF4-FFF2-40B4-BE49-F238E27FC236}">
-                <a16:creationId xmlns:a16="http://schemas.microsoft.com/office/drawing/2014/main" id="{20B49E90-BB99-485F-8173-1A9581253DC1}"/>
-              </a:ext>
-            </a:extLst>
-          </p:cNvPr>
-          <p:cNvPicPr/>
-          <p:nvPr/>
-        </p:nvPicPr>
-        <p:blipFill>
-          <a:blip r:embed="rId3">
-            <a:extLst>
-              <a:ext uri="{28A0092B-C50C-407E-A947-70E740481C1C}">
-                <a14:useLocalDpi xmlns:a14="http://schemas.microsoft.com/office/drawing/2010/main" val="0"/>
-              </a:ext>
-            </a:extLst>
-          </a:blip>
-          <a:srcRect/>
-          <a:stretch>
-            <a:fillRect/>
-          </a:stretch>
-        </p:blipFill>
-        <p:spPr bwMode="auto">
-          <a:xfrm>
-            <a:off x="-1" y="676657"/>
-            <a:ext cx="11719249" cy="6227996"/>
-          </a:xfrm>
-          <a:prstGeom prst="rect">
-            <a:avLst/>
-          </a:prstGeom>
-          <a:noFill/>
-          <a:ln>
-            <a:noFill/>
-          </a:ln>
-        </p:spPr>
-      </p:pic>
-    </p:spTree>
-  </p:cSld>
-  <p:clrMapOvr>
-    <a:masterClrMapping/>
-  </p:clrMapOvr>
-</p:sld>
-</file>
-
-<file path=ppt/slides/slide11.xml><?xml version="1.0" encoding="utf-8"?>
-<p:sld xmlns:a="http://schemas.openxmlformats.org/drawingml/2006/main" xmlns:r="http://schemas.openxmlformats.org/officeDocument/2006/relationships" xmlns:p="http://schemas.openxmlformats.org/presentationml/2006/main">
-  <p:cSld>
-    <p:spTree>
-      <p:nvGrpSpPr>
-        <p:cNvPr id="1" name=""/>
-        <p:cNvGrpSpPr/>
-        <p:nvPr/>
-      </p:nvGrpSpPr>
-      <p:grpSpPr>
-        <a:xfrm>
-          <a:off x="0" y="0"/>
-          <a:ext cx="0" cy="0"/>
-          <a:chOff x="0" y="0"/>
-          <a:chExt cx="0" cy="0"/>
-        </a:xfrm>
-      </p:grpSpPr>
-      <p:sp>
-        <p:nvSpPr>
-          <p:cNvPr id="2" name="Text 0"/>
-          <p:cNvSpPr/>
-          <p:nvPr/>
-        </p:nvSpPr>
-        <p:spPr>
-          <a:xfrm>
-            <a:off x="502920" y="292608"/>
-            <a:ext cx="8595360" cy="384048"/>
-          </a:xfrm>
-          <a:prstGeom prst="rect">
-            <a:avLst/>
-          </a:prstGeom>
-          <a:noFill/>
-          <a:ln/>
-        </p:spPr>
-        <p:txBody>
-          <a:bodyPr wrap="square" lIns="0" tIns="0" rIns="0" bIns="0" rtlCol="0" anchor="ctr">
-            <a:normAutofit/>
-          </a:bodyPr>
-          <a:lstStyle/>
-          <a:p>
-            <a:r>
-              <a:rPr lang="ru-RU" sz="1900" b="1" dirty="0">
-                <a:solidFill>
-                  <a:srgbClr val="202A36"/>
-                </a:solidFill>
-                <a:latin typeface="Times New Roman" panose="02020603050405020304" pitchFamily="18" charset="0"/>
-                <a:ea typeface="Arial" pitchFamily="34" charset="-122"/>
-                <a:cs typeface="Times New Roman" panose="02020603050405020304" pitchFamily="18" charset="0"/>
-              </a:rPr>
-              <a:t>Системный анализ </a:t>
-            </a:r>
-            <a:r>
-              <a:rPr lang="en-US" sz="1900" b="1" dirty="0">
-                <a:solidFill>
-                  <a:srgbClr val="202A36"/>
-                </a:solidFill>
-                <a:latin typeface="Times New Roman" panose="02020603050405020304" pitchFamily="18" charset="0"/>
-                <a:ea typeface="Arial" pitchFamily="34" charset="-122"/>
-                <a:cs typeface="Times New Roman" panose="02020603050405020304" pitchFamily="18" charset="0"/>
-              </a:rPr>
-              <a:t>DFD TO-BE</a:t>
-            </a:r>
-            <a:endParaRPr lang="en-US" sz="1900" dirty="0">
-              <a:latin typeface="Times New Roman" panose="02020603050405020304" pitchFamily="18" charset="0"/>
-              <a:cs typeface="Times New Roman" panose="02020603050405020304" pitchFamily="18" charset="0"/>
-            </a:endParaRPr>
-          </a:p>
-        </p:txBody>
-      </p:sp>
-      <p:pic>
-        <p:nvPicPr>
-          <p:cNvPr id="3" name="Рисунок 2">
-            <a:extLst>
-              <a:ext uri="{FF2B5EF4-FFF2-40B4-BE49-F238E27FC236}">
-                <a16:creationId xmlns:a16="http://schemas.microsoft.com/office/drawing/2014/main" id="{4C9E0F2D-D9A8-4ABB-A124-4005553CD37D}"/>
-              </a:ext>
-            </a:extLst>
-          </p:cNvPr>
-          <p:cNvPicPr>
-            <a:picLocks noChangeAspect="1"/>
-          </p:cNvPicPr>
-          <p:nvPr/>
-        </p:nvPicPr>
-        <p:blipFill>
-          <a:blip r:embed="rId3"/>
-          <a:stretch>
-            <a:fillRect/>
-          </a:stretch>
-        </p:blipFill>
-        <p:spPr>
-          <a:xfrm>
-            <a:off x="-1" y="676655"/>
-            <a:ext cx="11737911" cy="6227997"/>
-          </a:xfrm>
-          <a:prstGeom prst="rect">
-            <a:avLst/>
-          </a:prstGeom>
-        </p:spPr>
-      </p:pic>
-    </p:spTree>
-    <p:extLst>
-      <p:ext uri="{BB962C8B-B14F-4D97-AF65-F5344CB8AC3E}">
-        <p14:creationId xmlns:p14="http://schemas.microsoft.com/office/powerpoint/2010/main" val="4133283594"/>
-      </p:ext>
-    </p:extLst>
-  </p:cSld>
-  <p:clrMapOvr>
-    <a:masterClrMapping/>
-  </p:clrMapOvr>
-</p:sld>
-</file>
-
-<file path=ppt/slides/slide12.xml><?xml version="1.0" encoding="utf-8"?>
-<p:sld xmlns:a="http://schemas.openxmlformats.org/drawingml/2006/main" xmlns:r="http://schemas.openxmlformats.org/officeDocument/2006/relationships" xmlns:p="http://schemas.openxmlformats.org/presentationml/2006/main">
-  <p:cSld>
-    <p:spTree>
-      <p:nvGrpSpPr>
-        <p:cNvPr id="1" name=""/>
-        <p:cNvGrpSpPr/>
-        <p:nvPr/>
-      </p:nvGrpSpPr>
-      <p:grpSpPr>
-        <a:xfrm>
-          <a:off x="0" y="0"/>
-          <a:ext cx="0" cy="0"/>
-          <a:chOff x="0" y="0"/>
-          <a:chExt cx="0" cy="0"/>
-        </a:xfrm>
-      </p:grpSpPr>
-      <p:sp>
-        <p:nvSpPr>
-          <p:cNvPr id="2" name="Text 0"/>
-          <p:cNvSpPr/>
-          <p:nvPr/>
-        </p:nvSpPr>
-        <p:spPr>
-          <a:xfrm>
-            <a:off x="502920" y="292608"/>
-            <a:ext cx="8595360" cy="384048"/>
-          </a:xfrm>
-          <a:prstGeom prst="rect">
-            <a:avLst/>
-          </a:prstGeom>
-          <a:noFill/>
-          <a:ln/>
-        </p:spPr>
-        <p:txBody>
-          <a:bodyPr wrap="square" lIns="0" tIns="0" rIns="0" bIns="0" rtlCol="0" anchor="ctr">
-            <a:normAutofit/>
-          </a:bodyPr>
-          <a:lstStyle/>
-          <a:p>
-            <a:r>
-              <a:rPr lang="ru-RU" sz="1900" b="1" dirty="0">
-                <a:solidFill>
-                  <a:srgbClr val="202A36"/>
-                </a:solidFill>
-                <a:latin typeface="Times New Roman" panose="02020603050405020304" pitchFamily="18" charset="0"/>
-                <a:ea typeface="Arial" pitchFamily="34" charset="-122"/>
-                <a:cs typeface="Times New Roman" panose="02020603050405020304" pitchFamily="18" charset="0"/>
-              </a:rPr>
-              <a:t>Системный анализ </a:t>
-            </a:r>
-            <a:r>
-              <a:rPr lang="en-US" sz="1900" b="1" dirty="0">
+              <a:rPr lang="en-US" sz="3200" b="1" dirty="0">
                 <a:solidFill>
                   <a:srgbClr val="202A36"/>
                 </a:solidFill>
@@ -5992,128 +5764,7 @@
               </a:rPr>
               <a:t>IDEF0 TO-BE</a:t>
             </a:r>
-            <a:endParaRPr lang="en-US" sz="1900" dirty="0">
-              <a:latin typeface="Times New Roman" panose="02020603050405020304" pitchFamily="18" charset="0"/>
-              <a:cs typeface="Times New Roman" panose="02020603050405020304" pitchFamily="18" charset="0"/>
-            </a:endParaRPr>
-          </a:p>
-        </p:txBody>
-      </p:sp>
-      <p:pic>
-        <p:nvPicPr>
-          <p:cNvPr id="5" name="Рисунок 4">
-            <a:extLst>
-              <a:ext uri="{FF2B5EF4-FFF2-40B4-BE49-F238E27FC236}">
-                <a16:creationId xmlns:a16="http://schemas.microsoft.com/office/drawing/2014/main" id="{B18B80AB-26CD-4ADE-8B16-2E242D02126F}"/>
-              </a:ext>
-            </a:extLst>
-          </p:cNvPr>
-          <p:cNvPicPr/>
-          <p:nvPr/>
-        </p:nvPicPr>
-        <p:blipFill>
-          <a:blip r:embed="rId3" cstate="print">
-            <a:extLst>
-              <a:ext uri="{28A0092B-C50C-407E-A947-70E740481C1C}">
-                <a14:useLocalDpi xmlns:a14="http://schemas.microsoft.com/office/drawing/2010/main" val="0"/>
-              </a:ext>
-            </a:extLst>
-          </a:blip>
-          <a:srcRect/>
-          <a:stretch>
-            <a:fillRect/>
-          </a:stretch>
-        </p:blipFill>
-        <p:spPr bwMode="auto">
-          <a:xfrm>
-            <a:off x="0" y="676657"/>
-            <a:ext cx="11700588" cy="6227996"/>
-          </a:xfrm>
-          <a:prstGeom prst="rect">
-            <a:avLst/>
-          </a:prstGeom>
-          <a:noFill/>
-          <a:ln>
-            <a:noFill/>
-          </a:ln>
-        </p:spPr>
-      </p:pic>
-    </p:spTree>
-    <p:extLst>
-      <p:ext uri="{BB962C8B-B14F-4D97-AF65-F5344CB8AC3E}">
-        <p14:creationId xmlns:p14="http://schemas.microsoft.com/office/powerpoint/2010/main" val="427580508"/>
-      </p:ext>
-    </p:extLst>
-  </p:cSld>
-  <p:clrMapOvr>
-    <a:masterClrMapping/>
-  </p:clrMapOvr>
-</p:sld>
-</file>
-
-<file path=ppt/slides/slide13.xml><?xml version="1.0" encoding="utf-8"?>
-<p:sld xmlns:a="http://schemas.openxmlformats.org/drawingml/2006/main" xmlns:r="http://schemas.openxmlformats.org/officeDocument/2006/relationships" xmlns:p="http://schemas.openxmlformats.org/presentationml/2006/main">
-  <p:cSld>
-    <p:spTree>
-      <p:nvGrpSpPr>
-        <p:cNvPr id="1" name=""/>
-        <p:cNvGrpSpPr/>
-        <p:nvPr/>
-      </p:nvGrpSpPr>
-      <p:grpSpPr>
-        <a:xfrm>
-          <a:off x="0" y="0"/>
-          <a:ext cx="0" cy="0"/>
-          <a:chOff x="0" y="0"/>
-          <a:chExt cx="0" cy="0"/>
-        </a:xfrm>
-      </p:grpSpPr>
-      <p:sp>
-        <p:nvSpPr>
-          <p:cNvPr id="2" name="Text 0"/>
-          <p:cNvSpPr/>
-          <p:nvPr/>
-        </p:nvSpPr>
-        <p:spPr>
-          <a:xfrm>
-            <a:off x="502920" y="292608"/>
-            <a:ext cx="8595360" cy="384048"/>
-          </a:xfrm>
-          <a:prstGeom prst="rect">
-            <a:avLst/>
-          </a:prstGeom>
-          <a:noFill/>
-          <a:ln/>
-        </p:spPr>
-        <p:txBody>
-          <a:bodyPr wrap="square" lIns="0" tIns="0" rIns="0" bIns="0" rtlCol="0" anchor="ctr">
-            <a:normAutofit/>
-          </a:bodyPr>
-          <a:lstStyle/>
-          <a:p>
-            <a:r>
-              <a:rPr lang="ru-RU" sz="1850" b="1" dirty="0">
-                <a:solidFill>
-                  <a:srgbClr val="202A36"/>
-                </a:solidFill>
-                <a:latin typeface="Times New Roman" panose="02020603050405020304" pitchFamily="18" charset="0"/>
-                <a:ea typeface="Arial" pitchFamily="34" charset="-122"/>
-                <a:cs typeface="Times New Roman" panose="02020603050405020304" pitchFamily="18" charset="0"/>
-              </a:rPr>
-              <a:t>Системный анализ </a:t>
-            </a:r>
-            <a:r>
-              <a:rPr lang="en-US" sz="1850" b="1" dirty="0">
-                <a:solidFill>
-                  <a:srgbClr val="202A36"/>
-                </a:solidFill>
-                <a:latin typeface="Times New Roman" panose="02020603050405020304" pitchFamily="18" charset="0"/>
-                <a:ea typeface="Arial" pitchFamily="34" charset="-122"/>
-                <a:cs typeface="Times New Roman" panose="02020603050405020304" pitchFamily="18" charset="0"/>
-              </a:rPr>
-              <a:t>IDEF0 TO-BE</a:t>
-            </a:r>
-            <a:endParaRPr lang="en-US" sz="1850" dirty="0">
+            <a:endParaRPr lang="en-US" sz="3200" dirty="0">
               <a:latin typeface="Times New Roman" panose="02020603050405020304" pitchFamily="18" charset="0"/>
               <a:cs typeface="Times New Roman" panose="02020603050405020304" pitchFamily="18" charset="0"/>
             </a:endParaRPr>
@@ -6172,7 +5823,7 @@
 </p:sld>
 </file>
 
-<file path=ppt/slides/slide14.xml><?xml version="1.0" encoding="utf-8"?>
+<file path=ppt/slides/slide11.xml><?xml version="1.0" encoding="utf-8"?>
 <p:sld xmlns:a="http://schemas.openxmlformats.org/drawingml/2006/main" xmlns:r="http://schemas.openxmlformats.org/officeDocument/2006/relationships" xmlns:p="http://schemas.openxmlformats.org/presentationml/2006/main">
   <p:cSld>
     <p:spTree>
@@ -6208,7 +5859,239 @@
         </p:spPr>
         <p:txBody>
           <a:bodyPr wrap="square" lIns="0" tIns="0" rIns="0" bIns="0" rtlCol="0" anchor="ctr">
-            <a:normAutofit/>
+            <a:noAutofit/>
+          </a:bodyPr>
+          <a:lstStyle/>
+          <a:p>
+            <a:r>
+              <a:rPr lang="ru-RU" sz="3200" b="1" dirty="0">
+                <a:solidFill>
+                  <a:srgbClr val="202A36"/>
+                </a:solidFill>
+                <a:latin typeface="Times New Roman" panose="02020603050405020304" pitchFamily="18" charset="0"/>
+                <a:ea typeface="Arial" pitchFamily="34" charset="-122"/>
+                <a:cs typeface="Times New Roman" panose="02020603050405020304" pitchFamily="18" charset="0"/>
+              </a:rPr>
+              <a:t>Системный анализ </a:t>
+            </a:r>
+            <a:r>
+              <a:rPr lang="en-US" sz="3200" b="1" dirty="0">
+                <a:solidFill>
+                  <a:srgbClr val="202A36"/>
+                </a:solidFill>
+                <a:latin typeface="Times New Roman" panose="02020603050405020304" pitchFamily="18" charset="0"/>
+                <a:ea typeface="Arial" pitchFamily="34" charset="-122"/>
+                <a:cs typeface="Times New Roman" panose="02020603050405020304" pitchFamily="18" charset="0"/>
+              </a:rPr>
+              <a:t>DFD TO-BE</a:t>
+            </a:r>
+            <a:endParaRPr lang="en-US" sz="3200" dirty="0">
+              <a:latin typeface="Times New Roman" panose="02020603050405020304" pitchFamily="18" charset="0"/>
+              <a:cs typeface="Times New Roman" panose="02020603050405020304" pitchFamily="18" charset="0"/>
+            </a:endParaRPr>
+          </a:p>
+        </p:txBody>
+      </p:sp>
+      <p:pic>
+        <p:nvPicPr>
+          <p:cNvPr id="5" name="Рисунок 4">
+            <a:extLst>
+              <a:ext uri="{FF2B5EF4-FFF2-40B4-BE49-F238E27FC236}">
+                <a16:creationId xmlns:a16="http://schemas.microsoft.com/office/drawing/2014/main" id="{9EE8F14D-8E6E-4E86-B40A-B40CFEBD16C9}"/>
+              </a:ext>
+            </a:extLst>
+          </p:cNvPr>
+          <p:cNvPicPr/>
+          <p:nvPr/>
+        </p:nvPicPr>
+        <p:blipFill>
+          <a:blip r:embed="rId3">
+            <a:extLst>
+              <a:ext uri="{28A0092B-C50C-407E-A947-70E740481C1C}">
+                <a14:useLocalDpi xmlns:a14="http://schemas.microsoft.com/office/drawing/2010/main" val="0"/>
+              </a:ext>
+            </a:extLst>
+          </a:blip>
+          <a:srcRect/>
+          <a:stretch>
+            <a:fillRect/>
+          </a:stretch>
+        </p:blipFill>
+        <p:spPr bwMode="auto">
+          <a:xfrm>
+            <a:off x="0" y="676657"/>
+            <a:ext cx="11675706" cy="6227996"/>
+          </a:xfrm>
+          <a:prstGeom prst="rect">
+            <a:avLst/>
+          </a:prstGeom>
+          <a:noFill/>
+          <a:ln>
+            <a:noFill/>
+          </a:ln>
+        </p:spPr>
+      </p:pic>
+    </p:spTree>
+  </p:cSld>
+  <p:clrMapOvr>
+    <a:masterClrMapping/>
+  </p:clrMapOvr>
+</p:sld>
+</file>
+
+<file path=ppt/slides/slide12.xml><?xml version="1.0" encoding="utf-8"?>
+<p:sld xmlns:a="http://schemas.openxmlformats.org/drawingml/2006/main" xmlns:r="http://schemas.openxmlformats.org/officeDocument/2006/relationships" xmlns:p="http://schemas.openxmlformats.org/presentationml/2006/main">
+  <p:cSld>
+    <p:spTree>
+      <p:nvGrpSpPr>
+        <p:cNvPr id="1" name=""/>
+        <p:cNvGrpSpPr/>
+        <p:nvPr/>
+      </p:nvGrpSpPr>
+      <p:grpSpPr>
+        <a:xfrm>
+          <a:off x="0" y="0"/>
+          <a:ext cx="0" cy="0"/>
+          <a:chOff x="0" y="0"/>
+          <a:chExt cx="0" cy="0"/>
+        </a:xfrm>
+      </p:grpSpPr>
+      <p:sp>
+        <p:nvSpPr>
+          <p:cNvPr id="2" name="Text 0"/>
+          <p:cNvSpPr/>
+          <p:nvPr/>
+        </p:nvSpPr>
+        <p:spPr>
+          <a:xfrm>
+            <a:off x="502920" y="292608"/>
+            <a:ext cx="8595360" cy="384048"/>
+          </a:xfrm>
+          <a:prstGeom prst="rect">
+            <a:avLst/>
+          </a:prstGeom>
+          <a:noFill/>
+          <a:ln/>
+        </p:spPr>
+        <p:txBody>
+          <a:bodyPr wrap="square" lIns="0" tIns="0" rIns="0" bIns="0" rtlCol="0" anchor="ctr">
+            <a:noAutofit/>
+          </a:bodyPr>
+          <a:lstStyle/>
+          <a:p>
+            <a:r>
+              <a:rPr lang="ru-RU" sz="3200" b="1" dirty="0">
+                <a:solidFill>
+                  <a:srgbClr val="202A36"/>
+                </a:solidFill>
+                <a:latin typeface="Times New Roman" panose="02020603050405020304" pitchFamily="18" charset="0"/>
+                <a:ea typeface="Arial" pitchFamily="34" charset="-122"/>
+                <a:cs typeface="Times New Roman" panose="02020603050405020304" pitchFamily="18" charset="0"/>
+              </a:rPr>
+              <a:t>Системный анализ </a:t>
+            </a:r>
+            <a:r>
+              <a:rPr lang="en-US" sz="3200" b="1" dirty="0">
+                <a:solidFill>
+                  <a:srgbClr val="202A36"/>
+                </a:solidFill>
+                <a:latin typeface="Times New Roman" panose="02020603050405020304" pitchFamily="18" charset="0"/>
+                <a:ea typeface="Arial" pitchFamily="34" charset="-122"/>
+                <a:cs typeface="Times New Roman" panose="02020603050405020304" pitchFamily="18" charset="0"/>
+              </a:rPr>
+              <a:t>DFD TO-BE</a:t>
+            </a:r>
+            <a:endParaRPr lang="en-US" sz="3200" dirty="0">
+              <a:latin typeface="Times New Roman" panose="02020603050405020304" pitchFamily="18" charset="0"/>
+              <a:cs typeface="Times New Roman" panose="02020603050405020304" pitchFamily="18" charset="0"/>
+            </a:endParaRPr>
+          </a:p>
+        </p:txBody>
+      </p:sp>
+      <p:pic>
+        <p:nvPicPr>
+          <p:cNvPr id="6" name="Рисунок 5">
+            <a:extLst>
+              <a:ext uri="{FF2B5EF4-FFF2-40B4-BE49-F238E27FC236}">
+                <a16:creationId xmlns:a16="http://schemas.microsoft.com/office/drawing/2014/main" id="{20B49E90-BB99-485F-8173-1A9581253DC1}"/>
+              </a:ext>
+            </a:extLst>
+          </p:cNvPr>
+          <p:cNvPicPr/>
+          <p:nvPr/>
+        </p:nvPicPr>
+        <p:blipFill>
+          <a:blip r:embed="rId3">
+            <a:extLst>
+              <a:ext uri="{28A0092B-C50C-407E-A947-70E740481C1C}">
+                <a14:useLocalDpi xmlns:a14="http://schemas.microsoft.com/office/drawing/2010/main" val="0"/>
+              </a:ext>
+            </a:extLst>
+          </a:blip>
+          <a:srcRect/>
+          <a:stretch>
+            <a:fillRect/>
+          </a:stretch>
+        </p:blipFill>
+        <p:spPr bwMode="auto">
+          <a:xfrm>
+            <a:off x="-1" y="676657"/>
+            <a:ext cx="11719249" cy="6227996"/>
+          </a:xfrm>
+          <a:prstGeom prst="rect">
+            <a:avLst/>
+          </a:prstGeom>
+          <a:noFill/>
+          <a:ln>
+            <a:noFill/>
+          </a:ln>
+        </p:spPr>
+      </p:pic>
+    </p:spTree>
+  </p:cSld>
+  <p:clrMapOvr>
+    <a:masterClrMapping/>
+  </p:clrMapOvr>
+</p:sld>
+</file>
+
+<file path=ppt/slides/slide13.xml><?xml version="1.0" encoding="utf-8"?>
+<p:sld xmlns:a="http://schemas.openxmlformats.org/drawingml/2006/main" xmlns:r="http://schemas.openxmlformats.org/officeDocument/2006/relationships" xmlns:p="http://schemas.openxmlformats.org/presentationml/2006/main">
+  <p:cSld>
+    <p:spTree>
+      <p:nvGrpSpPr>
+        <p:cNvPr id="1" name=""/>
+        <p:cNvGrpSpPr/>
+        <p:nvPr/>
+      </p:nvGrpSpPr>
+      <p:grpSpPr>
+        <a:xfrm>
+          <a:off x="0" y="0"/>
+          <a:ext cx="0" cy="0"/>
+          <a:chOff x="0" y="0"/>
+          <a:chExt cx="0" cy="0"/>
+        </a:xfrm>
+      </p:grpSpPr>
+      <p:sp>
+        <p:nvSpPr>
+          <p:cNvPr id="2" name="Text 0"/>
+          <p:cNvSpPr/>
+          <p:nvPr/>
+        </p:nvSpPr>
+        <p:spPr>
+          <a:xfrm>
+            <a:off x="502920" y="292608"/>
+            <a:ext cx="8595360" cy="384048"/>
+          </a:xfrm>
+          <a:prstGeom prst="rect">
+            <a:avLst/>
+          </a:prstGeom>
+          <a:noFill/>
+          <a:ln/>
+        </p:spPr>
+        <p:txBody>
+          <a:bodyPr wrap="square" lIns="0" tIns="0" rIns="0" bIns="0" rtlCol="0" anchor="ctr">
+            <a:noAutofit/>
           </a:bodyPr>
           <a:lstStyle/>
           <a:p>
@@ -6216,7 +6099,7 @@
               <a:buNone/>
             </a:pPr>
             <a:r>
-              <a:rPr lang="en-US" sz="1900" b="1" dirty="0">
+              <a:rPr lang="en-US" sz="3200" b="1" dirty="0">
                 <a:solidFill>
                   <a:srgbClr val="202A36"/>
                 </a:solidFill>
@@ -6226,7 +6109,7 @@
               </a:rPr>
               <a:t>Логическая модель базы данных</a:t>
             </a:r>
-            <a:endParaRPr lang="en-US" sz="1900" dirty="0">
+            <a:endParaRPr lang="en-US" sz="3200" dirty="0">
               <a:latin typeface="Times New Roman" panose="02020603050405020304" pitchFamily="18" charset="0"/>
               <a:cs typeface="Times New Roman" panose="02020603050405020304" pitchFamily="18" charset="0"/>
             </a:endParaRPr>
@@ -6271,7 +6154,7 @@
 </p:sld>
 </file>
 
-<file path=ppt/slides/slide15.xml><?xml version="1.0" encoding="utf-8"?>
+<file path=ppt/slides/slide14.xml><?xml version="1.0" encoding="utf-8"?>
 <p:sld xmlns:a="http://schemas.openxmlformats.org/drawingml/2006/main" xmlns:r="http://schemas.openxmlformats.org/officeDocument/2006/relationships" xmlns:p="http://schemas.openxmlformats.org/presentationml/2006/main">
   <p:cSld>
     <p:spTree>
@@ -6307,7 +6190,7 @@
         </p:spPr>
         <p:txBody>
           <a:bodyPr wrap="square" lIns="0" tIns="0" rIns="0" bIns="0" rtlCol="0" anchor="ctr">
-            <a:normAutofit/>
+            <a:noAutofit/>
           </a:bodyPr>
           <a:lstStyle/>
           <a:p>
@@ -6315,7 +6198,7 @@
               <a:buNone/>
             </a:pPr>
             <a:r>
-              <a:rPr lang="en-US" sz="1900" b="1" dirty="0">
+              <a:rPr lang="en-US" sz="3200" b="1" dirty="0">
                 <a:solidFill>
                   <a:srgbClr val="202A36"/>
                 </a:solidFill>
@@ -6325,7 +6208,7 @@
               </a:rPr>
               <a:t>Физическая модель базы данных</a:t>
             </a:r>
-            <a:endParaRPr lang="en-US" sz="1900" dirty="0">
+            <a:endParaRPr lang="en-US" sz="3200" dirty="0">
               <a:latin typeface="Times New Roman" panose="02020603050405020304" pitchFamily="18" charset="0"/>
               <a:cs typeface="Times New Roman" panose="02020603050405020304" pitchFamily="18" charset="0"/>
             </a:endParaRPr>
@@ -6364,7 +6247,7 @@
 </p:sld>
 </file>
 
-<file path=ppt/slides/slide16.xml><?xml version="1.0" encoding="utf-8"?>
+<file path=ppt/slides/slide15.xml><?xml version="1.0" encoding="utf-8"?>
 <p:sld xmlns:a="http://schemas.openxmlformats.org/drawingml/2006/main" xmlns:r="http://schemas.openxmlformats.org/officeDocument/2006/relationships" xmlns:p="http://schemas.openxmlformats.org/presentationml/2006/main">
   <p:cSld>
     <p:spTree>
@@ -6400,7 +6283,7 @@
         </p:spPr>
         <p:txBody>
           <a:bodyPr wrap="square" lIns="0" tIns="0" rIns="0" bIns="0" rtlCol="0" anchor="ctr">
-            <a:normAutofit/>
+            <a:noAutofit/>
           </a:bodyPr>
           <a:lstStyle/>
           <a:p>
@@ -6408,7 +6291,7 @@
               <a:buNone/>
             </a:pPr>
             <a:r>
-              <a:rPr lang="en-US" sz="1850" b="1" dirty="0">
+              <a:rPr lang="en-US" sz="3200" b="1" dirty="0">
                 <a:solidFill>
                   <a:srgbClr val="202A36"/>
                 </a:solidFill>
@@ -6418,7 +6301,7 @@
               </a:rPr>
               <a:t>Стек технологий</a:t>
             </a:r>
-            <a:endParaRPr lang="en-US" sz="1850" dirty="0">
+            <a:endParaRPr lang="en-US" sz="3200" dirty="0">
               <a:latin typeface="Times New Roman" panose="02020603050405020304" pitchFamily="18" charset="0"/>
               <a:cs typeface="Times New Roman" panose="02020603050405020304" pitchFamily="18" charset="0"/>
             </a:endParaRPr>
@@ -6463,6 +6346,99 @@
 </p:sld>
 </file>
 
+<file path=ppt/slides/slide16.xml><?xml version="1.0" encoding="utf-8"?>
+<p:sld xmlns:a="http://schemas.openxmlformats.org/drawingml/2006/main" xmlns:r="http://schemas.openxmlformats.org/officeDocument/2006/relationships" xmlns:p="http://schemas.openxmlformats.org/presentationml/2006/main">
+  <p:cSld>
+    <p:spTree>
+      <p:nvGrpSpPr>
+        <p:cNvPr id="1" name=""/>
+        <p:cNvGrpSpPr/>
+        <p:nvPr/>
+      </p:nvGrpSpPr>
+      <p:grpSpPr>
+        <a:xfrm>
+          <a:off x="0" y="0"/>
+          <a:ext cx="0" cy="0"/>
+          <a:chOff x="0" y="0"/>
+          <a:chExt cx="0" cy="0"/>
+        </a:xfrm>
+      </p:grpSpPr>
+      <p:sp>
+        <p:nvSpPr>
+          <p:cNvPr id="2" name="Text 0"/>
+          <p:cNvSpPr/>
+          <p:nvPr/>
+        </p:nvSpPr>
+        <p:spPr>
+          <a:xfrm>
+            <a:off x="502920" y="292608"/>
+            <a:ext cx="8595360" cy="384048"/>
+          </a:xfrm>
+          <a:prstGeom prst="rect">
+            <a:avLst/>
+          </a:prstGeom>
+          <a:noFill/>
+          <a:ln/>
+        </p:spPr>
+        <p:txBody>
+          <a:bodyPr wrap="square" lIns="0" tIns="0" rIns="0" bIns="0" rtlCol="0" anchor="ctr">
+            <a:noAutofit/>
+          </a:bodyPr>
+          <a:lstStyle/>
+          <a:p>
+            <a:pPr marL="0" indent="0">
+              <a:buNone/>
+            </a:pPr>
+            <a:r>
+              <a:rPr lang="en-US" sz="3200" b="1" dirty="0">
+                <a:solidFill>
+                  <a:srgbClr val="202A36"/>
+                </a:solidFill>
+                <a:latin typeface="Times New Roman" panose="02020603050405020304" pitchFamily="18" charset="0"/>
+                <a:ea typeface="Arial" pitchFamily="34" charset="-122"/>
+                <a:cs typeface="Times New Roman" panose="02020603050405020304" pitchFamily="18" charset="0"/>
+              </a:rPr>
+              <a:t>Архитектура и развёртывание</a:t>
+            </a:r>
+            <a:endParaRPr lang="en-US" sz="3200" dirty="0">
+              <a:latin typeface="Times New Roman" panose="02020603050405020304" pitchFamily="18" charset="0"/>
+              <a:cs typeface="Times New Roman" panose="02020603050405020304" pitchFamily="18" charset="0"/>
+            </a:endParaRPr>
+          </a:p>
+        </p:txBody>
+      </p:sp>
+      <p:pic>
+        <p:nvPicPr>
+          <p:cNvPr id="5" name="Image 0" descr="/mnt/data/cropped_media/image54.png"/>
+          <p:cNvPicPr>
+            <a:picLocks noChangeAspect="1"/>
+          </p:cNvPicPr>
+          <p:nvPr/>
+        </p:nvPicPr>
+        <p:blipFill>
+          <a:blip r:embed="rId3"/>
+          <a:stretch>
+            <a:fillRect/>
+          </a:stretch>
+        </p:blipFill>
+        <p:spPr>
+          <a:xfrm>
+            <a:off x="1" y="727788"/>
+            <a:ext cx="11824996" cy="6130211"/>
+          </a:xfrm>
+          <a:prstGeom prst="rect">
+            <a:avLst/>
+          </a:prstGeom>
+        </p:spPr>
+      </p:pic>
+    </p:spTree>
+  </p:cSld>
+  <p:clrMapOvr>
+    <a:masterClrMapping/>
+  </p:clrMapOvr>
+</p:sld>
+</file>
+
 <file path=ppt/slides/slide17.xml><?xml version="1.0" encoding="utf-8"?>
 <p:sld xmlns:a="http://schemas.openxmlformats.org/drawingml/2006/main" xmlns:r="http://schemas.openxmlformats.org/officeDocument/2006/relationships" xmlns:p="http://schemas.openxmlformats.org/presentationml/2006/main">
   <p:cSld>
@@ -6499,7 +6475,7 @@
         </p:spPr>
         <p:txBody>
           <a:bodyPr wrap="square" lIns="0" tIns="0" rIns="0" bIns="0" rtlCol="0" anchor="ctr">
-            <a:normAutofit/>
+            <a:noAutofit/>
           </a:bodyPr>
           <a:lstStyle/>
           <a:p>
@@ -6507,100 +6483,7 @@
               <a:buNone/>
             </a:pPr>
             <a:r>
-              <a:rPr lang="en-US" sz="1850" b="1" dirty="0">
-                <a:solidFill>
-                  <a:srgbClr val="202A36"/>
-                </a:solidFill>
-                <a:latin typeface="Times New Roman" panose="02020603050405020304" pitchFamily="18" charset="0"/>
-                <a:ea typeface="Arial" pitchFamily="34" charset="-122"/>
-                <a:cs typeface="Times New Roman" panose="02020603050405020304" pitchFamily="18" charset="0"/>
-              </a:rPr>
-              <a:t>Архитектура и развёртывание</a:t>
-            </a:r>
-            <a:endParaRPr lang="en-US" sz="1850" dirty="0">
-              <a:latin typeface="Times New Roman" panose="02020603050405020304" pitchFamily="18" charset="0"/>
-              <a:cs typeface="Times New Roman" panose="02020603050405020304" pitchFamily="18" charset="0"/>
-            </a:endParaRPr>
-          </a:p>
-        </p:txBody>
-      </p:sp>
-      <p:pic>
-        <p:nvPicPr>
-          <p:cNvPr id="5" name="Image 0" descr="/mnt/data/cropped_media/image54.png"/>
-          <p:cNvPicPr>
-            <a:picLocks noChangeAspect="1"/>
-          </p:cNvPicPr>
-          <p:nvPr/>
-        </p:nvPicPr>
-        <p:blipFill>
-          <a:blip r:embed="rId3"/>
-          <a:stretch>
-            <a:fillRect/>
-          </a:stretch>
-        </p:blipFill>
-        <p:spPr>
-          <a:xfrm>
-            <a:off x="802988" y="739128"/>
-            <a:ext cx="10586023" cy="6118872"/>
-          </a:xfrm>
-          <a:prstGeom prst="rect">
-            <a:avLst/>
-          </a:prstGeom>
-        </p:spPr>
-      </p:pic>
-    </p:spTree>
-  </p:cSld>
-  <p:clrMapOvr>
-    <a:masterClrMapping/>
-  </p:clrMapOvr>
-</p:sld>
-</file>
-
-<file path=ppt/slides/slide18.xml><?xml version="1.0" encoding="utf-8"?>
-<p:sld xmlns:a="http://schemas.openxmlformats.org/drawingml/2006/main" xmlns:r="http://schemas.openxmlformats.org/officeDocument/2006/relationships" xmlns:p="http://schemas.openxmlformats.org/presentationml/2006/main">
-  <p:cSld>
-    <p:spTree>
-      <p:nvGrpSpPr>
-        <p:cNvPr id="1" name=""/>
-        <p:cNvGrpSpPr/>
-        <p:nvPr/>
-      </p:nvGrpSpPr>
-      <p:grpSpPr>
-        <a:xfrm>
-          <a:off x="0" y="0"/>
-          <a:ext cx="0" cy="0"/>
-          <a:chOff x="0" y="0"/>
-          <a:chExt cx="0" cy="0"/>
-        </a:xfrm>
-      </p:grpSpPr>
-      <p:sp>
-        <p:nvSpPr>
-          <p:cNvPr id="2" name="Text 0"/>
-          <p:cNvSpPr/>
-          <p:nvPr/>
-        </p:nvSpPr>
-        <p:spPr>
-          <a:xfrm>
-            <a:off x="502920" y="292608"/>
-            <a:ext cx="8595360" cy="384048"/>
-          </a:xfrm>
-          <a:prstGeom prst="rect">
-            <a:avLst/>
-          </a:prstGeom>
-          <a:noFill/>
-          <a:ln/>
-        </p:spPr>
-        <p:txBody>
-          <a:bodyPr wrap="square" lIns="0" tIns="0" rIns="0" bIns="0" rtlCol="0" anchor="ctr">
-            <a:normAutofit/>
-          </a:bodyPr>
-          <a:lstStyle/>
-          <a:p>
-            <a:pPr marL="0" indent="0">
-              <a:buNone/>
-            </a:pPr>
-            <a:r>
-              <a:rPr lang="en-US" sz="1900" b="1" dirty="0">
+              <a:rPr lang="en-US" sz="3200" b="1" dirty="0">
                 <a:solidFill>
                   <a:srgbClr val="202A36"/>
                 </a:solidFill>
@@ -6610,7 +6493,7 @@
               </a:rPr>
               <a:t>Диаграмма прецедентов</a:t>
             </a:r>
-            <a:endParaRPr lang="en-US" sz="1900" dirty="0">
+            <a:endParaRPr lang="en-US" sz="3200" dirty="0">
               <a:latin typeface="Times New Roman" panose="02020603050405020304" pitchFamily="18" charset="0"/>
               <a:cs typeface="Times New Roman" panose="02020603050405020304" pitchFamily="18" charset="0"/>
             </a:endParaRPr>
@@ -6715,6 +6598,135 @@
 </p:sld>
 </file>
 
+<file path=ppt/slides/slide18.xml><?xml version="1.0" encoding="utf-8"?>
+<p:sld xmlns:a="http://schemas.openxmlformats.org/drawingml/2006/main" xmlns:r="http://schemas.openxmlformats.org/officeDocument/2006/relationships" xmlns:p="http://schemas.openxmlformats.org/presentationml/2006/main">
+  <p:cSld>
+    <p:spTree>
+      <p:nvGrpSpPr>
+        <p:cNvPr id="1" name=""/>
+        <p:cNvGrpSpPr/>
+        <p:nvPr/>
+      </p:nvGrpSpPr>
+      <p:grpSpPr>
+        <a:xfrm>
+          <a:off x="0" y="0"/>
+          <a:ext cx="0" cy="0"/>
+          <a:chOff x="0" y="0"/>
+          <a:chExt cx="0" cy="0"/>
+        </a:xfrm>
+      </p:grpSpPr>
+      <p:sp>
+        <p:nvSpPr>
+          <p:cNvPr id="2" name="Text 0"/>
+          <p:cNvSpPr/>
+          <p:nvPr/>
+        </p:nvSpPr>
+        <p:spPr>
+          <a:xfrm>
+            <a:off x="502920" y="292608"/>
+            <a:ext cx="8595360" cy="384048"/>
+          </a:xfrm>
+          <a:prstGeom prst="rect">
+            <a:avLst/>
+          </a:prstGeom>
+          <a:noFill/>
+          <a:ln/>
+        </p:spPr>
+        <p:txBody>
+          <a:bodyPr wrap="square" lIns="0" tIns="0" rIns="0" bIns="0" rtlCol="0" anchor="ctr">
+            <a:noAutofit/>
+          </a:bodyPr>
+          <a:lstStyle/>
+          <a:p>
+            <a:pPr marL="0" indent="0">
+              <a:buNone/>
+            </a:pPr>
+            <a:r>
+              <a:rPr lang="ru-RU" sz="3200" b="1" dirty="0">
+                <a:solidFill>
+                  <a:srgbClr val="202A36"/>
+                </a:solidFill>
+                <a:latin typeface="Times New Roman" panose="02020603050405020304" pitchFamily="18" charset="0"/>
+                <a:ea typeface="Arial" pitchFamily="34" charset="-122"/>
+                <a:cs typeface="Times New Roman" panose="02020603050405020304" pitchFamily="18" charset="0"/>
+              </a:rPr>
+              <a:t>Экономическое обоснование</a:t>
+            </a:r>
+            <a:endParaRPr lang="en-US" sz="3200" dirty="0">
+              <a:latin typeface="Times New Roman" panose="02020603050405020304" pitchFamily="18" charset="0"/>
+              <a:cs typeface="Times New Roman" panose="02020603050405020304" pitchFamily="18" charset="0"/>
+            </a:endParaRPr>
+          </a:p>
+        </p:txBody>
+      </p:sp>
+      <p:pic>
+        <p:nvPicPr>
+          <p:cNvPr id="3" name="Рисунок 2">
+            <a:extLst>
+              <a:ext uri="{FF2B5EF4-FFF2-40B4-BE49-F238E27FC236}">
+                <a16:creationId xmlns:a16="http://schemas.microsoft.com/office/drawing/2014/main" id="{74E32BCC-9930-439D-AF63-076475093D5C}"/>
+              </a:ext>
+            </a:extLst>
+          </p:cNvPr>
+          <p:cNvPicPr>
+            <a:picLocks noChangeAspect="1"/>
+          </p:cNvPicPr>
+          <p:nvPr/>
+        </p:nvPicPr>
+        <p:blipFill>
+          <a:blip r:embed="rId3"/>
+          <a:stretch>
+            <a:fillRect/>
+          </a:stretch>
+        </p:blipFill>
+        <p:spPr>
+          <a:xfrm>
+            <a:off x="8875279" y="999372"/>
+            <a:ext cx="2838846" cy="5039428"/>
+          </a:xfrm>
+          <a:prstGeom prst="rect">
+            <a:avLst/>
+          </a:prstGeom>
+        </p:spPr>
+      </p:pic>
+      <p:pic>
+        <p:nvPicPr>
+          <p:cNvPr id="4" name="Рисунок 3">
+            <a:extLst>
+              <a:ext uri="{FF2B5EF4-FFF2-40B4-BE49-F238E27FC236}">
+                <a16:creationId xmlns:a16="http://schemas.microsoft.com/office/drawing/2014/main" id="{CA42E733-FB6E-4ACF-967E-0CA0C06DBFDA}"/>
+              </a:ext>
+            </a:extLst>
+          </p:cNvPr>
+          <p:cNvPicPr>
+            <a:picLocks noChangeAspect="1"/>
+          </p:cNvPicPr>
+          <p:nvPr/>
+        </p:nvPicPr>
+        <p:blipFill>
+          <a:blip r:embed="rId4"/>
+          <a:stretch>
+            <a:fillRect/>
+          </a:stretch>
+        </p:blipFill>
+        <p:spPr>
+          <a:xfrm>
+            <a:off x="5996691" y="1066056"/>
+            <a:ext cx="2734057" cy="4972744"/>
+          </a:xfrm>
+          <a:prstGeom prst="rect">
+            <a:avLst/>
+          </a:prstGeom>
+        </p:spPr>
+      </p:pic>
+    </p:spTree>
+  </p:cSld>
+  <p:clrMapOvr>
+    <a:masterClrMapping/>
+  </p:clrMapOvr>
+</p:sld>
+</file>
+
 <file path=ppt/slides/slide19.xml><?xml version="1.0" encoding="utf-8"?>
 <p:sld xmlns:a="http://schemas.openxmlformats.org/drawingml/2006/main" xmlns:r="http://schemas.openxmlformats.org/officeDocument/2006/relationships" xmlns:p="http://schemas.openxmlformats.org/presentationml/2006/main">
   <p:cSld>
@@ -6751,7 +6763,7 @@
         </p:spPr>
         <p:txBody>
           <a:bodyPr wrap="square" lIns="0" tIns="0" rIns="0" bIns="0" rtlCol="0" anchor="ctr">
-            <a:normAutofit/>
+            <a:noAutofit/>
           </a:bodyPr>
           <a:lstStyle/>
           <a:p>
@@ -6759,384 +6771,20 @@
               <a:buNone/>
             </a:pPr>
             <a:r>
-              <a:rPr lang="en-US" sz="1850" b="1" dirty="0">
+              <a:rPr lang="ru-RU" sz="3200" b="1" dirty="0">
                 <a:solidFill>
                   <a:srgbClr val="202A36"/>
                 </a:solidFill>
-                <a:latin typeface="Arial" pitchFamily="34" charset="0"/>
+                <a:latin typeface="Times New Roman" panose="02020603050405020304" pitchFamily="18" charset="0"/>
                 <a:ea typeface="Arial" pitchFamily="34" charset="-122"/>
-                <a:cs typeface="Arial" pitchFamily="34" charset="-120"/>
+                <a:cs typeface="Times New Roman" panose="02020603050405020304" pitchFamily="18" charset="0"/>
               </a:rPr>
-              <a:t>Тестирование и эффект внедрения</a:t>
-            </a:r>
-            <a:endParaRPr lang="en-US" sz="1850" dirty="0"/>
-          </a:p>
-        </p:txBody>
-      </p:sp>
-      <p:sp>
-        <p:nvSpPr>
-          <p:cNvPr id="5" name="Text 3"/>
-          <p:cNvSpPr/>
-          <p:nvPr/>
-        </p:nvSpPr>
-        <p:spPr>
-          <a:xfrm>
-            <a:off x="685800" y="987552"/>
-            <a:ext cx="3200400" cy="320040"/>
-          </a:xfrm>
-          <a:prstGeom prst="rect">
-            <a:avLst/>
-          </a:prstGeom>
-          <a:noFill/>
-          <a:ln/>
-        </p:spPr>
-        <p:txBody>
-          <a:bodyPr wrap="square" lIns="0" tIns="0" rIns="0" bIns="0" rtlCol="0" anchor="t">
-            <a:normAutofit/>
-          </a:bodyPr>
-          <a:lstStyle/>
-          <a:p>
-            <a:pPr marL="0" indent="0" algn="l">
-              <a:buNone/>
-            </a:pPr>
-            <a:r>
-              <a:rPr lang="en-US" sz="1700" b="1" dirty="0">
-                <a:solidFill>
-                  <a:srgbClr val="202A36"/>
-                </a:solidFill>
-                <a:latin typeface="Arial" pitchFamily="34" charset="0"/>
-                <a:ea typeface="Arial" pitchFamily="34" charset="-122"/>
-                <a:cs typeface="Arial" pitchFamily="34" charset="-120"/>
-              </a:rPr>
-              <a:t>Проверенные сценарии</a:t>
-            </a:r>
-            <a:endParaRPr lang="en-US" sz="1700" dirty="0"/>
-          </a:p>
-        </p:txBody>
-      </p:sp>
-      <p:sp>
-        <p:nvSpPr>
-          <p:cNvPr id="6" name="Text 4"/>
-          <p:cNvSpPr/>
-          <p:nvPr/>
-        </p:nvSpPr>
-        <p:spPr>
-          <a:xfrm>
-            <a:off x="685800" y="1444752"/>
-            <a:ext cx="5166360" cy="2240280"/>
-          </a:xfrm>
-          <a:prstGeom prst="rect">
-            <a:avLst/>
-          </a:prstGeom>
-          <a:noFill/>
-          <a:ln/>
-        </p:spPr>
-        <p:txBody>
-          <a:bodyPr wrap="square" lIns="635" tIns="635" rIns="635" bIns="635" rtlCol="0" anchor="t">
-            <a:normAutofit/>
-          </a:bodyPr>
-          <a:lstStyle/>
-          <a:p>
-            <a:pPr marL="0" indent="0">
-              <a:buNone/>
-            </a:pPr>
-            <a:r>
-              <a:rPr lang="en-US" sz="1310" dirty="0">
-                <a:solidFill>
-                  <a:srgbClr val="202A36"/>
-                </a:solidFill>
-                <a:latin typeface="Arial" pitchFamily="34" charset="0"/>
-                <a:ea typeface="Arial" pitchFamily="34" charset="-122"/>
-                <a:cs typeface="Arial" pitchFamily="34" charset="-120"/>
-              </a:rPr>
-              <a:t>• создание курса, блоков и группы;
-• подача заявки и выбор слота собеседования;
-• смена статусов pending → interview → approved → enrolled;
-• открытие доступа только после зачисления;
-• работа с материалами, заданиями, посещаемостью и результатами.</a:t>
-            </a:r>
-            <a:endParaRPr lang="en-US" sz="1310" dirty="0"/>
-          </a:p>
-        </p:txBody>
-      </p:sp>
-      <p:sp>
-        <p:nvSpPr>
-          <p:cNvPr id="7" name="Text 5"/>
-          <p:cNvSpPr/>
-          <p:nvPr/>
-        </p:nvSpPr>
-        <p:spPr>
-          <a:xfrm>
-            <a:off x="6446520" y="987552"/>
-            <a:ext cx="3931920" cy="320040"/>
-          </a:xfrm>
-          <a:prstGeom prst="rect">
-            <a:avLst/>
-          </a:prstGeom>
-          <a:noFill/>
-          <a:ln/>
-        </p:spPr>
-        <p:txBody>
-          <a:bodyPr wrap="square" lIns="0" tIns="0" rIns="0" bIns="0" rtlCol="0" anchor="t">
-            <a:normAutofit/>
-          </a:bodyPr>
-          <a:lstStyle/>
-          <a:p>
-            <a:pPr marL="0" indent="0" algn="l">
-              <a:buNone/>
-            </a:pPr>
-            <a:r>
-              <a:rPr lang="en-US" sz="1700" b="1" dirty="0">
-                <a:solidFill>
-                  <a:srgbClr val="202A36"/>
-                </a:solidFill>
-                <a:latin typeface="Arial" pitchFamily="34" charset="0"/>
-                <a:ea typeface="Arial" pitchFamily="34" charset="-122"/>
-                <a:cs typeface="Arial" pitchFamily="34" charset="-120"/>
-              </a:rPr>
-              <a:t>Трудоёмкость типового процесса</a:t>
-            </a:r>
-            <a:endParaRPr lang="en-US" sz="1700" dirty="0"/>
-          </a:p>
-        </p:txBody>
-      </p:sp>
-      <p:sp>
-        <p:nvSpPr>
-          <p:cNvPr id="8" name="Text 6"/>
-          <p:cNvSpPr/>
-          <p:nvPr/>
-        </p:nvSpPr>
-        <p:spPr>
-          <a:xfrm>
-            <a:off x="6537960" y="1691640"/>
-            <a:ext cx="1874520" cy="1024128"/>
-          </a:xfrm>
-          <a:prstGeom prst="rect">
-            <a:avLst/>
-          </a:prstGeom>
-          <a:solidFill>
-            <a:srgbClr val="F3F6FA"/>
-          </a:solidFill>
-          <a:ln w="12700">
-            <a:solidFill>
-              <a:srgbClr val="D7E1EA"/>
-            </a:solidFill>
-          </a:ln>
-        </p:spPr>
-        <p:txBody>
-          <a:bodyPr wrap="square" lIns="762" tIns="762" rIns="762" bIns="762" rtlCol="0" anchor="ctr">
-            <a:normAutofit/>
-          </a:bodyPr>
-          <a:lstStyle/>
-          <a:p>
-            <a:pPr marL="0" indent="0" algn="ctr">
-              <a:buNone/>
-            </a:pPr>
-            <a:r>
-              <a:rPr lang="en-US" sz="2000" b="1" dirty="0">
-                <a:solidFill>
-                  <a:srgbClr val="202A36"/>
-                </a:solidFill>
-                <a:latin typeface="Arial" pitchFamily="34" charset="0"/>
-                <a:ea typeface="Arial" pitchFamily="34" charset="-122"/>
-                <a:cs typeface="Arial" pitchFamily="34" charset="-120"/>
-              </a:rPr>
-              <a:t>AS-IS</a:t>
-            </a:r>
-            <a:endParaRPr lang="en-US" sz="2000" dirty="0"/>
-          </a:p>
-          <a:p>
-            <a:pPr marL="0" indent="0" algn="ctr">
-              <a:buNone/>
-            </a:pPr>
-            <a:r>
-              <a:rPr lang="en-US" sz="2000" b="1" dirty="0">
-                <a:solidFill>
-                  <a:srgbClr val="202A36"/>
-                </a:solidFill>
-                <a:latin typeface="Arial" pitchFamily="34" charset="0"/>
-                <a:ea typeface="Arial" pitchFamily="34" charset="-122"/>
-                <a:cs typeface="Arial" pitchFamily="34" charset="-120"/>
-              </a:rPr>
-              <a:t>440 мин.</a:t>
-            </a:r>
-            <a:endParaRPr lang="en-US" sz="2000" dirty="0"/>
-          </a:p>
-        </p:txBody>
-      </p:sp>
-      <p:sp>
-        <p:nvSpPr>
-          <p:cNvPr id="9" name="Text 7"/>
-          <p:cNvSpPr/>
-          <p:nvPr/>
-        </p:nvSpPr>
-        <p:spPr>
-          <a:xfrm>
-            <a:off x="8915400" y="1691640"/>
-            <a:ext cx="1874520" cy="1024128"/>
-          </a:xfrm>
-          <a:prstGeom prst="rect">
-            <a:avLst/>
-          </a:prstGeom>
-          <a:solidFill>
-            <a:srgbClr val="0B8DE3"/>
-          </a:solidFill>
-          <a:ln w="12700">
-            <a:solidFill>
-              <a:srgbClr val="0B8DE3"/>
-            </a:solidFill>
-          </a:ln>
-        </p:spPr>
-        <p:txBody>
-          <a:bodyPr wrap="square" lIns="762" tIns="762" rIns="762" bIns="762" rtlCol="0" anchor="ctr">
-            <a:normAutofit/>
-          </a:bodyPr>
-          <a:lstStyle/>
-          <a:p>
-            <a:pPr marL="0" indent="0" algn="ctr">
-              <a:buNone/>
-            </a:pPr>
-            <a:r>
-              <a:rPr lang="en-US" sz="2000" b="1" dirty="0">
-                <a:solidFill>
-                  <a:srgbClr val="FFFFFF"/>
-                </a:solidFill>
-                <a:latin typeface="Arial" pitchFamily="34" charset="0"/>
-                <a:ea typeface="Arial" pitchFamily="34" charset="-122"/>
-                <a:cs typeface="Arial" pitchFamily="34" charset="-120"/>
-              </a:rPr>
-              <a:t>TO-BE</a:t>
-            </a:r>
-            <a:endParaRPr lang="en-US" sz="2000" dirty="0"/>
-          </a:p>
-          <a:p>
-            <a:pPr marL="0" indent="0" algn="ctr">
-              <a:buNone/>
-            </a:pPr>
-            <a:r>
-              <a:rPr lang="en-US" sz="2000" b="1" dirty="0">
-                <a:solidFill>
-                  <a:srgbClr val="FFFFFF"/>
-                </a:solidFill>
-                <a:latin typeface="Arial" pitchFamily="34" charset="0"/>
-                <a:ea typeface="Arial" pitchFamily="34" charset="-122"/>
-                <a:cs typeface="Arial" pitchFamily="34" charset="-120"/>
-              </a:rPr>
-              <a:t>220 мин.</a:t>
-            </a:r>
-            <a:endParaRPr lang="en-US" sz="2000" dirty="0"/>
-          </a:p>
-        </p:txBody>
-      </p:sp>
-      <p:sp>
-        <p:nvSpPr>
-          <p:cNvPr id="10" name="Shape 8"/>
-          <p:cNvSpPr/>
-          <p:nvPr/>
-        </p:nvSpPr>
-        <p:spPr>
-          <a:xfrm>
-            <a:off x="8458200" y="2203704"/>
-            <a:ext cx="393192" cy="0"/>
-          </a:xfrm>
-          <a:prstGeom prst="line">
-            <a:avLst/>
-          </a:prstGeom>
-          <a:noFill/>
-          <a:ln w="20320">
-            <a:solidFill>
-              <a:srgbClr val="607080"/>
-            </a:solidFill>
-            <a:prstDash val="solid"/>
-            <a:tailEnd type="triangle"/>
-          </a:ln>
-        </p:spPr>
-      </p:sp>
-      <p:sp>
-        <p:nvSpPr>
-          <p:cNvPr id="11" name="Text 9"/>
-          <p:cNvSpPr/>
-          <p:nvPr/>
-        </p:nvSpPr>
-        <p:spPr>
-          <a:xfrm>
-            <a:off x="6537960" y="3310128"/>
-            <a:ext cx="4251960" cy="530352"/>
-          </a:xfrm>
-          <a:prstGeom prst="rect">
-            <a:avLst/>
-          </a:prstGeom>
-          <a:solidFill>
-            <a:srgbClr val="E9F5FF"/>
-          </a:solidFill>
-          <a:ln w="12700">
-            <a:solidFill>
-              <a:srgbClr val="B9DDF8"/>
-            </a:solidFill>
-          </a:ln>
-        </p:spPr>
-        <p:txBody>
-          <a:bodyPr wrap="square" lIns="762" tIns="762" rIns="762" bIns="762" rtlCol="0" anchor="ctr">
-            <a:normAutofit/>
-          </a:bodyPr>
-          <a:lstStyle/>
-          <a:p>
-            <a:pPr marL="0" indent="0" algn="ctr">
-              <a:buNone/>
-            </a:pPr>
-            <a:r>
-              <a:rPr lang="en-US" sz="1800" b="1" dirty="0">
-                <a:solidFill>
-                  <a:srgbClr val="0B8DE3"/>
-                </a:solidFill>
-                <a:latin typeface="Arial" pitchFamily="34" charset="0"/>
-                <a:ea typeface="Arial" pitchFamily="34" charset="-122"/>
-                <a:cs typeface="Arial" pitchFamily="34" charset="-120"/>
-              </a:rPr>
-              <a:t>Снижение трудоёмкости: 50%</a:t>
-            </a:r>
-            <a:endParaRPr lang="en-US" sz="1800" dirty="0"/>
-          </a:p>
-        </p:txBody>
-      </p:sp>
-      <p:sp>
-        <p:nvSpPr>
-          <p:cNvPr id="12" name="Text 10"/>
-          <p:cNvSpPr/>
-          <p:nvPr/>
-        </p:nvSpPr>
-        <p:spPr>
-          <a:xfrm>
-            <a:off x="685800" y="4343400"/>
-            <a:ext cx="3108960" cy="320040"/>
-          </a:xfrm>
-          <a:prstGeom prst="rect">
-            <a:avLst/>
-          </a:prstGeom>
-          <a:noFill/>
-          <a:ln/>
-        </p:spPr>
-        <p:txBody>
-          <a:bodyPr wrap="square" lIns="0" tIns="0" rIns="0" bIns="0" rtlCol="0" anchor="t">
-            <a:normAutofit/>
-          </a:bodyPr>
-          <a:lstStyle/>
-          <a:p>
-            <a:pPr marL="0" indent="0" algn="l">
-              <a:buNone/>
-            </a:pPr>
-            <a:r>
-              <a:rPr lang="en-US" sz="1700" b="1" dirty="0">
-                <a:solidFill>
-                  <a:srgbClr val="202A36"/>
-                </a:solidFill>
-                <a:latin typeface="Arial" pitchFamily="34" charset="0"/>
-                <a:ea typeface="Arial" pitchFamily="34" charset="-122"/>
-                <a:cs typeface="Arial" pitchFamily="34" charset="-120"/>
-              </a:rPr>
-              <a:t>Результат работы</a:t>
-            </a:r>
-            <a:endParaRPr lang="en-US" sz="1700" dirty="0"/>
+              <a:t>Заключение</a:t>
+            </a:r>
+            <a:endParaRPr lang="en-US" sz="3200" dirty="0">
+              <a:latin typeface="Times New Roman" panose="02020603050405020304" pitchFamily="18" charset="0"/>
+              <a:cs typeface="Times New Roman" panose="02020603050405020304" pitchFamily="18" charset="0"/>
+            </a:endParaRPr>
           </a:p>
         </p:txBody>
       </p:sp>
@@ -7148,7 +6796,7 @@
         </p:nvSpPr>
         <p:spPr>
           <a:xfrm>
-            <a:off x="685800" y="4736592"/>
+            <a:off x="502920" y="1246943"/>
             <a:ext cx="10195560" cy="1188720"/>
           </a:xfrm>
           <a:prstGeom prst="rect">
@@ -7159,7 +6807,7 @@
         </p:spPr>
         <p:txBody>
           <a:bodyPr wrap="square" lIns="635" tIns="635" rIns="635" bIns="635" rtlCol="0" anchor="t">
-            <a:normAutofit/>
+            <a:noAutofit/>
           </a:bodyPr>
           <a:lstStyle/>
           <a:p>
@@ -7167,13 +6815,13 @@
               <a:buNone/>
             </a:pPr>
             <a:r>
-              <a:rPr lang="en-US" sz="1280" dirty="0">
+              <a:rPr lang="en-US" sz="2400" dirty="0">
                 <a:solidFill>
                   <a:srgbClr val="202A36"/>
                 </a:solidFill>
-                <a:latin typeface="Arial" pitchFamily="34" charset="0"/>
+                <a:latin typeface="Times New Roman" panose="02020603050405020304" pitchFamily="18" charset="0"/>
                 <a:ea typeface="Arial" pitchFamily="34" charset="-122"/>
-                <a:cs typeface="Arial" pitchFamily="34" charset="-120"/>
+                <a:cs typeface="Times New Roman" panose="02020603050405020304" pitchFamily="18" charset="0"/>
               </a:rPr>
               <a:t>• спроектирован модуль «Образование»;
 • описаны AS-IS и TO-BE модели;
@@ -7181,11 +6829,19 @@
 • реализованы основные интерфейсы;
 • подтверждён эффект за счёт исключения ручного переноса данных.</a:t>
             </a:r>
-            <a:endParaRPr lang="en-US" sz="1280" dirty="0"/>
+            <a:endParaRPr lang="en-US" sz="2400" dirty="0">
+              <a:latin typeface="Times New Roman" panose="02020603050405020304" pitchFamily="18" charset="0"/>
+              <a:cs typeface="Times New Roman" panose="02020603050405020304" pitchFamily="18" charset="0"/>
+            </a:endParaRPr>
           </a:p>
         </p:txBody>
       </p:sp>
     </p:spTree>
+    <p:extLst>
+      <p:ext uri="{BB962C8B-B14F-4D97-AF65-F5344CB8AC3E}">
+        <p14:creationId xmlns:p14="http://schemas.microsoft.com/office/powerpoint/2010/main" val="11005174"/>
+      </p:ext>
+    </p:extLst>
   </p:cSld>
   <p:clrMapOvr>
     <a:masterClrMapping/>
@@ -7235,7 +6891,7 @@
               <a:buNone/>
             </a:pPr>
             <a:r>
-              <a:rPr lang="en-US" sz="1900" b="1" dirty="0">
+              <a:rPr lang="en-US" sz="3200" b="1" dirty="0">
                 <a:solidFill>
                   <a:srgbClr val="202A36"/>
                 </a:solidFill>
@@ -7245,7 +6901,7 @@
               </a:rPr>
               <a:t>Актуальность разработки</a:t>
             </a:r>
-            <a:endParaRPr lang="en-US" sz="1900" dirty="0">
+            <a:endParaRPr lang="en-US" sz="3200" dirty="0">
               <a:latin typeface="Times New Roman" panose="02020603050405020304" pitchFamily="18" charset="0"/>
               <a:cs typeface="Times New Roman" panose="02020603050405020304" pitchFamily="18" charset="0"/>
             </a:endParaRPr>
@@ -7266,8 +6922,8 @@
         </p:nvSpPr>
         <p:spPr>
           <a:xfrm>
-            <a:off x="457200" y="1038808"/>
-            <a:ext cx="6111551" cy="2469502"/>
+            <a:off x="457200" y="901960"/>
+            <a:ext cx="6111551" cy="5554824"/>
           </a:xfrm>
           <a:prstGeom prst="rect">
             <a:avLst/>
@@ -7293,7 +6949,7 @@
               </a:spcAft>
             </a:pPr>
             <a:r>
-              <a:rPr lang="ru-RU" altLang="ru-RU" dirty="0">
+              <a:rPr lang="ru-RU" altLang="ru-RU" sz="2400" dirty="0">
                 <a:latin typeface="Times New Roman" panose="02020603050405020304" pitchFamily="18" charset="0"/>
                 <a:cs typeface="Times New Roman" panose="02020603050405020304" pitchFamily="18" charset="0"/>
               </a:rPr>
@@ -7312,8 +6968,25 @@
                 <a:spcPct val="0"/>
               </a:spcAft>
             </a:pPr>
-            <a:r>
-              <a:rPr lang="ru-RU" altLang="ru-RU" dirty="0">
+            <a:endParaRPr lang="ru-RU" altLang="ru-RU" sz="2400" dirty="0">
+              <a:latin typeface="Times New Roman" panose="02020603050405020304" pitchFamily="18" charset="0"/>
+              <a:cs typeface="Times New Roman" panose="02020603050405020304" pitchFamily="18" charset="0"/>
+            </a:endParaRPr>
+          </a:p>
+          <a:p>
+            <a:pPr lvl="0" eaLnBrk="0" fontAlgn="base" hangingPunct="0">
+              <a:lnSpc>
+                <a:spcPct val="150000"/>
+              </a:lnSpc>
+              <a:spcBef>
+                <a:spcPct val="0"/>
+              </a:spcBef>
+              <a:spcAft>
+                <a:spcPct val="0"/>
+              </a:spcAft>
+            </a:pPr>
+            <a:r>
+              <a:rPr lang="ru-RU" altLang="ru-RU" sz="2400" dirty="0">
                 <a:latin typeface="Times New Roman" panose="02020603050405020304" pitchFamily="18" charset="0"/>
                 <a:cs typeface="Times New Roman" panose="02020603050405020304" pitchFamily="18" charset="0"/>
               </a:rPr>
@@ -7335,7 +7008,7 @@
               <a:buChar char="•"/>
             </a:pPr>
             <a:r>
-              <a:rPr lang="ru-RU" altLang="ru-RU" dirty="0">
+              <a:rPr lang="ru-RU" altLang="ru-RU" sz="2400" dirty="0">
                 <a:latin typeface="Times New Roman" panose="02020603050405020304" pitchFamily="18" charset="0"/>
                 <a:cs typeface="Times New Roman" panose="02020603050405020304" pitchFamily="18" charset="0"/>
               </a:rPr>
@@ -7357,7 +7030,7 @@
               <a:buChar char="•"/>
             </a:pPr>
             <a:r>
-              <a:rPr lang="ru-RU" altLang="ru-RU" dirty="0">
+              <a:rPr lang="ru-RU" altLang="ru-RU" sz="2400" dirty="0">
                 <a:latin typeface="Times New Roman" panose="02020603050405020304" pitchFamily="18" charset="0"/>
                 <a:cs typeface="Times New Roman" panose="02020603050405020304" pitchFamily="18" charset="0"/>
               </a:rPr>
@@ -7379,7 +7052,7 @@
               <a:buChar char="•"/>
             </a:pPr>
             <a:r>
-              <a:rPr lang="ru-RU" altLang="ru-RU" dirty="0">
+              <a:rPr lang="ru-RU" altLang="ru-RU" sz="2400" dirty="0">
                 <a:latin typeface="Times New Roman" panose="02020603050405020304" pitchFamily="18" charset="0"/>
                 <a:cs typeface="Times New Roman" panose="02020603050405020304" pitchFamily="18" charset="0"/>
               </a:rPr>
@@ -7401,7 +7074,7 @@
               <a:buChar char="•"/>
             </a:pPr>
             <a:r>
-              <a:rPr lang="ru-RU" altLang="ru-RU" dirty="0">
+              <a:rPr lang="ru-RU" altLang="ru-RU" sz="2400" dirty="0">
                 <a:latin typeface="Times New Roman" panose="02020603050405020304" pitchFamily="18" charset="0"/>
                 <a:cs typeface="Times New Roman" panose="02020603050405020304" pitchFamily="18" charset="0"/>
               </a:rPr>
@@ -7412,10 +7085,10 @@
       </p:sp>
       <p:pic>
         <p:nvPicPr>
-          <p:cNvPr id="6" name="Рисунок 5">
+          <p:cNvPr id="4" name="Рисунок 3">
             <a:extLst>
               <a:ext uri="{FF2B5EF4-FFF2-40B4-BE49-F238E27FC236}">
-                <a16:creationId xmlns:a16="http://schemas.microsoft.com/office/drawing/2014/main" id="{0A652F3A-DA1B-4A54-B684-C15EDBC241B2}"/>
+                <a16:creationId xmlns:a16="http://schemas.microsoft.com/office/drawing/2014/main" id="{F7E07746-C360-4C92-95DB-3D71DF517349}"/>
               </a:ext>
             </a:extLst>
           </p:cNvPr>
@@ -7438,8 +7111,8 @@
         </p:blipFill>
         <p:spPr>
           <a:xfrm>
-            <a:off x="6663690" y="2000250"/>
-            <a:ext cx="5143500" cy="3429000"/>
+            <a:off x="6096000" y="901960"/>
+            <a:ext cx="5830616" cy="3889610"/>
           </a:xfrm>
           <a:prstGeom prst="rect">
             <a:avLst/>
@@ -7495,7 +7168,7 @@
         </p:spPr>
         <p:txBody>
           <a:bodyPr>
-            <a:normAutofit fontScale="90000"/>
+            <a:normAutofit/>
           </a:bodyPr>
           <a:lstStyle/>
           <a:p>
@@ -7505,6 +7178,8 @@
                 <a:solidFill>
                   <a:schemeClr val="accent1"/>
                 </a:solidFill>
+                <a:latin typeface="Times New Roman" panose="02020603050405020304" pitchFamily="18" charset="0"/>
+                <a:cs typeface="Times New Roman" panose="02020603050405020304" pitchFamily="18" charset="0"/>
               </a:rPr>
               <a:t>Разработка модуля организации образовательного процесса и системы поддержки пользователей</a:t>
             </a:r>
@@ -7530,7 +7205,7 @@
         <p:spPr>
           <a:xfrm>
             <a:off x="205274" y="5217496"/>
-            <a:ext cx="4180113" cy="780857"/>
+            <a:ext cx="4376251" cy="1052675"/>
           </a:xfrm>
         </p:spPr>
         <p:txBody>
@@ -7539,9 +7214,13 @@
           </a:bodyPr>
           <a:lstStyle/>
           <a:p>
-            <a:pPr algn="l"/>
-            <a:r>
-              <a:rPr lang="ru-RU" sz="1600" dirty="0">
+            <a:pPr algn="l">
+              <a:lnSpc>
+                <a:spcPct val="150000"/>
+              </a:lnSpc>
+            </a:pPr>
+            <a:r>
+              <a:rPr lang="ru-RU" sz="1800" dirty="0">
                 <a:latin typeface="Times New Roman" panose="02020603050405020304" pitchFamily="18" charset="0"/>
                 <a:cs typeface="Times New Roman" panose="02020603050405020304" pitchFamily="18" charset="0"/>
               </a:rPr>
@@ -7549,9 +7228,13 @@
             </a:r>
           </a:p>
           <a:p>
-            <a:pPr algn="l"/>
-            <a:r>
-              <a:rPr lang="ru-RU" sz="1600" dirty="0">
+            <a:pPr algn="l">
+              <a:lnSpc>
+                <a:spcPct val="150000"/>
+              </a:lnSpc>
+            </a:pPr>
+            <a:r>
+              <a:rPr lang="ru-RU" sz="1800" dirty="0">
                 <a:latin typeface="Times New Roman" panose="02020603050405020304" pitchFamily="18" charset="0"/>
                 <a:cs typeface="Times New Roman" panose="02020603050405020304" pitchFamily="18" charset="0"/>
               </a:rPr>
@@ -7589,36 +7272,57 @@
           <a:p>
             <a:pPr algn="ctr"/>
             <a:r>
-              <a:rPr lang="ru-RU" dirty="0"/>
-              <a:t>Министерства науки и высшего образования Российской Федерации</a:t>
+              <a:rPr lang="ru-RU" dirty="0">
+                <a:latin typeface="Times New Roman" panose="02020603050405020304" pitchFamily="18" charset="0"/>
+                <a:cs typeface="Times New Roman" panose="02020603050405020304" pitchFamily="18" charset="0"/>
+              </a:rPr>
+              <a:t>Министерство науки и высшего образования Российской Федерации</a:t>
             </a:r>
             <a:br>
-              <a:rPr lang="ru-RU" dirty="0"/>
+              <a:rPr lang="ru-RU" dirty="0">
+                <a:latin typeface="Times New Roman" panose="02020603050405020304" pitchFamily="18" charset="0"/>
+                <a:cs typeface="Times New Roman" panose="02020603050405020304" pitchFamily="18" charset="0"/>
+              </a:rPr>
             </a:br>
             <a:r>
-              <a:rPr lang="ru-RU" dirty="0"/>
+              <a:rPr lang="ru-RU" dirty="0">
+                <a:latin typeface="Times New Roman" panose="02020603050405020304" pitchFamily="18" charset="0"/>
+                <a:cs typeface="Times New Roman" panose="02020603050405020304" pitchFamily="18" charset="0"/>
+              </a:rPr>
               <a:t>Федеральное государственное бюджетное образовательное учреждение высшего образования</a:t>
             </a:r>
           </a:p>
           <a:p>
             <a:pPr algn="ctr"/>
             <a:r>
-              <a:rPr lang="ru-RU" dirty="0"/>
-              <a:t>«Заполярный государственный университет им </a:t>
-            </a:r>
-            <a:r>
-              <a:rPr lang="ru-RU" dirty="0" err="1"/>
+              <a:rPr lang="ru-RU" dirty="0">
+                <a:latin typeface="Times New Roman" panose="02020603050405020304" pitchFamily="18" charset="0"/>
+                <a:cs typeface="Times New Roman" panose="02020603050405020304" pitchFamily="18" charset="0"/>
+              </a:rPr>
+              <a:t>«Заполярный государственный университет им. </a:t>
+            </a:r>
+            <a:r>
+              <a:rPr lang="ru-RU" dirty="0" err="1">
+                <a:latin typeface="Times New Roman" panose="02020603050405020304" pitchFamily="18" charset="0"/>
+                <a:cs typeface="Times New Roman" panose="02020603050405020304" pitchFamily="18" charset="0"/>
+              </a:rPr>
               <a:t>Н.М.Федоровского</a:t>
             </a:r>
             <a:r>
-              <a:rPr lang="ru-RU" dirty="0"/>
+              <a:rPr lang="ru-RU" dirty="0">
+                <a:latin typeface="Times New Roman" panose="02020603050405020304" pitchFamily="18" charset="0"/>
+                <a:cs typeface="Times New Roman" panose="02020603050405020304" pitchFamily="18" charset="0"/>
+              </a:rPr>
               <a:t>»</a:t>
             </a:r>
           </a:p>
           <a:p>
             <a:pPr algn="ctr"/>
             <a:r>
-              <a:rPr lang="ru-RU" dirty="0"/>
+              <a:rPr lang="ru-RU" dirty="0">
+                <a:latin typeface="Times New Roman" panose="02020603050405020304" pitchFamily="18" charset="0"/>
+                <a:cs typeface="Times New Roman" panose="02020603050405020304" pitchFamily="18" charset="0"/>
+              </a:rPr>
               <a:t>Кафедра информационных систем и технологий</a:t>
             </a:r>
           </a:p>
@@ -7653,7 +7357,10 @@
           <a:p>
             <a:pPr algn="ctr"/>
             <a:r>
-              <a:rPr lang="ru-RU" dirty="0"/>
+              <a:rPr lang="ru-RU" dirty="0">
+                <a:latin typeface="Times New Roman" panose="02020603050405020304" pitchFamily="18" charset="0"/>
+                <a:cs typeface="Times New Roman" panose="02020603050405020304" pitchFamily="18" charset="0"/>
+              </a:rPr>
               <a:t>Выпускная квалификационная работа на тему:</a:t>
             </a:r>
           </a:p>
@@ -7673,8 +7380,8 @@
         </p:nvSpPr>
         <p:spPr>
           <a:xfrm>
-            <a:off x="8994709" y="5315536"/>
-            <a:ext cx="2917371" cy="584775"/>
+            <a:off x="8621486" y="5217496"/>
+            <a:ext cx="3303035" cy="1289071"/>
           </a:xfrm>
           <a:prstGeom prst="rect">
             <a:avLst/>
@@ -7686,19 +7393,27 @@
           </a:bodyPr>
           <a:lstStyle/>
           <a:p>
-            <a:pPr algn="r"/>
-            <a:r>
-              <a:rPr lang="ru-RU" sz="1600" dirty="0">
+            <a:pPr algn="r">
+              <a:lnSpc>
+                <a:spcPct val="150000"/>
+              </a:lnSpc>
+            </a:pPr>
+            <a:r>
+              <a:rPr lang="ru-RU" dirty="0">
                 <a:latin typeface="Times New Roman" panose="02020603050405020304" pitchFamily="18" charset="0"/>
                 <a:cs typeface="Times New Roman" panose="02020603050405020304" pitchFamily="18" charset="0"/>
               </a:rPr>
-              <a:t>Руководитель работы:</a:t>
-            </a:r>
-          </a:p>
-          <a:p>
-            <a:pPr algn="r"/>
-            <a:r>
-              <a:rPr lang="ru-RU" sz="1600" dirty="0">
+              <a:t>Руководитель работы: кандидат экономических наук, доцент</a:t>
+            </a:r>
+          </a:p>
+          <a:p>
+            <a:pPr algn="r">
+              <a:lnSpc>
+                <a:spcPct val="150000"/>
+              </a:lnSpc>
+            </a:pPr>
+            <a:r>
+              <a:rPr lang="ru-RU" dirty="0">
                 <a:latin typeface="Times New Roman" panose="02020603050405020304" pitchFamily="18" charset="0"/>
                 <a:cs typeface="Times New Roman" panose="02020603050405020304" pitchFamily="18" charset="0"/>
               </a:rPr>
@@ -7722,7 +7437,7 @@
         <p:spPr>
           <a:xfrm>
             <a:off x="5186068" y="6389321"/>
-            <a:ext cx="1909114" cy="369332"/>
+            <a:ext cx="1909114" cy="458074"/>
           </a:xfrm>
           <a:prstGeom prst="rect">
             <a:avLst/>
@@ -7735,8 +7450,16 @@
           </a:bodyPr>
           <a:lstStyle/>
           <a:p>
-            <a:r>
-              <a:rPr lang="ru-RU" dirty="0"/>
+            <a:pPr>
+              <a:lnSpc>
+                <a:spcPct val="150000"/>
+              </a:lnSpc>
+            </a:pPr>
+            <a:r>
+              <a:rPr lang="ru-RU" dirty="0">
+                <a:latin typeface="Times New Roman" panose="02020603050405020304" pitchFamily="18" charset="0"/>
+                <a:cs typeface="Times New Roman" panose="02020603050405020304" pitchFamily="18" charset="0"/>
+              </a:rPr>
               <a:t>Норильск 2026</a:t>
             </a:r>
           </a:p>
@@ -7745,7 +7468,7 @@
     </p:spTree>
     <p:extLst>
       <p:ext uri="{BB962C8B-B14F-4D97-AF65-F5344CB8AC3E}">
-        <p14:creationId xmlns:p14="http://schemas.microsoft.com/office/powerpoint/2010/main" val="1910489797"/>
+        <p14:creationId xmlns:p14="http://schemas.microsoft.com/office/powerpoint/2010/main" val="4151496927"/>
       </p:ext>
     </p:extLst>
   </p:cSld>
@@ -7797,7 +7520,7 @@
               <a:buNone/>
             </a:pPr>
             <a:r>
-              <a:rPr lang="en-US" sz="1900" b="1" dirty="0">
+              <a:rPr lang="en-US" sz="3200" b="1" dirty="0">
                 <a:solidFill>
                   <a:srgbClr val="202A36"/>
                 </a:solidFill>
@@ -7807,7 +7530,7 @@
               </a:rPr>
               <a:t>Цель и задачи проекта</a:t>
             </a:r>
-            <a:endParaRPr lang="en-US" sz="1900" dirty="0">
+            <a:endParaRPr lang="en-US" sz="3200" dirty="0">
               <a:latin typeface="Times New Roman" panose="02020603050405020304" pitchFamily="18" charset="0"/>
               <a:cs typeface="Times New Roman" panose="02020603050405020304" pitchFamily="18" charset="0"/>
             </a:endParaRPr>
@@ -7816,38 +7539,48 @@
       </p:sp>
       <p:sp>
         <p:nvSpPr>
-          <p:cNvPr id="5" name="Text 3"/>
+          <p:cNvPr id="8" name="Блок-схема: альтернативный процесс 7">
+            <a:extLst>
+              <a:ext uri="{FF2B5EF4-FFF2-40B4-BE49-F238E27FC236}">
+                <a16:creationId xmlns:a16="http://schemas.microsoft.com/office/drawing/2014/main" id="{FA0A8E46-06B5-4710-A566-0DDA9F6B9E6F}"/>
+              </a:ext>
+            </a:extLst>
+          </p:cNvPr>
           <p:cNvSpPr/>
           <p:nvPr/>
         </p:nvSpPr>
         <p:spPr>
           <a:xfrm>
-            <a:off x="457200" y="1143000"/>
-            <a:ext cx="3858768" cy="4389120"/>
+            <a:off x="457200" y="1472184"/>
+            <a:ext cx="11212286" cy="1538494"/>
           </a:xfrm>
-          <a:prstGeom prst="rect">
+          <a:prstGeom prst="flowChartAlternateProcess">
             <a:avLst/>
           </a:prstGeom>
-          <a:solidFill>
-            <a:srgbClr val="0B8DE3"/>
-          </a:solidFill>
-          <a:ln w="12700">
-            <a:solidFill>
-              <a:srgbClr val="0B8DE3"/>
-            </a:solidFill>
-          </a:ln>
         </p:spPr>
-        <p:txBody>
-          <a:bodyPr wrap="square" lIns="1905" tIns="1905" rIns="1905" bIns="1905" rtlCol="0" anchor="t">
-            <a:normAutofit/>
-          </a:bodyPr>
-          <a:lstStyle/>
-          <a:p>
-            <a:pPr marL="0" indent="0" algn="l">
-              <a:buNone/>
-            </a:pPr>
-            <a:r>
-              <a:rPr lang="en-US" sz="2400" b="1" dirty="0">
+        <p:style>
+          <a:lnRef idx="2">
+            <a:schemeClr val="accent1">
+              <a:shade val="50000"/>
+            </a:schemeClr>
+          </a:lnRef>
+          <a:fillRef idx="1">
+            <a:schemeClr val="accent1"/>
+          </a:fillRef>
+          <a:effectRef idx="0">
+            <a:schemeClr val="accent1"/>
+          </a:effectRef>
+          <a:fontRef idx="minor">
+            <a:schemeClr val="lt1"/>
+          </a:fontRef>
+        </p:style>
+        <p:txBody>
+          <a:bodyPr rtlCol="0" anchor="ctr"/>
+          <a:lstStyle/>
+          <a:p>
+            <a:pPr algn="just"/>
+            <a:r>
+              <a:rPr lang="en-US" sz="2400" b="1" dirty="0" err="1">
                 <a:solidFill>
                   <a:schemeClr val="bg1"/>
                 </a:solidFill>
@@ -7866,9 +7599,7 @@
             </a:endParaRPr>
           </a:p>
           <a:p>
-            <a:pPr marL="0" indent="0" algn="l">
-              <a:buNone/>
-            </a:pPr>
+            <a:pPr algn="just"/>
             <a:r>
               <a:rPr lang="ru-RU" sz="2400" dirty="0">
                 <a:solidFill>
@@ -7877,7 +7608,7 @@
                 <a:latin typeface="Times New Roman" panose="02020603050405020304" pitchFamily="18" charset="0"/>
                 <a:cs typeface="Times New Roman" panose="02020603050405020304" pitchFamily="18" charset="0"/>
               </a:rPr>
-              <a:t>разработка модуля организации образовательного процесса и системы поддержки пользователей для платформы «Полярная Матрица»</a:t>
+              <a:t>разработать модуль организации образовательного процесса и системы поддержки пользователей для платформы «Полярная Матрица»</a:t>
             </a:r>
             <a:endParaRPr lang="en-US" sz="2400" dirty="0">
               <a:solidFill>
@@ -7887,97 +7618,241 @@
               <a:cs typeface="Times New Roman" panose="02020603050405020304" pitchFamily="18" charset="0"/>
             </a:endParaRPr>
           </a:p>
-        </p:txBody>
-      </p:sp>
-      <p:sp>
-        <p:nvSpPr>
-          <p:cNvPr id="6" name="Text 4"/>
+          <a:p>
+            <a:pPr algn="just"/>
+            <a:endParaRPr lang="ru-RU" sz="2400" dirty="0"/>
+          </a:p>
+        </p:txBody>
+      </p:sp>
+      <p:sp>
+        <p:nvSpPr>
+          <p:cNvPr id="9" name="Блок-схема: альтернативный процесс 8">
+            <a:extLst>
+              <a:ext uri="{FF2B5EF4-FFF2-40B4-BE49-F238E27FC236}">
+                <a16:creationId xmlns:a16="http://schemas.microsoft.com/office/drawing/2014/main" id="{2BE77828-7075-49EF-9FA2-8ECECF75D262}"/>
+              </a:ext>
+            </a:extLst>
+          </p:cNvPr>
           <p:cNvSpPr/>
           <p:nvPr/>
         </p:nvSpPr>
         <p:spPr>
           <a:xfrm>
-            <a:off x="4645152" y="1143000"/>
-            <a:ext cx="1828800" cy="329184"/>
+            <a:off x="457200" y="3428999"/>
+            <a:ext cx="11212286" cy="3015344"/>
           </a:xfrm>
-          <a:prstGeom prst="rect">
+          <a:prstGeom prst="flowChartAlternateProcess">
             <a:avLst/>
           </a:prstGeom>
-          <a:noFill/>
-          <a:ln/>
+          <a:solidFill>
+            <a:schemeClr val="bg1"/>
+          </a:solidFill>
         </p:spPr>
-        <p:txBody>
-          <a:bodyPr wrap="square" lIns="0" tIns="0" rIns="0" bIns="0" rtlCol="0" anchor="t">
-            <a:noAutofit/>
-          </a:bodyPr>
-          <a:lstStyle/>
-          <a:p>
-            <a:pPr marL="0" indent="0" algn="l">
-              <a:buNone/>
-            </a:pPr>
-            <a:r>
-              <a:rPr lang="en-US" sz="2400" b="1" dirty="0">
+        <p:style>
+          <a:lnRef idx="2">
+            <a:schemeClr val="accent1">
+              <a:shade val="50000"/>
+            </a:schemeClr>
+          </a:lnRef>
+          <a:fillRef idx="1">
+            <a:schemeClr val="accent1"/>
+          </a:fillRef>
+          <a:effectRef idx="0">
+            <a:schemeClr val="accent1"/>
+          </a:effectRef>
+          <a:fontRef idx="minor">
+            <a:schemeClr val="lt1"/>
+          </a:fontRef>
+        </p:style>
+        <p:txBody>
+          <a:bodyPr rtlCol="0" anchor="ctr"/>
+          <a:lstStyle/>
+          <a:p>
+            <a:pPr algn="just"/>
+            <a:r>
+              <a:rPr lang="ru-RU" sz="2400" b="1" dirty="0">
                 <a:solidFill>
-                  <a:srgbClr val="202A36"/>
-                </a:solidFill>
-                <a:latin typeface="Times New Roman" panose="02020603050405020304" pitchFamily="18" charset="0"/>
-                <a:ea typeface="Arial" pitchFamily="34" charset="-122"/>
-                <a:cs typeface="Times New Roman" panose="02020603050405020304" pitchFamily="18" charset="0"/>
-              </a:rPr>
-              <a:t>Задачи</a:t>
-            </a:r>
-            <a:endParaRPr lang="en-US" sz="2400" dirty="0">
-              <a:latin typeface="Times New Roman" panose="02020603050405020304" pitchFamily="18" charset="0"/>
-              <a:cs typeface="Times New Roman" panose="02020603050405020304" pitchFamily="18" charset="0"/>
-            </a:endParaRPr>
-          </a:p>
-        </p:txBody>
-      </p:sp>
-      <p:sp>
-        <p:nvSpPr>
-          <p:cNvPr id="7" name="Text 5"/>
-          <p:cNvSpPr/>
-          <p:nvPr/>
-        </p:nvSpPr>
-        <p:spPr>
-          <a:xfrm>
-            <a:off x="4645152" y="1627632"/>
-            <a:ext cx="6812280" cy="4087368"/>
-          </a:xfrm>
-          <a:prstGeom prst="rect">
-            <a:avLst/>
-          </a:prstGeom>
-          <a:noFill/>
-          <a:ln/>
-        </p:spPr>
-        <p:txBody>
-          <a:bodyPr wrap="square" lIns="762" tIns="762" rIns="762" bIns="762" rtlCol="0" anchor="t">
-            <a:noAutofit/>
-          </a:bodyPr>
-          <a:lstStyle/>
-          <a:p>
-            <a:pPr marL="0" indent="0">
-              <a:buNone/>
-            </a:pPr>
-            <a:r>
-              <a:rPr lang="en-US" sz="2400" dirty="0">
-                <a:solidFill>
-                  <a:srgbClr val="202A36"/>
+                  <a:schemeClr val="tx1"/>
                 </a:solidFill>
                 <a:latin typeface="Times New Roman" panose="02020603050405020304" pitchFamily="18" charset="0"/>
                 <a:cs typeface="Times New Roman" panose="02020603050405020304" pitchFamily="18" charset="0"/>
               </a:rPr>
-              <a:t>• проанализировать AS-IS процесс и выявить ручные операции;
-• спроектировать TO-BE модель с единой базой данных модуля;
-• описать доменную и физическую модели данных;
-• реализовать backend на Go с REST/gRPC-контрактами;
-• разработать интерфейсы для ученика, преподавателя, завуча и администратора;
-• проверить сценарии тестированием и оценить эффект по трудоёмкости.</a:t>
-            </a:r>
-            <a:endParaRPr lang="en-US" sz="2400" dirty="0">
+              <a:t>Задачи</a:t>
+            </a:r>
+            <a:endParaRPr lang="en-US" sz="2400" b="1" dirty="0">
+              <a:solidFill>
+                <a:schemeClr val="tx1"/>
+              </a:solidFill>
               <a:latin typeface="Times New Roman" panose="02020603050405020304" pitchFamily="18" charset="0"/>
               <a:cs typeface="Times New Roman" panose="02020603050405020304" pitchFamily="18" charset="0"/>
             </a:endParaRPr>
+          </a:p>
+          <a:p>
+            <a:r>
+              <a:rPr lang="ru-RU" sz="2400" dirty="0">
+                <a:solidFill>
+                  <a:schemeClr val="tx1"/>
+                </a:solidFill>
+                <a:latin typeface="Times New Roman" panose="02020603050405020304" pitchFamily="18" charset="0"/>
+                <a:cs typeface="Times New Roman" panose="02020603050405020304" pitchFamily="18" charset="0"/>
+              </a:rPr>
+              <a:t>– описать AS-IS модель текущей организации образовательного процесса;</a:t>
+            </a:r>
+            <a:br>
+              <a:rPr lang="ru-RU" sz="2400" dirty="0">
+                <a:solidFill>
+                  <a:schemeClr val="tx1"/>
+                </a:solidFill>
+                <a:latin typeface="Times New Roman" panose="02020603050405020304" pitchFamily="18" charset="0"/>
+                <a:cs typeface="Times New Roman" panose="02020603050405020304" pitchFamily="18" charset="0"/>
+              </a:rPr>
+            </a:br>
+            <a:r>
+              <a:rPr lang="ru-RU" sz="2400" dirty="0">
+                <a:solidFill>
+                  <a:schemeClr val="tx1"/>
+                </a:solidFill>
+                <a:latin typeface="Times New Roman" panose="02020603050405020304" pitchFamily="18" charset="0"/>
+                <a:cs typeface="Times New Roman" panose="02020603050405020304" pitchFamily="18" charset="0"/>
+              </a:rPr>
+              <a:t>– спроектировать TO-BE модель с единой базой данных модуля;</a:t>
+            </a:r>
+            <a:br>
+              <a:rPr lang="ru-RU" sz="2400" dirty="0">
+                <a:solidFill>
+                  <a:schemeClr val="tx1"/>
+                </a:solidFill>
+                <a:latin typeface="Times New Roman" panose="02020603050405020304" pitchFamily="18" charset="0"/>
+                <a:cs typeface="Times New Roman" panose="02020603050405020304" pitchFamily="18" charset="0"/>
+              </a:rPr>
+            </a:br>
+            <a:r>
+              <a:rPr lang="ru-RU" sz="2400" dirty="0">
+                <a:solidFill>
+                  <a:schemeClr val="tx1"/>
+                </a:solidFill>
+                <a:latin typeface="Times New Roman" panose="02020603050405020304" pitchFamily="18" charset="0"/>
+                <a:cs typeface="Times New Roman" panose="02020603050405020304" pitchFamily="18" charset="0"/>
+              </a:rPr>
+              <a:t>– описать доменную и физическую модели данных;</a:t>
+            </a:r>
+            <a:br>
+              <a:rPr lang="ru-RU" sz="2400" dirty="0">
+                <a:solidFill>
+                  <a:schemeClr val="tx1"/>
+                </a:solidFill>
+                <a:latin typeface="Times New Roman" panose="02020603050405020304" pitchFamily="18" charset="0"/>
+                <a:cs typeface="Times New Roman" panose="02020603050405020304" pitchFamily="18" charset="0"/>
+              </a:rPr>
+            </a:br>
+            <a:r>
+              <a:rPr lang="ru-RU" sz="2400" dirty="0">
+                <a:solidFill>
+                  <a:schemeClr val="tx1"/>
+                </a:solidFill>
+                <a:latin typeface="Times New Roman" panose="02020603050405020304" pitchFamily="18" charset="0"/>
+                <a:cs typeface="Times New Roman" panose="02020603050405020304" pitchFamily="18" charset="0"/>
+              </a:rPr>
+              <a:t>– реализовать </a:t>
+            </a:r>
+            <a:r>
+              <a:rPr lang="ru-RU" sz="2400" dirty="0" err="1">
+                <a:solidFill>
+                  <a:schemeClr val="tx1"/>
+                </a:solidFill>
+                <a:latin typeface="Times New Roman" panose="02020603050405020304" pitchFamily="18" charset="0"/>
+                <a:cs typeface="Times New Roman" panose="02020603050405020304" pitchFamily="18" charset="0"/>
+              </a:rPr>
+              <a:t>backend</a:t>
+            </a:r>
+            <a:r>
+              <a:rPr lang="ru-RU" sz="2400" dirty="0">
+                <a:solidFill>
+                  <a:schemeClr val="tx1"/>
+                </a:solidFill>
+                <a:latin typeface="Times New Roman" panose="02020603050405020304" pitchFamily="18" charset="0"/>
+                <a:cs typeface="Times New Roman" panose="02020603050405020304" pitchFamily="18" charset="0"/>
+              </a:rPr>
+              <a:t> на </a:t>
+            </a:r>
+            <a:r>
+              <a:rPr lang="ru-RU" sz="2400" dirty="0" err="1">
+                <a:solidFill>
+                  <a:schemeClr val="tx1"/>
+                </a:solidFill>
+                <a:latin typeface="Times New Roman" panose="02020603050405020304" pitchFamily="18" charset="0"/>
+                <a:cs typeface="Times New Roman" panose="02020603050405020304" pitchFamily="18" charset="0"/>
+              </a:rPr>
+              <a:t>Go</a:t>
+            </a:r>
+            <a:r>
+              <a:rPr lang="ru-RU" sz="2400" dirty="0">
+                <a:solidFill>
+                  <a:schemeClr val="tx1"/>
+                </a:solidFill>
+                <a:latin typeface="Times New Roman" panose="02020603050405020304" pitchFamily="18" charset="0"/>
+                <a:cs typeface="Times New Roman" panose="02020603050405020304" pitchFamily="18" charset="0"/>
+              </a:rPr>
+              <a:t> с использованием REST/</a:t>
+            </a:r>
+            <a:r>
+              <a:rPr lang="ru-RU" sz="2400" dirty="0" err="1">
+                <a:solidFill>
+                  <a:schemeClr val="tx1"/>
+                </a:solidFill>
+                <a:latin typeface="Times New Roman" panose="02020603050405020304" pitchFamily="18" charset="0"/>
+                <a:cs typeface="Times New Roman" panose="02020603050405020304" pitchFamily="18" charset="0"/>
+              </a:rPr>
+              <a:t>gRPC</a:t>
+            </a:r>
+            <a:r>
+              <a:rPr lang="ru-RU" sz="2400" dirty="0">
+                <a:solidFill>
+                  <a:schemeClr val="tx1"/>
+                </a:solidFill>
+                <a:latin typeface="Times New Roman" panose="02020603050405020304" pitchFamily="18" charset="0"/>
+                <a:cs typeface="Times New Roman" panose="02020603050405020304" pitchFamily="18" charset="0"/>
+              </a:rPr>
+              <a:t>-контрактов;</a:t>
+            </a:r>
+            <a:br>
+              <a:rPr lang="ru-RU" sz="2400" dirty="0">
+                <a:solidFill>
+                  <a:schemeClr val="tx1"/>
+                </a:solidFill>
+                <a:latin typeface="Times New Roman" panose="02020603050405020304" pitchFamily="18" charset="0"/>
+                <a:cs typeface="Times New Roman" panose="02020603050405020304" pitchFamily="18" charset="0"/>
+              </a:rPr>
+            </a:br>
+            <a:r>
+              <a:rPr lang="ru-RU" sz="2400" dirty="0">
+                <a:solidFill>
+                  <a:schemeClr val="tx1"/>
+                </a:solidFill>
+                <a:latin typeface="Times New Roman" panose="02020603050405020304" pitchFamily="18" charset="0"/>
+                <a:cs typeface="Times New Roman" panose="02020603050405020304" pitchFamily="18" charset="0"/>
+              </a:rPr>
+              <a:t>– разработать интерфейсы для ученика, преподавателя, завуча и администратора;</a:t>
+            </a:r>
+            <a:br>
+              <a:rPr lang="ru-RU" sz="2400" dirty="0">
+                <a:solidFill>
+                  <a:schemeClr val="tx1"/>
+                </a:solidFill>
+                <a:latin typeface="Times New Roman" panose="02020603050405020304" pitchFamily="18" charset="0"/>
+                <a:cs typeface="Times New Roman" panose="02020603050405020304" pitchFamily="18" charset="0"/>
+              </a:rPr>
+            </a:br>
+            <a:r>
+              <a:rPr lang="ru-RU" sz="2400" dirty="0">
+                <a:solidFill>
+                  <a:schemeClr val="tx1"/>
+                </a:solidFill>
+                <a:latin typeface="Times New Roman" panose="02020603050405020304" pitchFamily="18" charset="0"/>
+                <a:cs typeface="Times New Roman" panose="02020603050405020304" pitchFamily="18" charset="0"/>
+              </a:rPr>
+              <a:t>– проверить основные сценарии работы модуля тестированием и оценить эффект по трудоёмкости.</a:t>
+            </a:r>
           </a:p>
         </p:txBody>
       </p:sp>
@@ -8025,7 +7900,7 @@
         </p:spPr>
         <p:txBody>
           <a:bodyPr wrap="square" lIns="0" tIns="0" rIns="0" bIns="0" rtlCol="0" anchor="ctr">
-            <a:normAutofit/>
+            <a:noAutofit/>
           </a:bodyPr>
           <a:lstStyle/>
           <a:p>
@@ -8033,7 +7908,7 @@
               <a:buNone/>
             </a:pPr>
             <a:r>
-              <a:rPr lang="en-US" sz="1900" b="1" dirty="0">
+              <a:rPr lang="en-US" sz="3200" b="1" dirty="0">
                 <a:solidFill>
                   <a:srgbClr val="202A36"/>
                 </a:solidFill>
@@ -8043,7 +7918,7 @@
               </a:rPr>
               <a:t>Патентный поиск и анализ аналогов</a:t>
             </a:r>
-            <a:endParaRPr lang="en-US" sz="1900" dirty="0">
+            <a:endParaRPr lang="en-US" sz="3200" dirty="0">
               <a:latin typeface="Times New Roman" panose="02020603050405020304" pitchFamily="18" charset="0"/>
               <a:cs typeface="Times New Roman" panose="02020603050405020304" pitchFamily="18" charset="0"/>
             </a:endParaRPr>
@@ -8183,7 +8058,7 @@
                     <a:p>
                       <a:pPr algn="ctr" fontAlgn="ctr"/>
                       <a:r>
-                        <a:rPr lang="ru-RU" sz="1600" b="1" u="none" strike="noStrike">
+                        <a:rPr lang="ru-RU" sz="1600" b="1" u="none" strike="noStrike" dirty="0">
                           <a:solidFill>
                             <a:srgbClr val="000000"/>
                           </a:solidFill>
@@ -8193,7 +8068,7 @@
                         </a:rPr>
                         <a:t>АИС «Навигатор»</a:t>
                       </a:r>
-                      <a:endParaRPr lang="ru-RU" sz="1600" b="1" i="0" u="none" strike="noStrike">
+                      <a:endParaRPr lang="ru-RU" sz="1600" b="1" i="0" u="none" strike="noStrike" dirty="0">
                         <a:solidFill>
                           <a:srgbClr val="000000"/>
                         </a:solidFill>
@@ -8212,7 +8087,7 @@
                     <a:p>
                       <a:pPr algn="ctr" fontAlgn="ctr"/>
                       <a:r>
-                        <a:rPr lang="ru-RU" sz="1600" b="1" u="none" strike="noStrike">
+                        <a:rPr lang="ru-RU" sz="1600" b="1" u="none" strike="noStrike" dirty="0" err="1">
                           <a:solidFill>
                             <a:srgbClr val="000000"/>
                           </a:solidFill>
@@ -8222,7 +8097,7 @@
                         </a:rPr>
                         <a:t>Дневник.ру</a:t>
                       </a:r>
-                      <a:endParaRPr lang="ru-RU" sz="1600" b="1" i="0" u="none" strike="noStrike">
+                      <a:endParaRPr lang="ru-RU" sz="1600" b="1" i="0" u="none" strike="noStrike" dirty="0">
                         <a:solidFill>
                           <a:srgbClr val="000000"/>
                         </a:solidFill>
@@ -8241,7 +8116,7 @@
                     <a:p>
                       <a:pPr algn="ctr" fontAlgn="ctr"/>
                       <a:r>
-                        <a:rPr lang="en-US" sz="1600" b="1" u="none" strike="noStrike">
+                        <a:rPr lang="en-US" sz="1600" b="1" u="none" strike="noStrike" dirty="0">
                           <a:solidFill>
                             <a:srgbClr val="000000"/>
                           </a:solidFill>
@@ -8251,7 +8126,7 @@
                         </a:rPr>
                         <a:t>Moodle</a:t>
                       </a:r>
-                      <a:endParaRPr lang="en-US" sz="1600" b="1" i="0" u="none" strike="noStrike">
+                      <a:endParaRPr lang="en-US" sz="1600" b="1" i="0" u="none" strike="noStrike" dirty="0">
                         <a:solidFill>
                           <a:srgbClr val="000000"/>
                         </a:solidFill>
@@ -8277,7 +8152,7 @@
                     <a:p>
                       <a:pPr algn="l" fontAlgn="ctr"/>
                       <a:r>
-                        <a:rPr lang="ru-RU" sz="1600" b="0" u="none" strike="noStrike">
+                        <a:rPr lang="ru-RU" sz="1600" b="0" u="none" strike="noStrike" dirty="0">
                           <a:solidFill>
                             <a:srgbClr val="000000"/>
                           </a:solidFill>
@@ -8287,7 +8162,7 @@
                         </a:rPr>
                         <a:t>Каталог программ ДПО</a:t>
                       </a:r>
-                      <a:endParaRPr lang="ru-RU" sz="1600" b="0" i="0" u="none" strike="noStrike">
+                      <a:endParaRPr lang="ru-RU" sz="1600" b="0" i="0" u="none" strike="noStrike" dirty="0">
                         <a:solidFill>
                           <a:srgbClr val="000000"/>
                         </a:solidFill>
@@ -8429,7 +8304,7 @@
                     <a:p>
                       <a:pPr algn="l" fontAlgn="ctr"/>
                       <a:r>
-                        <a:rPr lang="ru-RU" sz="1600" b="0" u="none" strike="noStrike">
+                        <a:rPr lang="ru-RU" sz="1600" b="0" u="none" strike="noStrike" dirty="0">
                           <a:solidFill>
                             <a:srgbClr val="000000"/>
                           </a:solidFill>
@@ -8439,7 +8314,7 @@
                         </a:rPr>
                         <a:t>Подача заявки на обучение</a:t>
                       </a:r>
-                      <a:endParaRPr lang="ru-RU" sz="1600" b="0" i="0" u="none" strike="noStrike">
+                      <a:endParaRPr lang="ru-RU" sz="1600" b="0" i="0" u="none" strike="noStrike" dirty="0">
                         <a:solidFill>
                           <a:srgbClr val="000000"/>
                         </a:solidFill>
@@ -8458,7 +8333,7 @@
                     <a:p>
                       <a:pPr algn="l" fontAlgn="ctr"/>
                       <a:r>
-                        <a:rPr lang="ru-RU" sz="1600" b="0" u="none" strike="noStrike">
+                        <a:rPr lang="ru-RU" sz="1600" b="0" u="none" strike="noStrike" dirty="0">
                           <a:solidFill>
                             <a:srgbClr val="000000"/>
                           </a:solidFill>
@@ -8468,7 +8343,7 @@
                         </a:rPr>
                         <a:t>+</a:t>
                       </a:r>
-                      <a:endParaRPr lang="ru-RU" sz="1600" b="0" i="0" u="none" strike="noStrike">
+                      <a:endParaRPr lang="ru-RU" sz="1600" b="0" i="0" u="none" strike="noStrike" dirty="0">
                         <a:solidFill>
                           <a:srgbClr val="000000"/>
                         </a:solidFill>
@@ -8610,7 +8485,7 @@
                     <a:p>
                       <a:pPr algn="l" fontAlgn="ctr"/>
                       <a:r>
-                        <a:rPr lang="ru-RU" sz="1600" b="0" u="none" strike="noStrike">
+                        <a:rPr lang="ru-RU" sz="1600" b="0" u="none" strike="noStrike" dirty="0">
                           <a:solidFill>
                             <a:srgbClr val="000000"/>
                           </a:solidFill>
@@ -8620,7 +8495,7 @@
                         </a:rPr>
                         <a:t>+</a:t>
                       </a:r>
-                      <a:endParaRPr lang="ru-RU" sz="1600" b="0" i="0" u="none" strike="noStrike">
+                      <a:endParaRPr lang="ru-RU" sz="1600" b="0" i="0" u="none" strike="noStrike" dirty="0">
                         <a:solidFill>
                           <a:srgbClr val="000000"/>
                         </a:solidFill>
@@ -8762,7 +8637,7 @@
                     <a:p>
                       <a:pPr algn="l" fontAlgn="ctr"/>
                       <a:r>
-                        <a:rPr lang="ru-RU" sz="1600" b="0" u="none" strike="noStrike">
+                        <a:rPr lang="ru-RU" sz="1600" b="0" u="none" strike="noStrike" dirty="0">
                           <a:solidFill>
                             <a:srgbClr val="000000"/>
                           </a:solidFill>
@@ -8772,7 +8647,7 @@
                         </a:rPr>
                         <a:t>+</a:t>
                       </a:r>
-                      <a:endParaRPr lang="ru-RU" sz="1600" b="0" i="0" u="none" strike="noStrike">
+                      <a:endParaRPr lang="ru-RU" sz="1600" b="0" i="0" u="none" strike="noStrike" dirty="0">
                         <a:solidFill>
                           <a:srgbClr val="000000"/>
                         </a:solidFill>
@@ -8943,7 +8818,7 @@
                     <a:p>
                       <a:pPr algn="l" fontAlgn="ctr"/>
                       <a:r>
-                        <a:rPr lang="ru-RU" sz="1600" b="0" u="none" strike="noStrike">
+                        <a:rPr lang="ru-RU" sz="1600" b="0" u="none" strike="noStrike" dirty="0">
                           <a:solidFill>
                             <a:srgbClr val="000000"/>
                           </a:solidFill>
@@ -8953,7 +8828,7 @@
                         </a:rPr>
                         <a:t>-</a:t>
                       </a:r>
-                      <a:endParaRPr lang="ru-RU" sz="1600" b="0" i="0" u="none" strike="noStrike">
+                      <a:endParaRPr lang="ru-RU" sz="1600" b="0" i="0" u="none" strike="noStrike" dirty="0">
                         <a:solidFill>
                           <a:srgbClr val="000000"/>
                         </a:solidFill>
@@ -9095,7 +8970,7 @@
                     <a:p>
                       <a:pPr algn="l" fontAlgn="ctr"/>
                       <a:r>
-                        <a:rPr lang="ru-RU" sz="1600" b="0" u="none" strike="noStrike">
+                        <a:rPr lang="ru-RU" sz="1600" b="0" u="none" strike="noStrike" dirty="0">
                           <a:solidFill>
                             <a:srgbClr val="000000"/>
                           </a:solidFill>
@@ -9105,7 +8980,7 @@
                         </a:rPr>
                         <a:t>-</a:t>
                       </a:r>
-                      <a:endParaRPr lang="ru-RU" sz="1600" b="0" i="0" u="none" strike="noStrike">
+                      <a:endParaRPr lang="ru-RU" sz="1600" b="0" i="0" u="none" strike="noStrike" dirty="0">
                         <a:solidFill>
                           <a:srgbClr val="000000"/>
                         </a:solidFill>
@@ -9247,7 +9122,7 @@
                     <a:p>
                       <a:pPr algn="l" fontAlgn="ctr"/>
                       <a:r>
-                        <a:rPr lang="ru-RU" sz="1600" b="0" u="none" strike="noStrike">
+                        <a:rPr lang="ru-RU" sz="1600" b="0" u="none" strike="noStrike" dirty="0">
                           <a:solidFill>
                             <a:srgbClr val="000000"/>
                           </a:solidFill>
@@ -9257,7 +9132,7 @@
                         </a:rPr>
                         <a:t>-</a:t>
                       </a:r>
-                      <a:endParaRPr lang="ru-RU" sz="1600" b="0" i="0" u="none" strike="noStrike">
+                      <a:endParaRPr lang="ru-RU" sz="1600" b="0" i="0" u="none" strike="noStrike" dirty="0">
                         <a:solidFill>
                           <a:srgbClr val="000000"/>
                         </a:solidFill>
@@ -9428,7 +9303,7 @@
                     <a:p>
                       <a:pPr algn="l" fontAlgn="ctr"/>
                       <a:r>
-                        <a:rPr lang="ru-RU" sz="1600" b="0" u="none" strike="noStrike">
+                        <a:rPr lang="ru-RU" sz="1600" b="0" u="none" strike="noStrike" dirty="0">
                           <a:solidFill>
                             <a:srgbClr val="000000"/>
                           </a:solidFill>
@@ -9438,7 +9313,7 @@
                         </a:rPr>
                         <a:t>+</a:t>
                       </a:r>
-                      <a:endParaRPr lang="ru-RU" sz="1600" b="0" i="0" u="none" strike="noStrike">
+                      <a:endParaRPr lang="ru-RU" sz="1600" b="0" i="0" u="none" strike="noStrike" dirty="0">
                         <a:solidFill>
                           <a:srgbClr val="000000"/>
                         </a:solidFill>
@@ -9522,7 +9397,7 @@
                     <a:p>
                       <a:pPr algn="l" fontAlgn="ctr"/>
                       <a:r>
-                        <a:rPr lang="ru-RU" sz="1600" b="0" u="none" strike="noStrike">
+                        <a:rPr lang="ru-RU" sz="1600" b="0" u="none" strike="noStrike" dirty="0">
                           <a:solidFill>
                             <a:srgbClr val="000000"/>
                           </a:solidFill>
@@ -9532,7 +9407,7 @@
                         </a:rPr>
                         <a:t>+</a:t>
                       </a:r>
-                      <a:endParaRPr lang="ru-RU" sz="1600" b="0" i="0" u="none" strike="noStrike">
+                      <a:endParaRPr lang="ru-RU" sz="1600" b="0" i="0" u="none" strike="noStrike" dirty="0">
                         <a:solidFill>
                           <a:srgbClr val="000000"/>
                         </a:solidFill>
@@ -9580,7 +9455,7 @@
                     <a:p>
                       <a:pPr algn="l" fontAlgn="ctr"/>
                       <a:r>
-                        <a:rPr lang="ru-RU" sz="1600" b="0" u="none" strike="noStrike">
+                        <a:rPr lang="ru-RU" sz="1600" b="0" u="none" strike="noStrike" dirty="0">
                           <a:solidFill>
                             <a:srgbClr val="000000"/>
                           </a:solidFill>
@@ -9590,7 +9465,7 @@
                         </a:rPr>
                         <a:t>+</a:t>
                       </a:r>
-                      <a:endParaRPr lang="ru-RU" sz="1600" b="0" i="0" u="none" strike="noStrike">
+                      <a:endParaRPr lang="ru-RU" sz="1600" b="0" i="0" u="none" strike="noStrike" dirty="0">
                         <a:solidFill>
                           <a:srgbClr val="000000"/>
                         </a:solidFill>
@@ -9732,7 +9607,7 @@
                     <a:p>
                       <a:pPr algn="l" fontAlgn="ctr"/>
                       <a:r>
-                        <a:rPr lang="ru-RU" sz="1600" b="0" u="none" strike="noStrike">
+                        <a:rPr lang="ru-RU" sz="1600" b="0" u="none" strike="noStrike" dirty="0">
                           <a:solidFill>
                             <a:srgbClr val="000000"/>
                           </a:solidFill>
@@ -9742,7 +9617,7 @@
                         </a:rPr>
                         <a:t>+</a:t>
                       </a:r>
-                      <a:endParaRPr lang="ru-RU" sz="1600" b="0" i="0" u="none" strike="noStrike">
+                      <a:endParaRPr lang="ru-RU" sz="1600" b="0" i="0" u="none" strike="noStrike" dirty="0">
                         <a:solidFill>
                           <a:srgbClr val="000000"/>
                         </a:solidFill>
@@ -9884,7 +9759,7 @@
                     <a:p>
                       <a:pPr algn="l" fontAlgn="ctr"/>
                       <a:r>
-                        <a:rPr lang="ru-RU" sz="1600" b="0" u="none" strike="noStrike">
+                        <a:rPr lang="ru-RU" sz="1600" b="0" u="none" strike="noStrike" dirty="0">
                           <a:solidFill>
                             <a:srgbClr val="000000"/>
                           </a:solidFill>
@@ -9894,7 +9769,7 @@
                         </a:rPr>
                         <a:t>-</a:t>
                       </a:r>
-                      <a:endParaRPr lang="ru-RU" sz="1600" b="0" i="0" u="none" strike="noStrike">
+                      <a:endParaRPr lang="ru-RU" sz="1600" b="0" i="0" u="none" strike="noStrike" dirty="0">
                         <a:solidFill>
                           <a:srgbClr val="000000"/>
                         </a:solidFill>
@@ -10036,7 +9911,7 @@
                     <a:p>
                       <a:pPr algn="l" fontAlgn="ctr"/>
                       <a:r>
-                        <a:rPr lang="ru-RU" sz="1600" b="0" u="none" strike="noStrike">
+                        <a:rPr lang="ru-RU" sz="1600" b="0" u="none" strike="noStrike" dirty="0">
                           <a:solidFill>
                             <a:srgbClr val="000000"/>
                           </a:solidFill>
@@ -10046,7 +9921,7 @@
                         </a:rPr>
                         <a:t>-</a:t>
                       </a:r>
-                      <a:endParaRPr lang="ru-RU" sz="1600" b="0" i="0" u="none" strike="noStrike">
+                      <a:endParaRPr lang="ru-RU" sz="1600" b="0" i="0" u="none" strike="noStrike" dirty="0">
                         <a:solidFill>
                           <a:srgbClr val="000000"/>
                         </a:solidFill>
@@ -10141,12 +10016,12 @@
         </p:spPr>
         <p:txBody>
           <a:bodyPr wrap="square" lIns="0" tIns="0" rIns="0" bIns="0" rtlCol="0" anchor="ctr">
-            <a:normAutofit/>
+            <a:noAutofit/>
           </a:bodyPr>
           <a:lstStyle/>
           <a:p>
             <a:r>
-              <a:rPr lang="ru-RU" sz="1900" b="1" dirty="0">
+              <a:rPr lang="ru-RU" sz="3200" b="1" dirty="0">
                 <a:solidFill>
                   <a:srgbClr val="202A36"/>
                 </a:solidFill>
@@ -10157,7 +10032,239 @@
               <a:t>Системный анализ </a:t>
             </a:r>
             <a:r>
-              <a:rPr lang="en-US" sz="1900" b="1" dirty="0">
+              <a:rPr lang="en-US" sz="3200" b="1" dirty="0">
+                <a:solidFill>
+                  <a:srgbClr val="202A36"/>
+                </a:solidFill>
+                <a:latin typeface="Times New Roman" panose="02020603050405020304" pitchFamily="18" charset="0"/>
+                <a:ea typeface="Arial" pitchFamily="34" charset="-122"/>
+                <a:cs typeface="Times New Roman" panose="02020603050405020304" pitchFamily="18" charset="0"/>
+              </a:rPr>
+              <a:t>IDEF0 AS-IS</a:t>
+            </a:r>
+            <a:endParaRPr lang="en-US" sz="3200" dirty="0">
+              <a:latin typeface="Times New Roman" panose="02020603050405020304" pitchFamily="18" charset="0"/>
+              <a:cs typeface="Times New Roman" panose="02020603050405020304" pitchFamily="18" charset="0"/>
+            </a:endParaRPr>
+          </a:p>
+        </p:txBody>
+      </p:sp>
+      <p:pic>
+        <p:nvPicPr>
+          <p:cNvPr id="5" name="Рисунок 4">
+            <a:extLst>
+              <a:ext uri="{FF2B5EF4-FFF2-40B4-BE49-F238E27FC236}">
+                <a16:creationId xmlns:a16="http://schemas.microsoft.com/office/drawing/2014/main" id="{86CB4784-CFA8-421B-8B70-20B65E020853}"/>
+              </a:ext>
+            </a:extLst>
+          </p:cNvPr>
+          <p:cNvPicPr/>
+          <p:nvPr/>
+        </p:nvPicPr>
+        <p:blipFill>
+          <a:blip r:embed="rId3">
+            <a:extLst>
+              <a:ext uri="{28A0092B-C50C-407E-A947-70E740481C1C}">
+                <a14:useLocalDpi xmlns:a14="http://schemas.microsoft.com/office/drawing/2010/main" val="0"/>
+              </a:ext>
+            </a:extLst>
+          </a:blip>
+          <a:srcRect/>
+          <a:stretch>
+            <a:fillRect/>
+          </a:stretch>
+        </p:blipFill>
+        <p:spPr bwMode="auto">
+          <a:xfrm>
+            <a:off x="0" y="676657"/>
+            <a:ext cx="11706808" cy="6227996"/>
+          </a:xfrm>
+          <a:prstGeom prst="rect">
+            <a:avLst/>
+          </a:prstGeom>
+          <a:noFill/>
+          <a:ln>
+            <a:noFill/>
+          </a:ln>
+        </p:spPr>
+      </p:pic>
+    </p:spTree>
+  </p:cSld>
+  <p:clrMapOvr>
+    <a:masterClrMapping/>
+  </p:clrMapOvr>
+</p:sld>
+</file>
+
+<file path=ppt/slides/slide6.xml><?xml version="1.0" encoding="utf-8"?>
+<p:sld xmlns:a="http://schemas.openxmlformats.org/drawingml/2006/main" xmlns:r="http://schemas.openxmlformats.org/officeDocument/2006/relationships" xmlns:p="http://schemas.openxmlformats.org/presentationml/2006/main">
+  <p:cSld>
+    <p:spTree>
+      <p:nvGrpSpPr>
+        <p:cNvPr id="1" name=""/>
+        <p:cNvGrpSpPr/>
+        <p:nvPr/>
+      </p:nvGrpSpPr>
+      <p:grpSpPr>
+        <a:xfrm>
+          <a:off x="0" y="0"/>
+          <a:ext cx="0" cy="0"/>
+          <a:chOff x="0" y="0"/>
+          <a:chExt cx="0" cy="0"/>
+        </a:xfrm>
+      </p:grpSpPr>
+      <p:sp>
+        <p:nvSpPr>
+          <p:cNvPr id="2" name="Text 0"/>
+          <p:cNvSpPr/>
+          <p:nvPr/>
+        </p:nvSpPr>
+        <p:spPr>
+          <a:xfrm>
+            <a:off x="502920" y="292608"/>
+            <a:ext cx="8595360" cy="384048"/>
+          </a:xfrm>
+          <a:prstGeom prst="rect">
+            <a:avLst/>
+          </a:prstGeom>
+          <a:noFill/>
+          <a:ln/>
+        </p:spPr>
+        <p:txBody>
+          <a:bodyPr wrap="square" lIns="0" tIns="0" rIns="0" bIns="0" rtlCol="0" anchor="ctr">
+            <a:noAutofit/>
+          </a:bodyPr>
+          <a:lstStyle/>
+          <a:p>
+            <a:r>
+              <a:rPr lang="ru-RU" sz="3200" b="1" dirty="0">
+                <a:solidFill>
+                  <a:srgbClr val="202A36"/>
+                </a:solidFill>
+                <a:latin typeface="Times New Roman" panose="02020603050405020304" pitchFamily="18" charset="0"/>
+                <a:ea typeface="Arial" pitchFamily="34" charset="-122"/>
+                <a:cs typeface="Times New Roman" panose="02020603050405020304" pitchFamily="18" charset="0"/>
+              </a:rPr>
+              <a:t>Системный анализ </a:t>
+            </a:r>
+            <a:r>
+              <a:rPr lang="en-US" sz="3200" b="1" dirty="0">
+                <a:solidFill>
+                  <a:srgbClr val="202A36"/>
+                </a:solidFill>
+                <a:latin typeface="Times New Roman" panose="02020603050405020304" pitchFamily="18" charset="0"/>
+                <a:ea typeface="Arial" pitchFamily="34" charset="-122"/>
+                <a:cs typeface="Times New Roman" panose="02020603050405020304" pitchFamily="18" charset="0"/>
+              </a:rPr>
+              <a:t>IDEF0 AS-IS</a:t>
+            </a:r>
+            <a:endParaRPr lang="en-US" sz="3200" dirty="0">
+              <a:latin typeface="Times New Roman" panose="02020603050405020304" pitchFamily="18" charset="0"/>
+              <a:cs typeface="Times New Roman" panose="02020603050405020304" pitchFamily="18" charset="0"/>
+            </a:endParaRPr>
+          </a:p>
+        </p:txBody>
+      </p:sp>
+      <p:pic>
+        <p:nvPicPr>
+          <p:cNvPr id="6" name="Рисунок 5">
+            <a:extLst>
+              <a:ext uri="{FF2B5EF4-FFF2-40B4-BE49-F238E27FC236}">
+                <a16:creationId xmlns:a16="http://schemas.microsoft.com/office/drawing/2014/main" id="{E5180DCA-9DB9-4956-836F-8E9C383B4617}"/>
+              </a:ext>
+            </a:extLst>
+          </p:cNvPr>
+          <p:cNvPicPr/>
+          <p:nvPr/>
+        </p:nvPicPr>
+        <p:blipFill>
+          <a:blip r:embed="rId3">
+            <a:extLst>
+              <a:ext uri="{28A0092B-C50C-407E-A947-70E740481C1C}">
+                <a14:useLocalDpi xmlns:a14="http://schemas.microsoft.com/office/drawing/2010/main" val="0"/>
+              </a:ext>
+            </a:extLst>
+          </a:blip>
+          <a:srcRect/>
+          <a:stretch>
+            <a:fillRect/>
+          </a:stretch>
+        </p:blipFill>
+        <p:spPr bwMode="auto">
+          <a:xfrm>
+            <a:off x="-1" y="676657"/>
+            <a:ext cx="11694368" cy="6227996"/>
+          </a:xfrm>
+          <a:prstGeom prst="rect">
+            <a:avLst/>
+          </a:prstGeom>
+          <a:noFill/>
+          <a:ln>
+            <a:noFill/>
+          </a:ln>
+        </p:spPr>
+      </p:pic>
+    </p:spTree>
+  </p:cSld>
+  <p:clrMapOvr>
+    <a:masterClrMapping/>
+  </p:clrMapOvr>
+</p:sld>
+</file>
+
+<file path=ppt/slides/slide7.xml><?xml version="1.0" encoding="utf-8"?>
+<p:sld xmlns:a="http://schemas.openxmlformats.org/drawingml/2006/main" xmlns:r="http://schemas.openxmlformats.org/officeDocument/2006/relationships" xmlns:p="http://schemas.openxmlformats.org/presentationml/2006/main">
+  <p:cSld>
+    <p:spTree>
+      <p:nvGrpSpPr>
+        <p:cNvPr id="1" name=""/>
+        <p:cNvGrpSpPr/>
+        <p:nvPr/>
+      </p:nvGrpSpPr>
+      <p:grpSpPr>
+        <a:xfrm>
+          <a:off x="0" y="0"/>
+          <a:ext cx="0" cy="0"/>
+          <a:chOff x="0" y="0"/>
+          <a:chExt cx="0" cy="0"/>
+        </a:xfrm>
+      </p:grpSpPr>
+      <p:sp>
+        <p:nvSpPr>
+          <p:cNvPr id="2" name="Text 0"/>
+          <p:cNvSpPr/>
+          <p:nvPr/>
+        </p:nvSpPr>
+        <p:spPr>
+          <a:xfrm>
+            <a:off x="502920" y="292608"/>
+            <a:ext cx="8595360" cy="384048"/>
+          </a:xfrm>
+          <a:prstGeom prst="rect">
+            <a:avLst/>
+          </a:prstGeom>
+          <a:noFill/>
+          <a:ln/>
+        </p:spPr>
+        <p:txBody>
+          <a:bodyPr wrap="square" lIns="0" tIns="0" rIns="0" bIns="0" rtlCol="0" anchor="ctr">
+            <a:noAutofit/>
+          </a:bodyPr>
+          <a:lstStyle/>
+          <a:p>
+            <a:r>
+              <a:rPr lang="ru-RU" sz="3200" b="1" dirty="0">
+                <a:solidFill>
+                  <a:srgbClr val="202A36"/>
+                </a:solidFill>
+                <a:latin typeface="Times New Roman" panose="02020603050405020304" pitchFamily="18" charset="0"/>
+                <a:ea typeface="Arial" pitchFamily="34" charset="-122"/>
+                <a:cs typeface="Times New Roman" panose="02020603050405020304" pitchFamily="18" charset="0"/>
+              </a:rPr>
+              <a:t>Системный анализ </a:t>
+            </a:r>
+            <a:r>
+              <a:rPr lang="en-US" sz="3200" b="1" dirty="0">
                 <a:solidFill>
                   <a:srgbClr val="202A36"/>
                 </a:solidFill>
@@ -10167,7 +10274,7 @@
               </a:rPr>
               <a:t>DFD AS-IS</a:t>
             </a:r>
-            <a:endParaRPr lang="en-US" sz="1900" dirty="0">
+            <a:endParaRPr lang="en-US" sz="3200" dirty="0">
               <a:latin typeface="Times New Roman" panose="02020603050405020304" pitchFamily="18" charset="0"/>
               <a:cs typeface="Times New Roman" panose="02020603050405020304" pitchFamily="18" charset="0"/>
             </a:endParaRPr>
@@ -10221,7 +10328,7 @@
 </p:sld>
 </file>
 
-<file path=ppt/slides/slide6.xml><?xml version="1.0" encoding="utf-8"?>
+<file path=ppt/slides/slide8.xml><?xml version="1.0" encoding="utf-8"?>
 <p:sld xmlns:a="http://schemas.openxmlformats.org/drawingml/2006/main" xmlns:r="http://schemas.openxmlformats.org/officeDocument/2006/relationships" xmlns:p="http://schemas.openxmlformats.org/presentationml/2006/main">
   <p:cSld>
     <p:spTree>
@@ -10257,12 +10364,12 @@
         </p:spPr>
         <p:txBody>
           <a:bodyPr wrap="square" lIns="0" tIns="0" rIns="0" bIns="0" rtlCol="0" anchor="ctr">
-            <a:normAutofit/>
+            <a:noAutofit/>
           </a:bodyPr>
           <a:lstStyle/>
           <a:p>
             <a:r>
-              <a:rPr lang="ru-RU" sz="1900" b="1" dirty="0">
+              <a:rPr lang="ru-RU" sz="3200" b="1" dirty="0">
                 <a:solidFill>
                   <a:srgbClr val="202A36"/>
                 </a:solidFill>
@@ -10273,7 +10380,7 @@
               <a:t>Системный анализ </a:t>
             </a:r>
             <a:r>
-              <a:rPr lang="en-US" sz="1900" b="1" dirty="0">
+              <a:rPr lang="en-US" sz="3200" b="1" dirty="0">
                 <a:solidFill>
                   <a:srgbClr val="202A36"/>
                 </a:solidFill>
@@ -10283,7 +10390,7 @@
               </a:rPr>
               <a:t>DFD AS-IS</a:t>
             </a:r>
-            <a:endParaRPr lang="en-US" sz="1900" dirty="0">
+            <a:endParaRPr lang="en-US" sz="3200" dirty="0">
               <a:latin typeface="Times New Roman" panose="02020603050405020304" pitchFamily="18" charset="0"/>
               <a:cs typeface="Times New Roman" panose="02020603050405020304" pitchFamily="18" charset="0"/>
             </a:endParaRPr>
@@ -10337,238 +10444,6 @@
 </p:sld>
 </file>
 
-<file path=ppt/slides/slide7.xml><?xml version="1.0" encoding="utf-8"?>
-<p:sld xmlns:a="http://schemas.openxmlformats.org/drawingml/2006/main" xmlns:r="http://schemas.openxmlformats.org/officeDocument/2006/relationships" xmlns:p="http://schemas.openxmlformats.org/presentationml/2006/main">
-  <p:cSld>
-    <p:spTree>
-      <p:nvGrpSpPr>
-        <p:cNvPr id="1" name=""/>
-        <p:cNvGrpSpPr/>
-        <p:nvPr/>
-      </p:nvGrpSpPr>
-      <p:grpSpPr>
-        <a:xfrm>
-          <a:off x="0" y="0"/>
-          <a:ext cx="0" cy="0"/>
-          <a:chOff x="0" y="0"/>
-          <a:chExt cx="0" cy="0"/>
-        </a:xfrm>
-      </p:grpSpPr>
-      <p:sp>
-        <p:nvSpPr>
-          <p:cNvPr id="2" name="Text 0"/>
-          <p:cNvSpPr/>
-          <p:nvPr/>
-        </p:nvSpPr>
-        <p:spPr>
-          <a:xfrm>
-            <a:off x="502920" y="292608"/>
-            <a:ext cx="8595360" cy="384048"/>
-          </a:xfrm>
-          <a:prstGeom prst="rect">
-            <a:avLst/>
-          </a:prstGeom>
-          <a:noFill/>
-          <a:ln/>
-        </p:spPr>
-        <p:txBody>
-          <a:bodyPr wrap="square" lIns="0" tIns="0" rIns="0" bIns="0" rtlCol="0" anchor="ctr">
-            <a:normAutofit/>
-          </a:bodyPr>
-          <a:lstStyle/>
-          <a:p>
-            <a:r>
-              <a:rPr lang="ru-RU" sz="1900" b="1" dirty="0">
-                <a:solidFill>
-                  <a:srgbClr val="202A36"/>
-                </a:solidFill>
-                <a:latin typeface="Times New Roman" panose="02020603050405020304" pitchFamily="18" charset="0"/>
-                <a:ea typeface="Arial" pitchFamily="34" charset="-122"/>
-                <a:cs typeface="Times New Roman" panose="02020603050405020304" pitchFamily="18" charset="0"/>
-              </a:rPr>
-              <a:t>Системный анализ </a:t>
-            </a:r>
-            <a:r>
-              <a:rPr lang="en-US" sz="1900" b="1" dirty="0">
-                <a:solidFill>
-                  <a:srgbClr val="202A36"/>
-                </a:solidFill>
-                <a:latin typeface="Times New Roman" panose="02020603050405020304" pitchFamily="18" charset="0"/>
-                <a:ea typeface="Arial" pitchFamily="34" charset="-122"/>
-                <a:cs typeface="Times New Roman" panose="02020603050405020304" pitchFamily="18" charset="0"/>
-              </a:rPr>
-              <a:t>IDEF0 AS-IS</a:t>
-            </a:r>
-            <a:endParaRPr lang="en-US" sz="1900" dirty="0">
-              <a:latin typeface="Times New Roman" panose="02020603050405020304" pitchFamily="18" charset="0"/>
-              <a:cs typeface="Times New Roman" panose="02020603050405020304" pitchFamily="18" charset="0"/>
-            </a:endParaRPr>
-          </a:p>
-        </p:txBody>
-      </p:sp>
-      <p:pic>
-        <p:nvPicPr>
-          <p:cNvPr id="5" name="Рисунок 4">
-            <a:extLst>
-              <a:ext uri="{FF2B5EF4-FFF2-40B4-BE49-F238E27FC236}">
-                <a16:creationId xmlns:a16="http://schemas.microsoft.com/office/drawing/2014/main" id="{86CB4784-CFA8-421B-8B70-20B65E020853}"/>
-              </a:ext>
-            </a:extLst>
-          </p:cNvPr>
-          <p:cNvPicPr/>
-          <p:nvPr/>
-        </p:nvPicPr>
-        <p:blipFill>
-          <a:blip r:embed="rId3">
-            <a:extLst>
-              <a:ext uri="{28A0092B-C50C-407E-A947-70E740481C1C}">
-                <a14:useLocalDpi xmlns:a14="http://schemas.microsoft.com/office/drawing/2010/main" val="0"/>
-              </a:ext>
-            </a:extLst>
-          </a:blip>
-          <a:srcRect/>
-          <a:stretch>
-            <a:fillRect/>
-          </a:stretch>
-        </p:blipFill>
-        <p:spPr bwMode="auto">
-          <a:xfrm>
-            <a:off x="0" y="676657"/>
-            <a:ext cx="11681927" cy="6227996"/>
-          </a:xfrm>
-          <a:prstGeom prst="rect">
-            <a:avLst/>
-          </a:prstGeom>
-          <a:noFill/>
-          <a:ln>
-            <a:noFill/>
-          </a:ln>
-        </p:spPr>
-      </p:pic>
-    </p:spTree>
-  </p:cSld>
-  <p:clrMapOvr>
-    <a:masterClrMapping/>
-  </p:clrMapOvr>
-</p:sld>
-</file>
-
-<file path=ppt/slides/slide8.xml><?xml version="1.0" encoding="utf-8"?>
-<p:sld xmlns:a="http://schemas.openxmlformats.org/drawingml/2006/main" xmlns:r="http://schemas.openxmlformats.org/officeDocument/2006/relationships" xmlns:p="http://schemas.openxmlformats.org/presentationml/2006/main">
-  <p:cSld>
-    <p:spTree>
-      <p:nvGrpSpPr>
-        <p:cNvPr id="1" name=""/>
-        <p:cNvGrpSpPr/>
-        <p:nvPr/>
-      </p:nvGrpSpPr>
-      <p:grpSpPr>
-        <a:xfrm>
-          <a:off x="0" y="0"/>
-          <a:ext cx="0" cy="0"/>
-          <a:chOff x="0" y="0"/>
-          <a:chExt cx="0" cy="0"/>
-        </a:xfrm>
-      </p:grpSpPr>
-      <p:sp>
-        <p:nvSpPr>
-          <p:cNvPr id="2" name="Text 0"/>
-          <p:cNvSpPr/>
-          <p:nvPr/>
-        </p:nvSpPr>
-        <p:spPr>
-          <a:xfrm>
-            <a:off x="502920" y="292608"/>
-            <a:ext cx="8595360" cy="384048"/>
-          </a:xfrm>
-          <a:prstGeom prst="rect">
-            <a:avLst/>
-          </a:prstGeom>
-          <a:noFill/>
-          <a:ln/>
-        </p:spPr>
-        <p:txBody>
-          <a:bodyPr wrap="square" lIns="0" tIns="0" rIns="0" bIns="0" rtlCol="0" anchor="ctr">
-            <a:normAutofit/>
-          </a:bodyPr>
-          <a:lstStyle/>
-          <a:p>
-            <a:r>
-              <a:rPr lang="ru-RU" sz="1900" b="1" dirty="0">
-                <a:solidFill>
-                  <a:srgbClr val="202A36"/>
-                </a:solidFill>
-                <a:latin typeface="Times New Roman" panose="02020603050405020304" pitchFamily="18" charset="0"/>
-                <a:ea typeface="Arial" pitchFamily="34" charset="-122"/>
-                <a:cs typeface="Times New Roman" panose="02020603050405020304" pitchFamily="18" charset="0"/>
-              </a:rPr>
-              <a:t>Системный анализ </a:t>
-            </a:r>
-            <a:r>
-              <a:rPr lang="en-US" sz="1900" b="1" dirty="0">
-                <a:solidFill>
-                  <a:srgbClr val="202A36"/>
-                </a:solidFill>
-                <a:latin typeface="Times New Roman" panose="02020603050405020304" pitchFamily="18" charset="0"/>
-                <a:ea typeface="Arial" pitchFamily="34" charset="-122"/>
-                <a:cs typeface="Times New Roman" panose="02020603050405020304" pitchFamily="18" charset="0"/>
-              </a:rPr>
-              <a:t>IDEF0 AS-IS</a:t>
-            </a:r>
-            <a:endParaRPr lang="en-US" sz="1900" dirty="0">
-              <a:latin typeface="Times New Roman" panose="02020603050405020304" pitchFamily="18" charset="0"/>
-              <a:cs typeface="Times New Roman" panose="02020603050405020304" pitchFamily="18" charset="0"/>
-            </a:endParaRPr>
-          </a:p>
-        </p:txBody>
-      </p:sp>
-      <p:pic>
-        <p:nvPicPr>
-          <p:cNvPr id="6" name="Рисунок 5">
-            <a:extLst>
-              <a:ext uri="{FF2B5EF4-FFF2-40B4-BE49-F238E27FC236}">
-                <a16:creationId xmlns:a16="http://schemas.microsoft.com/office/drawing/2014/main" id="{E5180DCA-9DB9-4956-836F-8E9C383B4617}"/>
-              </a:ext>
-            </a:extLst>
-          </p:cNvPr>
-          <p:cNvPicPr/>
-          <p:nvPr/>
-        </p:nvPicPr>
-        <p:blipFill>
-          <a:blip r:embed="rId3">
-            <a:extLst>
-              <a:ext uri="{28A0092B-C50C-407E-A947-70E740481C1C}">
-                <a14:useLocalDpi xmlns:a14="http://schemas.microsoft.com/office/drawing/2010/main" val="0"/>
-              </a:ext>
-            </a:extLst>
-          </a:blip>
-          <a:srcRect/>
-          <a:stretch>
-            <a:fillRect/>
-          </a:stretch>
-        </p:blipFill>
-        <p:spPr bwMode="auto">
-          <a:xfrm>
-            <a:off x="-1" y="676657"/>
-            <a:ext cx="11694368" cy="6227996"/>
-          </a:xfrm>
-          <a:prstGeom prst="rect">
-            <a:avLst/>
-          </a:prstGeom>
-          <a:noFill/>
-          <a:ln>
-            <a:noFill/>
-          </a:ln>
-        </p:spPr>
-      </p:pic>
-    </p:spTree>
-  </p:cSld>
-  <p:clrMapOvr>
-    <a:masterClrMapping/>
-  </p:clrMapOvr>
-</p:sld>
-</file>
-
 <file path=ppt/slides/slide9.xml><?xml version="1.0" encoding="utf-8"?>
 <p:sld xmlns:a="http://schemas.openxmlformats.org/drawingml/2006/main" xmlns:r="http://schemas.openxmlformats.org/officeDocument/2006/relationships" xmlns:p="http://schemas.openxmlformats.org/presentationml/2006/main">
   <p:cSld>
@@ -10605,12 +10480,12 @@
         </p:spPr>
         <p:txBody>
           <a:bodyPr wrap="square" lIns="0" tIns="0" rIns="0" bIns="0" rtlCol="0" anchor="ctr">
-            <a:normAutofit/>
+            <a:noAutofit/>
           </a:bodyPr>
           <a:lstStyle/>
           <a:p>
             <a:r>
-              <a:rPr lang="ru-RU" sz="1900" b="1" dirty="0">
+              <a:rPr lang="ru-RU" sz="3200" b="1" dirty="0">
                 <a:solidFill>
                   <a:srgbClr val="202A36"/>
                 </a:solidFill>
@@ -10621,7 +10496,7 @@
               <a:t>Системный анализ </a:t>
             </a:r>
             <a:r>
-              <a:rPr lang="en-US" sz="1900" b="1" dirty="0">
+              <a:rPr lang="en-US" sz="3200" b="1" dirty="0">
                 <a:solidFill>
                   <a:srgbClr val="202A36"/>
                 </a:solidFill>
@@ -10629,9 +10504,9 @@
                 <a:ea typeface="Arial" pitchFamily="34" charset="-122"/>
                 <a:cs typeface="Times New Roman" panose="02020603050405020304" pitchFamily="18" charset="0"/>
               </a:rPr>
-              <a:t>DFD TO-BE</a:t>
-            </a:r>
-            <a:endParaRPr lang="en-US" sz="1900" dirty="0">
+              <a:t>IDEF0 TO-BE</a:t>
+            </a:r>
+            <a:endParaRPr lang="en-US" sz="3200" dirty="0">
               <a:latin typeface="Times New Roman" panose="02020603050405020304" pitchFamily="18" charset="0"/>
               <a:cs typeface="Times New Roman" panose="02020603050405020304" pitchFamily="18" charset="0"/>
             </a:endParaRPr>
@@ -10643,7 +10518,7 @@
           <p:cNvPr id="5" name="Рисунок 4">
             <a:extLst>
               <a:ext uri="{FF2B5EF4-FFF2-40B4-BE49-F238E27FC236}">
-                <a16:creationId xmlns:a16="http://schemas.microsoft.com/office/drawing/2014/main" id="{9EE8F14D-8E6E-4E86-B40A-B40CFEBD16C9}"/>
+                <a16:creationId xmlns:a16="http://schemas.microsoft.com/office/drawing/2014/main" id="{B18B80AB-26CD-4ADE-8B16-2E242D02126F}"/>
               </a:ext>
             </a:extLst>
           </p:cNvPr>
@@ -10651,7 +10526,7 @@
           <p:nvPr/>
         </p:nvPicPr>
         <p:blipFill>
-          <a:blip r:embed="rId3">
+          <a:blip r:embed="rId3" cstate="print">
             <a:extLst>
               <a:ext uri="{28A0092B-C50C-407E-A947-70E740481C1C}">
                 <a14:useLocalDpi xmlns:a14="http://schemas.microsoft.com/office/drawing/2010/main" val="0"/>
@@ -10666,7 +10541,7 @@
         <p:spPr bwMode="auto">
           <a:xfrm>
             <a:off x="0" y="676657"/>
-            <a:ext cx="11675706" cy="6227996"/>
+            <a:ext cx="11700588" cy="6227996"/>
           </a:xfrm>
           <a:prstGeom prst="rect">
             <a:avLst/>
@@ -10678,6 +10553,11 @@
         </p:spPr>
       </p:pic>
     </p:spTree>
+    <p:extLst>
+      <p:ext uri="{BB962C8B-B14F-4D97-AF65-F5344CB8AC3E}">
+        <p14:creationId xmlns:p14="http://schemas.microsoft.com/office/powerpoint/2010/main" val="427580508"/>
+      </p:ext>
+    </p:extLst>
   </p:cSld>
   <p:clrMapOvr>
     <a:masterClrMapping/>
